--- a/input/images-source/CRD_DTR_Flow.pptx
+++ b/input/images-source/CRD_DTR_Flow.pptx
@@ -3250,7 +3250,7 @@
           <a:p>
             <a:fld id="{FD8C879B-2DAC-426D-B5B4-08F42B952A26}" type="datetimeFigureOut">
               <a:rPr lang="en-US" smtClean="0"/>
-              <a:t>6/4/2026</a:t>
+              <a:t>6/5/2026</a:t>
             </a:fld>
             <a:endParaRPr lang="en-US" dirty="0"/>
           </a:p>
@@ -3427,7 +3427,7 @@
           <a:p>
             <a:fld id="{92E54576-A3BB-48F9-891E-992E86D01A7B}" type="datetimeFigureOut">
               <a:rPr lang="en-US" smtClean="0"/>
-              <a:t>6/4/2026</a:t>
+              <a:t>6/5/2026</a:t>
             </a:fld>
             <a:endParaRPr lang="en-US" dirty="0"/>
           </a:p>
@@ -7948,7 +7948,7 @@
           <a:p>
             <a:fld id="{41EA1E7C-71D6-4729-84AA-F013DDAF4032}" type="datetimeFigureOut">
               <a:rPr lang="en-US" smtClean="0"/>
-              <a:t>6/4/2026</a:t>
+              <a:t>6/5/2026</a:t>
             </a:fld>
             <a:endParaRPr lang="en-US" dirty="0"/>
           </a:p>
@@ -21693,10 +21693,10 @@
             <a:noFill/>
             <a:ln w="6350" cap="flat" cmpd="sng" algn="ctr">
               <a:solidFill>
-                <a:srgbClr val="000000">
+                <a:schemeClr val="tx1">
                   <a:lumMod val="50000"/>
                   <a:lumOff val="50000"/>
-                </a:srgbClr>
+                </a:schemeClr>
               </a:solidFill>
               <a:prstDash val="dash"/>
               <a:miter lim="800000"/>
@@ -23562,9 +23562,12 @@
             <a:noFill/>
             <a:ln w="6350" cap="flat" cmpd="sng" algn="ctr">
               <a:solidFill>
-                <a:srgbClr val="000000"/>
+                <a:schemeClr val="tx1">
+                  <a:lumMod val="50000"/>
+                  <a:lumOff val="50000"/>
+                </a:schemeClr>
               </a:solidFill>
-              <a:prstDash val="solid"/>
+              <a:prstDash val="dash"/>
               <a:miter lim="800000"/>
               <a:headEnd type="triangle"/>
               <a:tailEnd type="triangle"/>
@@ -23606,7 +23609,10 @@
               <a:r>
                 <a:rPr lang="en-US" sz="1050" kern="0" dirty="0">
                   <a:solidFill>
-                    <a:srgbClr val="000000"/>
+                    <a:schemeClr val="tx1">
+                      <a:lumMod val="65000"/>
+                      <a:lumOff val="35000"/>
+                    </a:schemeClr>
                   </a:solidFill>
                   <a:latin typeface="Calibri" panose="020F0502020204030204"/>
                   <a:ea typeface="ヒラギノ角ゴ Pro W3" pitchFamily="-126" charset="-128"/>
@@ -23826,8 +23832,8 @@
         </p:nvSpPr>
         <p:spPr>
           <a:xfrm>
-            <a:off x="8380188" y="4874975"/>
-            <a:ext cx="1302111" cy="307777"/>
+            <a:off x="8380188" y="4893081"/>
+            <a:ext cx="1302111" cy="256545"/>
           </a:xfrm>
           <a:prstGeom prst="rect">
             <a:avLst/>
@@ -23842,7 +23848,7 @@
           <a:p>
             <a:pPr algn="ctr" defTabSz="609585" fontAlgn="base">
               <a:lnSpc>
-                <a:spcPts val="1200"/>
+                <a:spcPts val="1000"/>
               </a:lnSpc>
               <a:spcBef>
                 <a:spcPct val="0"/>
@@ -23855,9 +23861,8 @@
             <a:r>
               <a:rPr lang="en-US" sz="950" i="1" kern="0" dirty="0">
                 <a:solidFill>
-                  <a:schemeClr val="tx1">
-                    <a:lumMod val="65000"/>
-                    <a:lumOff val="35000"/>
+                  <a:schemeClr val="accent1">
+                    <a:lumMod val="75000"/>
                   </a:schemeClr>
                 </a:solidFill>
                 <a:latin typeface="Calibri" panose="020F0502020204030204"/>
@@ -23868,9 +23873,8 @@
             </a:r>
             <a:endParaRPr lang="en-US" sz="950" i="1" kern="0" dirty="0">
               <a:solidFill>
-                <a:schemeClr val="tx1">
-                  <a:lumMod val="65000"/>
-                  <a:lumOff val="35000"/>
+                <a:schemeClr val="accent1">
+                  <a:lumMod val="75000"/>
                 </a:schemeClr>
               </a:solidFill>
               <a:ea typeface="ヒラギノ角ゴ Pro W3" pitchFamily="-126" charset="-128"/>
@@ -32015,27 +32019,12 @@
 </file>
 
 <file path=customXml/item1.xml><?xml version="1.0" encoding="utf-8"?>
-<p:properties xmlns:p="http://schemas.microsoft.com/office/2006/metadata/properties" xmlns:xsi="http://www.w3.org/2001/XMLSchema-instance" xmlns:pc="http://schemas.microsoft.com/office/infopath/2007/PartnerControls">
-  <documentManagement>
-    <SharedWithUsers xmlns="5bceed9a-bae5-4329-97ef-b259bd0b225e">
-      <UserInfo>
-        <DisplayName>Ambrose, Nalini</DisplayName>
-        <AccountId>13</AccountId>
-        <AccountType/>
-      </UserInfo>
-      <UserInfo>
-        <DisplayName>Lyall, Jessica</DisplayName>
-        <AccountId>178</AccountId>
-        <AccountType/>
-      </UserInfo>
-      <UserInfo>
-        <DisplayName>Horbachevsky, Olexa</DisplayName>
-        <AccountId>10</AccountId>
-        <AccountType/>
-      </UserInfo>
-    </SharedWithUsers>
-  </documentManagement>
-</p:properties>
+<?mso-contentType ?>
+<FormTemplates xmlns="http://schemas.microsoft.com/sharepoint/v3/contenttype/forms">
+  <Display>DocumentLibraryForm</Display>
+  <Edit>DocumentLibraryForm</Edit>
+  <New>DocumentLibraryForm</New>
+</FormTemplates>
 </file>
 
 <file path=customXml/item2.xml><?xml version="1.0" encoding="utf-8"?>
@@ -32236,27 +32225,33 @@
 </file>
 
 <file path=customXml/item3.xml><?xml version="1.0" encoding="utf-8"?>
-<?mso-contentType ?>
-<FormTemplates xmlns="http://schemas.microsoft.com/sharepoint/v3/contenttype/forms">
-  <Display>DocumentLibraryForm</Display>
-  <Edit>DocumentLibraryForm</Edit>
-  <New>DocumentLibraryForm</New>
-</FormTemplates>
+<p:properties xmlns:p="http://schemas.microsoft.com/office/2006/metadata/properties" xmlns:xsi="http://www.w3.org/2001/XMLSchema-instance" xmlns:pc="http://schemas.microsoft.com/office/infopath/2007/PartnerControls">
+  <documentManagement>
+    <SharedWithUsers xmlns="5bceed9a-bae5-4329-97ef-b259bd0b225e">
+      <UserInfo>
+        <DisplayName>Ambrose, Nalini</DisplayName>
+        <AccountId>13</AccountId>
+        <AccountType/>
+      </UserInfo>
+      <UserInfo>
+        <DisplayName>Lyall, Jessica</DisplayName>
+        <AccountId>178</AccountId>
+        <AccountType/>
+      </UserInfo>
+      <UserInfo>
+        <DisplayName>Horbachevsky, Olexa</DisplayName>
+        <AccountId>10</AccountId>
+        <AccountType/>
+      </UserInfo>
+    </SharedWithUsers>
+  </documentManagement>
+</p:properties>
 </file>
 
 <file path=customXml/itemProps1.xml><?xml version="1.0" encoding="utf-8"?>
-<ds:datastoreItem xmlns:ds="http://schemas.openxmlformats.org/officeDocument/2006/customXml" ds:itemID="{5450FCDD-08B1-48D8-BB50-7A17E590A5EE}">
+<ds:datastoreItem xmlns:ds="http://schemas.openxmlformats.org/officeDocument/2006/customXml" ds:itemID="{416BA5C9-2D71-4B86-AE8A-8C0D9BC5FB22}">
   <ds:schemaRefs>
-    <ds:schemaRef ds:uri="http://purl.org/dc/terms/"/>
-    <ds:schemaRef ds:uri="http://schemas.openxmlformats.org/package/2006/metadata/core-properties"/>
-    <ds:schemaRef ds:uri="http://purl.org/dc/dcmitype/"/>
-    <ds:schemaRef ds:uri="http://schemas.microsoft.com/office/infopath/2007/PartnerControls"/>
-    <ds:schemaRef ds:uri="http://schemas.microsoft.com/office/2006/documentManagement/types"/>
-    <ds:schemaRef ds:uri="5bceed9a-bae5-4329-97ef-b259bd0b225e"/>
-    <ds:schemaRef ds:uri="http://purl.org/dc/elements/1.1/"/>
-    <ds:schemaRef ds:uri="http://schemas.microsoft.com/office/2006/metadata/properties"/>
-    <ds:schemaRef ds:uri="c6e6fbc9-cbf1-42ee-bbf0-d6e110e2b732"/>
-    <ds:schemaRef ds:uri="http://www.w3.org/XML/1998/namespace"/>
+    <ds:schemaRef ds:uri="http://schemas.microsoft.com/sharepoint/v3/contenttype/forms"/>
   </ds:schemaRefs>
 </ds:datastoreItem>
 </file>
@@ -32281,9 +32276,18 @@
 </file>
 
 <file path=customXml/itemProps3.xml><?xml version="1.0" encoding="utf-8"?>
-<ds:datastoreItem xmlns:ds="http://schemas.openxmlformats.org/officeDocument/2006/customXml" ds:itemID="{416BA5C9-2D71-4B86-AE8A-8C0D9BC5FB22}">
+<ds:datastoreItem xmlns:ds="http://schemas.openxmlformats.org/officeDocument/2006/customXml" ds:itemID="{5450FCDD-08B1-48D8-BB50-7A17E590A5EE}">
   <ds:schemaRefs>
-    <ds:schemaRef ds:uri="http://schemas.microsoft.com/sharepoint/v3/contenttype/forms"/>
+    <ds:schemaRef ds:uri="http://purl.org/dc/terms/"/>
+    <ds:schemaRef ds:uri="http://schemas.openxmlformats.org/package/2006/metadata/core-properties"/>
+    <ds:schemaRef ds:uri="http://purl.org/dc/dcmitype/"/>
+    <ds:schemaRef ds:uri="http://schemas.microsoft.com/office/infopath/2007/PartnerControls"/>
+    <ds:schemaRef ds:uri="http://schemas.microsoft.com/office/2006/documentManagement/types"/>
+    <ds:schemaRef ds:uri="5bceed9a-bae5-4329-97ef-b259bd0b225e"/>
+    <ds:schemaRef ds:uri="http://purl.org/dc/elements/1.1/"/>
+    <ds:schemaRef ds:uri="http://schemas.microsoft.com/office/2006/metadata/properties"/>
+    <ds:schemaRef ds:uri="c6e6fbc9-cbf1-42ee-bbf0-d6e110e2b732"/>
+    <ds:schemaRef ds:uri="http://www.w3.org/XML/1998/namespace"/>
   </ds:schemaRefs>
 </ds:datastoreItem>
 </file>
--- a/input/images-source/CRD_DTR_Flow.pptx
+++ b/input/images-source/CRD_DTR_Flow.pptx
@@ -17,8 +17,8 @@
     <p:sldId id="2919" r:id="rId8"/>
     <p:sldId id="2922" r:id="rId9"/>
     <p:sldId id="2923" r:id="rId10"/>
-    <p:sldId id="2927" r:id="rId11"/>
-    <p:sldId id="2147483217" r:id="rId12"/>
+    <p:sldId id="2147483218" r:id="rId11"/>
+    <p:sldId id="2927" r:id="rId12"/>
     <p:sldId id="2147483216" r:id="rId13"/>
   </p:sldIdLst>
   <p:sldSz cx="12192000" cy="6858000"/>
@@ -126,8 +126,8 @@
             <p14:sldId id="2919"/>
             <p14:sldId id="2922"/>
             <p14:sldId id="2923"/>
+            <p14:sldId id="2147483218"/>
             <p14:sldId id="2927"/>
-            <p14:sldId id="2147483217"/>
             <p14:sldId id="2147483216"/>
           </p14:sldIdLst>
         </p14:section>
@@ -3250,7 +3250,7 @@
           <a:p>
             <a:fld id="{FD8C879B-2DAC-426D-B5B4-08F42B952A26}" type="datetimeFigureOut">
               <a:rPr lang="en-US" smtClean="0"/>
-              <a:t>6/5/2026</a:t>
+              <a:t>6/24/2026</a:t>
             </a:fld>
             <a:endParaRPr lang="en-US" dirty="0"/>
           </a:p>
@@ -3427,7 +3427,7 @@
           <a:p>
             <a:fld id="{92E54576-A3BB-48F9-891E-992E86D01A7B}" type="datetimeFigureOut">
               <a:rPr lang="en-US" smtClean="0"/>
-              <a:t>6/5/2026</a:t>
+              <a:t>6/24/2026</a:t>
             </a:fld>
             <a:endParaRPr lang="en-US" dirty="0"/>
           </a:p>
@@ -3794,6 +3794,122 @@
         <p:cNvPr id="1" name="">
           <a:extLst>
             <a:ext uri="{FF2B5EF4-FFF2-40B4-BE49-F238E27FC236}">
+              <a16:creationId xmlns:a16="http://schemas.microsoft.com/office/drawing/2014/main" id="{962C4EE7-E7B8-5F75-A8EC-4A793E3B1E45}"/>
+            </a:ext>
+          </a:extLst>
+        </p:cNvPr>
+        <p:cNvGrpSpPr/>
+        <p:nvPr/>
+      </p:nvGrpSpPr>
+      <p:grpSpPr>
+        <a:xfrm>
+          <a:off x="0" y="0"/>
+          <a:ext cx="0" cy="0"/>
+          <a:chOff x="0" y="0"/>
+          <a:chExt cx="0" cy="0"/>
+        </a:xfrm>
+      </p:grpSpPr>
+      <p:sp>
+        <p:nvSpPr>
+          <p:cNvPr id="2" name="Slide Image Placeholder 1">
+            <a:extLst>
+              <a:ext uri="{FF2B5EF4-FFF2-40B4-BE49-F238E27FC236}">
+                <a16:creationId xmlns:a16="http://schemas.microsoft.com/office/drawing/2014/main" id="{32C831DA-D1D2-9C80-42AC-84BA5A20DFE2}"/>
+              </a:ext>
+            </a:extLst>
+          </p:cNvPr>
+          <p:cNvSpPr>
+            <a:spLocks noGrp="1" noRot="1" noChangeAspect="1"/>
+          </p:cNvSpPr>
+          <p:nvPr>
+            <p:ph type="sldImg"/>
+          </p:nvPr>
+        </p:nvSpPr>
+        <p:spPr/>
+      </p:sp>
+      <p:sp>
+        <p:nvSpPr>
+          <p:cNvPr id="3" name="Notes Placeholder 2">
+            <a:extLst>
+              <a:ext uri="{FF2B5EF4-FFF2-40B4-BE49-F238E27FC236}">
+                <a16:creationId xmlns:a16="http://schemas.microsoft.com/office/drawing/2014/main" id="{C97E2700-F24B-1BF2-58EE-37C4F052740F}"/>
+              </a:ext>
+            </a:extLst>
+          </p:cNvPr>
+          <p:cNvSpPr>
+            <a:spLocks noGrp="1"/>
+          </p:cNvSpPr>
+          <p:nvPr>
+            <p:ph type="body" idx="1"/>
+          </p:nvPr>
+        </p:nvSpPr>
+        <p:spPr/>
+        <p:txBody>
+          <a:bodyPr/>
+          <a:lstStyle/>
+          <a:p>
+            <a:endParaRPr lang="en-US" sz="1200" kern="1200" dirty="0">
+              <a:solidFill>
+                <a:schemeClr val="tx1"/>
+              </a:solidFill>
+              <a:effectLst/>
+              <a:latin typeface="+mn-lt"/>
+              <a:ea typeface="+mn-ea"/>
+              <a:cs typeface="+mn-cs"/>
+            </a:endParaRPr>
+          </a:p>
+        </p:txBody>
+      </p:sp>
+      <p:sp>
+        <p:nvSpPr>
+          <p:cNvPr id="4" name="Slide Number Placeholder 3">
+            <a:extLst>
+              <a:ext uri="{FF2B5EF4-FFF2-40B4-BE49-F238E27FC236}">
+                <a16:creationId xmlns:a16="http://schemas.microsoft.com/office/drawing/2014/main" id="{3EFEB529-7915-3AE9-1BF4-4B6B27184272}"/>
+              </a:ext>
+            </a:extLst>
+          </p:cNvPr>
+          <p:cNvSpPr>
+            <a:spLocks noGrp="1"/>
+          </p:cNvSpPr>
+          <p:nvPr>
+            <p:ph type="sldNum" sz="quarter" idx="5"/>
+          </p:nvPr>
+        </p:nvSpPr>
+        <p:spPr/>
+        <p:txBody>
+          <a:bodyPr/>
+          <a:lstStyle/>
+          <a:p>
+            <a:fld id="{D58F3C89-9E49-4851-A18A-DAECD34FD650}" type="slidenum">
+              <a:rPr lang="en-US" smtClean="0"/>
+              <a:t>4</a:t>
+            </a:fld>
+            <a:endParaRPr lang="en-US" dirty="0"/>
+          </a:p>
+        </p:txBody>
+      </p:sp>
+    </p:spTree>
+    <p:extLst>
+      <p:ext uri="{BB962C8B-B14F-4D97-AF65-F5344CB8AC3E}">
+        <p14:creationId xmlns:p14="http://schemas.microsoft.com/office/powerpoint/2010/main" val="1507289651"/>
+      </p:ext>
+    </p:extLst>
+  </p:cSld>
+  <p:clrMapOvr>
+    <a:masterClrMapping/>
+  </p:clrMapOvr>
+</p:notes>
+</file>
+
+<file path=ppt/notesSlides/notesSlide3.xml><?xml version="1.0" encoding="utf-8"?>
+<p:notes xmlns:a="http://schemas.openxmlformats.org/drawingml/2006/main" xmlns:r="http://schemas.openxmlformats.org/officeDocument/2006/relationships" xmlns:p="http://schemas.openxmlformats.org/presentationml/2006/main">
+  <p:cSld>
+    <p:spTree>
+      <p:nvGrpSpPr>
+        <p:cNvPr id="1" name="">
+          <a:extLst>
+            <a:ext uri="{FF2B5EF4-FFF2-40B4-BE49-F238E27FC236}">
               <a16:creationId xmlns:a16="http://schemas.microsoft.com/office/drawing/2014/main" id="{AE6D4C1B-AB5B-66E8-4294-C422F1F8A076}"/>
             </a:ext>
           </a:extLst>
@@ -3883,7 +3999,7 @@
           <a:p>
             <a:fld id="{D58F3C89-9E49-4851-A18A-DAECD34FD650}" type="slidenum">
               <a:rPr lang="en-US" smtClean="0"/>
-              <a:t>4</a:t>
+              <a:t>5</a:t>
             </a:fld>
             <a:endParaRPr lang="en-US" dirty="0"/>
           </a:p>
@@ -3893,122 +4009,6 @@
     <p:extLst>
       <p:ext uri="{BB962C8B-B14F-4D97-AF65-F5344CB8AC3E}">
         <p14:creationId xmlns:p14="http://schemas.microsoft.com/office/powerpoint/2010/main" val="4130590090"/>
-      </p:ext>
-    </p:extLst>
-  </p:cSld>
-  <p:clrMapOvr>
-    <a:masterClrMapping/>
-  </p:clrMapOvr>
-</p:notes>
-</file>
-
-<file path=ppt/notesSlides/notesSlide3.xml><?xml version="1.0" encoding="utf-8"?>
-<p:notes xmlns:a="http://schemas.openxmlformats.org/drawingml/2006/main" xmlns:r="http://schemas.openxmlformats.org/officeDocument/2006/relationships" xmlns:p="http://schemas.openxmlformats.org/presentationml/2006/main">
-  <p:cSld>
-    <p:spTree>
-      <p:nvGrpSpPr>
-        <p:cNvPr id="1" name="">
-          <a:extLst>
-            <a:ext uri="{FF2B5EF4-FFF2-40B4-BE49-F238E27FC236}">
-              <a16:creationId xmlns:a16="http://schemas.microsoft.com/office/drawing/2014/main" id="{E5221AF4-6264-3B47-3082-60081FA4C8DC}"/>
-            </a:ext>
-          </a:extLst>
-        </p:cNvPr>
-        <p:cNvGrpSpPr/>
-        <p:nvPr/>
-      </p:nvGrpSpPr>
-      <p:grpSpPr>
-        <a:xfrm>
-          <a:off x="0" y="0"/>
-          <a:ext cx="0" cy="0"/>
-          <a:chOff x="0" y="0"/>
-          <a:chExt cx="0" cy="0"/>
-        </a:xfrm>
-      </p:grpSpPr>
-      <p:sp>
-        <p:nvSpPr>
-          <p:cNvPr id="2" name="Slide Image Placeholder 1">
-            <a:extLst>
-              <a:ext uri="{FF2B5EF4-FFF2-40B4-BE49-F238E27FC236}">
-                <a16:creationId xmlns:a16="http://schemas.microsoft.com/office/drawing/2014/main" id="{34269804-3758-DEC9-B444-41BD1DCEEB06}"/>
-              </a:ext>
-            </a:extLst>
-          </p:cNvPr>
-          <p:cNvSpPr>
-            <a:spLocks noGrp="1" noRot="1" noChangeAspect="1"/>
-          </p:cNvSpPr>
-          <p:nvPr>
-            <p:ph type="sldImg"/>
-          </p:nvPr>
-        </p:nvSpPr>
-        <p:spPr/>
-      </p:sp>
-      <p:sp>
-        <p:nvSpPr>
-          <p:cNvPr id="3" name="Notes Placeholder 2">
-            <a:extLst>
-              <a:ext uri="{FF2B5EF4-FFF2-40B4-BE49-F238E27FC236}">
-                <a16:creationId xmlns:a16="http://schemas.microsoft.com/office/drawing/2014/main" id="{660E70A8-AA7D-132C-33CD-2058879B894F}"/>
-              </a:ext>
-            </a:extLst>
-          </p:cNvPr>
-          <p:cNvSpPr>
-            <a:spLocks noGrp="1"/>
-          </p:cNvSpPr>
-          <p:nvPr>
-            <p:ph type="body" idx="1"/>
-          </p:nvPr>
-        </p:nvSpPr>
-        <p:spPr/>
-        <p:txBody>
-          <a:bodyPr/>
-          <a:lstStyle/>
-          <a:p>
-            <a:endParaRPr lang="en-US" sz="1200" kern="1200" dirty="0">
-              <a:solidFill>
-                <a:schemeClr val="tx1"/>
-              </a:solidFill>
-              <a:effectLst/>
-              <a:latin typeface="+mn-lt"/>
-              <a:ea typeface="+mn-ea"/>
-              <a:cs typeface="+mn-cs"/>
-            </a:endParaRPr>
-          </a:p>
-        </p:txBody>
-      </p:sp>
-      <p:sp>
-        <p:nvSpPr>
-          <p:cNvPr id="4" name="Slide Number Placeholder 3">
-            <a:extLst>
-              <a:ext uri="{FF2B5EF4-FFF2-40B4-BE49-F238E27FC236}">
-                <a16:creationId xmlns:a16="http://schemas.microsoft.com/office/drawing/2014/main" id="{A1330EDB-5F37-2787-B169-2E027395DD13}"/>
-              </a:ext>
-            </a:extLst>
-          </p:cNvPr>
-          <p:cNvSpPr>
-            <a:spLocks noGrp="1"/>
-          </p:cNvSpPr>
-          <p:nvPr>
-            <p:ph type="sldNum" sz="quarter" idx="5"/>
-          </p:nvPr>
-        </p:nvSpPr>
-        <p:spPr/>
-        <p:txBody>
-          <a:bodyPr/>
-          <a:lstStyle/>
-          <a:p>
-            <a:fld id="{D58F3C89-9E49-4851-A18A-DAECD34FD650}" type="slidenum">
-              <a:rPr lang="en-US" smtClean="0"/>
-              <a:t>5</a:t>
-            </a:fld>
-            <a:endParaRPr lang="en-US" dirty="0"/>
-          </a:p>
-        </p:txBody>
-      </p:sp>
-    </p:spTree>
-    <p:extLst>
-      <p:ext uri="{BB962C8B-B14F-4D97-AF65-F5344CB8AC3E}">
-        <p14:creationId xmlns:p14="http://schemas.microsoft.com/office/powerpoint/2010/main" val="2331249974"/>
       </p:ext>
     </p:extLst>
   </p:cSld>
@@ -7948,7 +7948,7 @@
           <a:p>
             <a:fld id="{41EA1E7C-71D6-4729-84AA-F013DDAF4032}" type="datetimeFigureOut">
               <a:rPr lang="en-US" smtClean="0"/>
-              <a:t>6/5/2026</a:t>
+              <a:t>6/24/2026</a:t>
             </a:fld>
             <a:endParaRPr lang="en-US" dirty="0"/>
           </a:p>
@@ -20460,6 +20460,4241 @@
         <p:cNvPr id="1" name="">
           <a:extLst>
             <a:ext uri="{FF2B5EF4-FFF2-40B4-BE49-F238E27FC236}">
+              <a16:creationId xmlns:a16="http://schemas.microsoft.com/office/drawing/2014/main" id="{B32D8FB5-8B9D-BB9E-4D93-DC4473B9C705}"/>
+            </a:ext>
+          </a:extLst>
+        </p:cNvPr>
+        <p:cNvGrpSpPr/>
+        <p:nvPr/>
+      </p:nvGrpSpPr>
+      <p:grpSpPr>
+        <a:xfrm>
+          <a:off x="0" y="0"/>
+          <a:ext cx="0" cy="0"/>
+          <a:chOff x="0" y="0"/>
+          <a:chExt cx="0" cy="0"/>
+        </a:xfrm>
+      </p:grpSpPr>
+      <p:sp>
+        <p:nvSpPr>
+          <p:cNvPr id="91" name="Rectangle: Rounded Corners 90">
+            <a:extLst>
+              <a:ext uri="{FF2B5EF4-FFF2-40B4-BE49-F238E27FC236}">
+                <a16:creationId xmlns:a16="http://schemas.microsoft.com/office/drawing/2014/main" id="{7A7C48AF-DEA9-4DEB-2842-7A670AF04397}"/>
+              </a:ext>
+            </a:extLst>
+          </p:cNvPr>
+          <p:cNvSpPr/>
+          <p:nvPr/>
+        </p:nvSpPr>
+        <p:spPr>
+          <a:xfrm>
+            <a:off x="2006052" y="1615302"/>
+            <a:ext cx="5415575" cy="605199"/>
+          </a:xfrm>
+          <a:prstGeom prst="roundRect">
+            <a:avLst>
+              <a:gd name="adj" fmla="val 0"/>
+            </a:avLst>
+          </a:prstGeom>
+          <a:solidFill>
+            <a:srgbClr val="FBF4F3"/>
+          </a:solidFill>
+          <a:ln w="3175" cap="flat" cmpd="sng" algn="ctr">
+            <a:solidFill>
+              <a:schemeClr val="accent2">
+                <a:lumMod val="40000"/>
+                <a:lumOff val="60000"/>
+              </a:schemeClr>
+            </a:solidFill>
+            <a:prstDash val="solid"/>
+            <a:miter lim="800000"/>
+          </a:ln>
+          <a:effectLst/>
+        </p:spPr>
+        <p:txBody>
+          <a:bodyPr lIns="0" rIns="0" rtlCol="0" anchor="ctr"/>
+          <a:lstStyle/>
+          <a:p>
+            <a:pPr algn="ctr" defTabSz="1219170">
+              <a:defRPr/>
+            </a:pPr>
+            <a:endParaRPr lang="en-US" sz="1091" kern="0" dirty="0">
+              <a:solidFill>
+                <a:srgbClr val="000000"/>
+              </a:solidFill>
+              <a:latin typeface="Calibri" panose="020F0502020204030204" pitchFamily="34" charset="0"/>
+              <a:ea typeface="ヒラギノ角ゴ Pro W3" pitchFamily="-126" charset="-128"/>
+              <a:cs typeface="Calibri" panose="020F0502020204030204" pitchFamily="34" charset="0"/>
+            </a:endParaRPr>
+          </a:p>
+        </p:txBody>
+      </p:sp>
+      <p:sp>
+        <p:nvSpPr>
+          <p:cNvPr id="2" name="Rectangle: Rounded Corners 1">
+            <a:extLst>
+              <a:ext uri="{FF2B5EF4-FFF2-40B4-BE49-F238E27FC236}">
+                <a16:creationId xmlns:a16="http://schemas.microsoft.com/office/drawing/2014/main" id="{DAC5F709-A8D8-CD16-7A3F-9D826C640C89}"/>
+              </a:ext>
+            </a:extLst>
+          </p:cNvPr>
+          <p:cNvSpPr/>
+          <p:nvPr/>
+        </p:nvSpPr>
+        <p:spPr>
+          <a:xfrm>
+            <a:off x="6545748" y="824396"/>
+            <a:ext cx="4160520" cy="668172"/>
+          </a:xfrm>
+          <a:prstGeom prst="roundRect">
+            <a:avLst>
+              <a:gd name="adj" fmla="val 11189"/>
+            </a:avLst>
+          </a:prstGeom>
+          <a:solidFill>
+            <a:srgbClr val="F6F5EE"/>
+          </a:solidFill>
+          <a:ln w="3175" cap="flat" cmpd="sng" algn="ctr">
+            <a:solidFill>
+              <a:srgbClr val="EEECE1">
+                <a:lumMod val="50000"/>
+              </a:srgbClr>
+            </a:solidFill>
+            <a:prstDash val="solid"/>
+          </a:ln>
+          <a:effectLst>
+            <a:outerShdw blurRad="50800" dist="38100" dir="2700000" algn="tl" rotWithShape="0">
+              <a:prstClr val="black">
+                <a:alpha val="40000"/>
+              </a:prstClr>
+            </a:outerShdw>
+          </a:effectLst>
+        </p:spPr>
+        <p:txBody>
+          <a:bodyPr rtlCol="0" anchor="ctr"/>
+          <a:lstStyle/>
+          <a:p>
+            <a:pPr algn="ctr" defTabSz="609585" fontAlgn="base">
+              <a:spcBef>
+                <a:spcPct val="0"/>
+              </a:spcBef>
+              <a:spcAft>
+                <a:spcPct val="0"/>
+              </a:spcAft>
+              <a:defRPr/>
+            </a:pPr>
+            <a:endParaRPr lang="en-US" sz="2400" kern="0" dirty="0">
+              <a:solidFill>
+                <a:prstClr val="white"/>
+              </a:solidFill>
+              <a:latin typeface="Arial"/>
+            </a:endParaRPr>
+          </a:p>
+        </p:txBody>
+      </p:sp>
+      <p:sp>
+        <p:nvSpPr>
+          <p:cNvPr id="3" name="Rectangle: Rounded Corners 2">
+            <a:extLst>
+              <a:ext uri="{FF2B5EF4-FFF2-40B4-BE49-F238E27FC236}">
+                <a16:creationId xmlns:a16="http://schemas.microsoft.com/office/drawing/2014/main" id="{A4C57C79-CEB3-62A2-0FD9-C17991DC1C3A}"/>
+              </a:ext>
+            </a:extLst>
+          </p:cNvPr>
+          <p:cNvSpPr/>
+          <p:nvPr/>
+        </p:nvSpPr>
+        <p:spPr>
+          <a:xfrm>
+            <a:off x="1052709" y="828275"/>
+            <a:ext cx="4086777" cy="668172"/>
+          </a:xfrm>
+          <a:prstGeom prst="roundRect">
+            <a:avLst>
+              <a:gd name="adj" fmla="val 11189"/>
+            </a:avLst>
+          </a:prstGeom>
+          <a:solidFill>
+            <a:srgbClr val="F6F5EE"/>
+          </a:solidFill>
+          <a:ln w="3175" cap="flat" cmpd="sng" algn="ctr">
+            <a:solidFill>
+              <a:srgbClr val="EEECE1">
+                <a:lumMod val="50000"/>
+              </a:srgbClr>
+            </a:solidFill>
+            <a:prstDash val="solid"/>
+          </a:ln>
+          <a:effectLst>
+            <a:outerShdw blurRad="50800" dist="38100" dir="2700000" algn="tl" rotWithShape="0">
+              <a:prstClr val="black">
+                <a:alpha val="40000"/>
+              </a:prstClr>
+            </a:outerShdw>
+          </a:effectLst>
+        </p:spPr>
+        <p:txBody>
+          <a:bodyPr rtlCol="0" anchor="ctr"/>
+          <a:lstStyle/>
+          <a:p>
+            <a:pPr algn="ctr" defTabSz="609585" fontAlgn="base">
+              <a:spcBef>
+                <a:spcPct val="0"/>
+              </a:spcBef>
+              <a:spcAft>
+                <a:spcPct val="0"/>
+              </a:spcAft>
+              <a:defRPr/>
+            </a:pPr>
+            <a:endParaRPr lang="en-US" sz="2400" kern="0" dirty="0">
+              <a:solidFill>
+                <a:prstClr val="white"/>
+              </a:solidFill>
+              <a:latin typeface="Arial"/>
+            </a:endParaRPr>
+          </a:p>
+        </p:txBody>
+      </p:sp>
+      <p:cxnSp>
+        <p:nvCxnSpPr>
+          <p:cNvPr id="4" name="Straight Connector 3">
+            <a:extLst>
+              <a:ext uri="{FF2B5EF4-FFF2-40B4-BE49-F238E27FC236}">
+                <a16:creationId xmlns:a16="http://schemas.microsoft.com/office/drawing/2014/main" id="{C91FFA69-51A3-ECB5-43EF-166D9F6E6197}"/>
+              </a:ext>
+            </a:extLst>
+          </p:cNvPr>
+          <p:cNvCxnSpPr>
+            <a:cxnSpLocks/>
+          </p:cNvCxnSpPr>
+          <p:nvPr/>
+        </p:nvCxnSpPr>
+        <p:spPr>
+          <a:xfrm>
+            <a:off x="3081108" y="1387623"/>
+            <a:ext cx="0" cy="4754880"/>
+          </a:xfrm>
+          <a:prstGeom prst="line">
+            <a:avLst/>
+          </a:prstGeom>
+          <a:noFill/>
+          <a:ln w="6350" cap="flat" cmpd="sng" algn="ctr">
+            <a:solidFill>
+              <a:srgbClr val="FFFFFF">
+                <a:lumMod val="75000"/>
+              </a:srgbClr>
+            </a:solidFill>
+            <a:prstDash val="dash"/>
+            <a:miter lim="800000"/>
+          </a:ln>
+          <a:effectLst/>
+        </p:spPr>
+      </p:cxnSp>
+      <p:cxnSp>
+        <p:nvCxnSpPr>
+          <p:cNvPr id="5" name="Straight Connector 4">
+            <a:extLst>
+              <a:ext uri="{FF2B5EF4-FFF2-40B4-BE49-F238E27FC236}">
+                <a16:creationId xmlns:a16="http://schemas.microsoft.com/office/drawing/2014/main" id="{0536C0BA-F1A8-4BF3-73CA-AA30DA9B0653}"/>
+              </a:ext>
+            </a:extLst>
+          </p:cNvPr>
+          <p:cNvCxnSpPr>
+            <a:cxnSpLocks/>
+          </p:cNvCxnSpPr>
+          <p:nvPr/>
+        </p:nvCxnSpPr>
+        <p:spPr>
+          <a:xfrm>
+            <a:off x="4576530" y="1387623"/>
+            <a:ext cx="0" cy="4754880"/>
+          </a:xfrm>
+          <a:prstGeom prst="line">
+            <a:avLst/>
+          </a:prstGeom>
+          <a:noFill/>
+          <a:ln w="6350" cap="flat" cmpd="sng" algn="ctr">
+            <a:solidFill>
+              <a:srgbClr val="FFFFFF">
+                <a:lumMod val="75000"/>
+              </a:srgbClr>
+            </a:solidFill>
+            <a:prstDash val="dash"/>
+            <a:miter lim="800000"/>
+          </a:ln>
+          <a:effectLst/>
+        </p:spPr>
+      </p:cxnSp>
+      <p:cxnSp>
+        <p:nvCxnSpPr>
+          <p:cNvPr id="6" name="Straight Connector 5">
+            <a:extLst>
+              <a:ext uri="{FF2B5EF4-FFF2-40B4-BE49-F238E27FC236}">
+                <a16:creationId xmlns:a16="http://schemas.microsoft.com/office/drawing/2014/main" id="{9EAE761E-C6C1-6276-CF69-0D15FF745CDF}"/>
+              </a:ext>
+            </a:extLst>
+          </p:cNvPr>
+          <p:cNvCxnSpPr>
+            <a:cxnSpLocks/>
+          </p:cNvCxnSpPr>
+          <p:nvPr/>
+        </p:nvCxnSpPr>
+        <p:spPr>
+          <a:xfrm>
+            <a:off x="7196868" y="1387623"/>
+            <a:ext cx="0" cy="4754880"/>
+          </a:xfrm>
+          <a:prstGeom prst="line">
+            <a:avLst/>
+          </a:prstGeom>
+          <a:noFill/>
+          <a:ln w="6350" cap="flat" cmpd="sng" algn="ctr">
+            <a:solidFill>
+              <a:srgbClr val="FFFFFF">
+                <a:lumMod val="75000"/>
+              </a:srgbClr>
+            </a:solidFill>
+            <a:prstDash val="dash"/>
+            <a:miter lim="800000"/>
+          </a:ln>
+          <a:effectLst/>
+        </p:spPr>
+      </p:cxnSp>
+      <p:cxnSp>
+        <p:nvCxnSpPr>
+          <p:cNvPr id="7" name="Straight Connector 6">
+            <a:extLst>
+              <a:ext uri="{FF2B5EF4-FFF2-40B4-BE49-F238E27FC236}">
+                <a16:creationId xmlns:a16="http://schemas.microsoft.com/office/drawing/2014/main" id="{4D0DCB93-4198-56E6-9C6F-BA0E4715A2F3}"/>
+              </a:ext>
+            </a:extLst>
+          </p:cNvPr>
+          <p:cNvCxnSpPr>
+            <a:cxnSpLocks/>
+          </p:cNvCxnSpPr>
+          <p:nvPr/>
+        </p:nvCxnSpPr>
+        <p:spPr>
+          <a:xfrm>
+            <a:off x="8633474" y="1387623"/>
+            <a:ext cx="0" cy="4754880"/>
+          </a:xfrm>
+          <a:prstGeom prst="line">
+            <a:avLst/>
+          </a:prstGeom>
+          <a:noFill/>
+          <a:ln w="6350" cap="flat" cmpd="sng" algn="ctr">
+            <a:solidFill>
+              <a:srgbClr val="FFFFFF">
+                <a:lumMod val="75000"/>
+              </a:srgbClr>
+            </a:solidFill>
+            <a:prstDash val="dash"/>
+            <a:miter lim="800000"/>
+          </a:ln>
+          <a:effectLst/>
+        </p:spPr>
+      </p:cxnSp>
+      <p:cxnSp>
+        <p:nvCxnSpPr>
+          <p:cNvPr id="8" name="Straight Connector 7">
+            <a:extLst>
+              <a:ext uri="{FF2B5EF4-FFF2-40B4-BE49-F238E27FC236}">
+                <a16:creationId xmlns:a16="http://schemas.microsoft.com/office/drawing/2014/main" id="{8C512DC5-7BF8-3DCD-995C-E4737C0E9DFC}"/>
+              </a:ext>
+            </a:extLst>
+          </p:cNvPr>
+          <p:cNvCxnSpPr>
+            <a:cxnSpLocks/>
+          </p:cNvCxnSpPr>
+          <p:nvPr/>
+        </p:nvCxnSpPr>
+        <p:spPr>
+          <a:xfrm>
+            <a:off x="1635861" y="1387623"/>
+            <a:ext cx="0" cy="4754880"/>
+          </a:xfrm>
+          <a:prstGeom prst="line">
+            <a:avLst/>
+          </a:prstGeom>
+          <a:noFill/>
+          <a:ln w="6350" cap="flat" cmpd="sng" algn="ctr">
+            <a:solidFill>
+              <a:srgbClr val="FFFFFF">
+                <a:lumMod val="75000"/>
+              </a:srgbClr>
+            </a:solidFill>
+            <a:prstDash val="dash"/>
+            <a:miter lim="800000"/>
+          </a:ln>
+          <a:effectLst/>
+        </p:spPr>
+      </p:cxnSp>
+      <p:sp>
+        <p:nvSpPr>
+          <p:cNvPr id="9" name="TextBox 8">
+            <a:extLst>
+              <a:ext uri="{FF2B5EF4-FFF2-40B4-BE49-F238E27FC236}">
+                <a16:creationId xmlns:a16="http://schemas.microsoft.com/office/drawing/2014/main" id="{C6156A0B-E773-1CA9-B345-39A3072F17B9}"/>
+              </a:ext>
+            </a:extLst>
+          </p:cNvPr>
+          <p:cNvSpPr txBox="1"/>
+          <p:nvPr/>
+        </p:nvSpPr>
+        <p:spPr>
+          <a:xfrm>
+            <a:off x="6631607" y="803135"/>
+            <a:ext cx="4086776" cy="260199"/>
+          </a:xfrm>
+          <a:prstGeom prst="rect">
+            <a:avLst/>
+          </a:prstGeom>
+          <a:noFill/>
+        </p:spPr>
+        <p:txBody>
+          <a:bodyPr wrap="square">
+            <a:spAutoFit/>
+          </a:bodyPr>
+          <a:lstStyle/>
+          <a:p>
+            <a:pPr algn="ctr" defTabSz="609585" fontAlgn="base">
+              <a:spcBef>
+                <a:spcPct val="0"/>
+              </a:spcBef>
+              <a:spcAft>
+                <a:spcPct val="0"/>
+              </a:spcAft>
+            </a:pPr>
+            <a:r>
+              <a:rPr lang="en-US" sz="1100" b="1" kern="0" dirty="0">
+                <a:solidFill>
+                  <a:srgbClr val="000000"/>
+                </a:solidFill>
+                <a:ea typeface="ヒラギノ角ゴ Pro W3" pitchFamily="-126" charset="-128"/>
+                <a:cs typeface="Calibri" panose="020F0502020204030204" pitchFamily="34" charset="0"/>
+              </a:rPr>
+              <a:t>Payer System</a:t>
+            </a:r>
+          </a:p>
+        </p:txBody>
+      </p:sp>
+      <p:sp>
+        <p:nvSpPr>
+          <p:cNvPr id="10" name="Rectangle: Rounded Corners 9">
+            <a:extLst>
+              <a:ext uri="{FF2B5EF4-FFF2-40B4-BE49-F238E27FC236}">
+                <a16:creationId xmlns:a16="http://schemas.microsoft.com/office/drawing/2014/main" id="{116CE419-50AE-5DCC-CE82-989A32E39464}"/>
+              </a:ext>
+            </a:extLst>
+          </p:cNvPr>
+          <p:cNvSpPr/>
+          <p:nvPr/>
+        </p:nvSpPr>
+        <p:spPr>
+          <a:xfrm>
+            <a:off x="4624262" y="3657920"/>
+            <a:ext cx="5690333" cy="1724479"/>
+          </a:xfrm>
+          <a:prstGeom prst="roundRect">
+            <a:avLst>
+              <a:gd name="adj" fmla="val 463"/>
+            </a:avLst>
+          </a:prstGeom>
+          <a:solidFill>
+            <a:srgbClr val="F0F4FA">
+              <a:alpha val="69000"/>
+            </a:srgbClr>
+          </a:solidFill>
+          <a:ln w="3175" cap="flat" cmpd="sng" algn="ctr">
+            <a:solidFill>
+              <a:sysClr val="window" lastClr="FFFFFF">
+                <a:lumMod val="85000"/>
+              </a:sysClr>
+            </a:solidFill>
+            <a:prstDash val="solid"/>
+          </a:ln>
+          <a:effectLst/>
+        </p:spPr>
+        <p:txBody>
+          <a:bodyPr rtlCol="0" anchor="ctr"/>
+          <a:lstStyle/>
+          <a:p>
+            <a:pPr algn="ctr" defTabSz="609585">
+              <a:defRPr/>
+            </a:pPr>
+            <a:endParaRPr lang="en-US" sz="2400" kern="0" dirty="0">
+              <a:solidFill>
+                <a:prstClr val="white"/>
+              </a:solidFill>
+              <a:latin typeface="Arial"/>
+            </a:endParaRPr>
+          </a:p>
+        </p:txBody>
+      </p:sp>
+      <p:sp>
+        <p:nvSpPr>
+          <p:cNvPr id="11" name="Rectangle: Rounded Corners 10">
+            <a:extLst>
+              <a:ext uri="{FF2B5EF4-FFF2-40B4-BE49-F238E27FC236}">
+                <a16:creationId xmlns:a16="http://schemas.microsoft.com/office/drawing/2014/main" id="{95521129-95B3-5FC0-6D50-69F400051580}"/>
+              </a:ext>
+            </a:extLst>
+          </p:cNvPr>
+          <p:cNvSpPr/>
+          <p:nvPr/>
+        </p:nvSpPr>
+        <p:spPr>
+          <a:xfrm>
+            <a:off x="1589501" y="2427896"/>
+            <a:ext cx="85344" cy="2834640"/>
+          </a:xfrm>
+          <a:prstGeom prst="roundRect">
+            <a:avLst>
+              <a:gd name="adj" fmla="val 0"/>
+            </a:avLst>
+          </a:prstGeom>
+          <a:solidFill>
+            <a:sysClr val="window" lastClr="FFFFFF"/>
+          </a:solidFill>
+          <a:ln w="9525" cap="flat" cmpd="sng" algn="ctr">
+            <a:solidFill>
+              <a:srgbClr val="FFFFFF">
+                <a:lumMod val="75000"/>
+              </a:srgbClr>
+            </a:solidFill>
+            <a:prstDash val="solid"/>
+            <a:miter lim="800000"/>
+          </a:ln>
+          <a:effectLst/>
+        </p:spPr>
+        <p:txBody>
+          <a:bodyPr lIns="0" rIns="0" rtlCol="0" anchor="ctr"/>
+          <a:lstStyle/>
+          <a:p>
+            <a:pPr algn="ctr" defTabSz="1219170">
+              <a:defRPr/>
+            </a:pPr>
+            <a:endParaRPr lang="en-US" sz="1091" kern="0" dirty="0">
+              <a:solidFill>
+                <a:srgbClr val="000000"/>
+              </a:solidFill>
+              <a:ea typeface="ヒラギノ角ゴ Pro W3" pitchFamily="-126" charset="-128"/>
+              <a:cs typeface="Calibri" panose="020F0502020204030204" pitchFamily="34" charset="0"/>
+            </a:endParaRPr>
+          </a:p>
+        </p:txBody>
+      </p:sp>
+      <p:grpSp>
+        <p:nvGrpSpPr>
+          <p:cNvPr id="12" name="Group 11">
+            <a:extLst>
+              <a:ext uri="{FF2B5EF4-FFF2-40B4-BE49-F238E27FC236}">
+                <a16:creationId xmlns:a16="http://schemas.microsoft.com/office/drawing/2014/main" id="{53857F24-ED2B-7E4E-6117-B749C8FB65B8}"/>
+              </a:ext>
+            </a:extLst>
+          </p:cNvPr>
+          <p:cNvGrpSpPr/>
+          <p:nvPr/>
+        </p:nvGrpSpPr>
+        <p:grpSpPr>
+          <a:xfrm>
+            <a:off x="1686699" y="2408076"/>
+            <a:ext cx="1360655" cy="308920"/>
+            <a:chOff x="2041915" y="2043702"/>
+            <a:chExt cx="1020491" cy="231690"/>
+          </a:xfrm>
+        </p:grpSpPr>
+        <p:sp>
+          <p:nvSpPr>
+            <p:cNvPr id="13" name="TextBox 12">
+              <a:extLst>
+                <a:ext uri="{FF2B5EF4-FFF2-40B4-BE49-F238E27FC236}">
+                  <a16:creationId xmlns:a16="http://schemas.microsoft.com/office/drawing/2014/main" id="{EC481FC3-EFA2-FAFE-4120-83326F3BBA29}"/>
+                </a:ext>
+              </a:extLst>
+            </p:cNvPr>
+            <p:cNvSpPr txBox="1"/>
+            <p:nvPr/>
+          </p:nvSpPr>
+          <p:spPr>
+            <a:xfrm>
+              <a:off x="2041915" y="2043702"/>
+              <a:ext cx="1020491" cy="212847"/>
+            </a:xfrm>
+            <a:prstGeom prst="rect">
+              <a:avLst/>
+            </a:prstGeom>
+            <a:noFill/>
+          </p:spPr>
+          <p:txBody>
+            <a:bodyPr wrap="square" lIns="0" tIns="0" rIns="0" bIns="0">
+              <a:spAutoFit/>
+            </a:bodyPr>
+            <a:lstStyle/>
+            <a:p>
+              <a:pPr algn="ctr" defTabSz="1219170">
+                <a:lnSpc>
+                  <a:spcPts val="1100"/>
+                </a:lnSpc>
+                <a:defRPr/>
+              </a:pPr>
+              <a:r>
+                <a:rPr lang="en-US" sz="1050" kern="0" dirty="0">
+                  <a:solidFill>
+                    <a:srgbClr val="598B91"/>
+                  </a:solidFill>
+                  <a:ea typeface="ヒラギノ角ゴ Pro W3" pitchFamily="-126" charset="-128"/>
+                  <a:cs typeface="Calibri" panose="020F0502020204030204" pitchFamily="34" charset="0"/>
+                </a:rPr>
+                <a:t>Request DTR </a:t>
+              </a:r>
+            </a:p>
+            <a:p>
+              <a:pPr algn="ctr" defTabSz="1219170">
+                <a:lnSpc>
+                  <a:spcPts val="1100"/>
+                </a:lnSpc>
+                <a:defRPr/>
+              </a:pPr>
+              <a:r>
+                <a:rPr lang="en-US" sz="1050" kern="0" dirty="0">
+                  <a:solidFill>
+                    <a:srgbClr val="598B91"/>
+                  </a:solidFill>
+                  <a:ea typeface="ヒラギノ角ゴ Pro W3" pitchFamily="-126" charset="-128"/>
+                  <a:cs typeface="Calibri" panose="020F0502020204030204" pitchFamily="34" charset="0"/>
+                </a:rPr>
+                <a:t>and establish context</a:t>
+              </a:r>
+            </a:p>
+          </p:txBody>
+        </p:sp>
+        <p:cxnSp>
+          <p:nvCxnSpPr>
+            <p:cNvPr id="14" name="Straight Arrow Connector 13">
+              <a:extLst>
+                <a:ext uri="{FF2B5EF4-FFF2-40B4-BE49-F238E27FC236}">
+                  <a16:creationId xmlns:a16="http://schemas.microsoft.com/office/drawing/2014/main" id="{09C242C5-9B32-864C-BBD2-2E397D06E463}"/>
+                </a:ext>
+              </a:extLst>
+            </p:cNvPr>
+            <p:cNvCxnSpPr>
+              <a:cxnSpLocks/>
+            </p:cNvCxnSpPr>
+            <p:nvPr/>
+          </p:nvCxnSpPr>
+          <p:spPr>
+            <a:xfrm flipH="1">
+              <a:off x="2041915" y="2275392"/>
+              <a:ext cx="1013447" cy="0"/>
+            </a:xfrm>
+            <a:prstGeom prst="straightConnector1">
+              <a:avLst/>
+            </a:prstGeom>
+            <a:noFill/>
+            <a:ln w="6350" cap="flat" cmpd="sng" algn="ctr">
+              <a:solidFill>
+                <a:srgbClr val="598B91"/>
+              </a:solidFill>
+              <a:prstDash val="dash"/>
+              <a:miter lim="800000"/>
+              <a:headEnd type="triangle"/>
+              <a:tailEnd type="none"/>
+            </a:ln>
+            <a:effectLst/>
+          </p:spPr>
+        </p:cxnSp>
+      </p:grpSp>
+      <p:sp>
+        <p:nvSpPr>
+          <p:cNvPr id="15" name="Rectangle: Rounded Corners 14">
+            <a:extLst>
+              <a:ext uri="{FF2B5EF4-FFF2-40B4-BE49-F238E27FC236}">
+                <a16:creationId xmlns:a16="http://schemas.microsoft.com/office/drawing/2014/main" id="{69A5E9C0-AA33-94CB-2D96-F77B1B843D51}"/>
+              </a:ext>
+            </a:extLst>
+          </p:cNvPr>
+          <p:cNvSpPr/>
+          <p:nvPr/>
+        </p:nvSpPr>
+        <p:spPr>
+          <a:xfrm>
+            <a:off x="3040388" y="2422318"/>
+            <a:ext cx="85344" cy="3657600"/>
+          </a:xfrm>
+          <a:prstGeom prst="roundRect">
+            <a:avLst>
+              <a:gd name="adj" fmla="val 0"/>
+            </a:avLst>
+          </a:prstGeom>
+          <a:solidFill>
+            <a:sysClr val="window" lastClr="FFFFFF"/>
+          </a:solidFill>
+          <a:ln w="9525" cap="flat" cmpd="sng" algn="ctr">
+            <a:solidFill>
+              <a:srgbClr val="FFFFFF">
+                <a:lumMod val="75000"/>
+              </a:srgbClr>
+            </a:solidFill>
+            <a:prstDash val="solid"/>
+            <a:miter lim="800000"/>
+          </a:ln>
+          <a:effectLst/>
+        </p:spPr>
+        <p:txBody>
+          <a:bodyPr lIns="0" rIns="0" rtlCol="0" anchor="ctr"/>
+          <a:lstStyle/>
+          <a:p>
+            <a:pPr algn="ctr" defTabSz="1219170">
+              <a:defRPr/>
+            </a:pPr>
+            <a:endParaRPr lang="en-US" sz="1091" kern="0" dirty="0">
+              <a:solidFill>
+                <a:srgbClr val="000000"/>
+              </a:solidFill>
+              <a:ea typeface="ヒラギノ角ゴ Pro W3" pitchFamily="-126" charset="-128"/>
+              <a:cs typeface="Calibri" panose="020F0502020204030204" pitchFamily="34" charset="0"/>
+            </a:endParaRPr>
+          </a:p>
+        </p:txBody>
+      </p:sp>
+      <p:grpSp>
+        <p:nvGrpSpPr>
+          <p:cNvPr id="16" name="Group 15">
+            <a:extLst>
+              <a:ext uri="{FF2B5EF4-FFF2-40B4-BE49-F238E27FC236}">
+                <a16:creationId xmlns:a16="http://schemas.microsoft.com/office/drawing/2014/main" id="{7E204288-074C-2A20-D56D-D612978C23F0}"/>
+              </a:ext>
+            </a:extLst>
+          </p:cNvPr>
+          <p:cNvGrpSpPr/>
+          <p:nvPr/>
+        </p:nvGrpSpPr>
+        <p:grpSpPr>
+          <a:xfrm>
+            <a:off x="3144888" y="2554892"/>
+            <a:ext cx="1393840" cy="289449"/>
+            <a:chOff x="3135557" y="2532129"/>
+            <a:chExt cx="1045380" cy="217087"/>
+          </a:xfrm>
+        </p:grpSpPr>
+        <p:cxnSp>
+          <p:nvCxnSpPr>
+            <p:cNvPr id="17" name="Straight Arrow Connector 16">
+              <a:extLst>
+                <a:ext uri="{FF2B5EF4-FFF2-40B4-BE49-F238E27FC236}">
+                  <a16:creationId xmlns:a16="http://schemas.microsoft.com/office/drawing/2014/main" id="{3FF12CAE-D0BB-03F3-E951-ECF272AAC6F9}"/>
+                </a:ext>
+              </a:extLst>
+            </p:cNvPr>
+            <p:cNvCxnSpPr>
+              <a:cxnSpLocks/>
+            </p:cNvCxnSpPr>
+            <p:nvPr/>
+          </p:nvCxnSpPr>
+          <p:spPr>
+            <a:xfrm>
+              <a:off x="3135557" y="2749216"/>
+              <a:ext cx="1045380" cy="0"/>
+            </a:xfrm>
+            <a:prstGeom prst="straightConnector1">
+              <a:avLst/>
+            </a:prstGeom>
+            <a:noFill/>
+            <a:ln w="6350" cap="flat" cmpd="sng" algn="ctr">
+              <a:solidFill>
+                <a:srgbClr val="000000"/>
+              </a:solidFill>
+              <a:prstDash val="solid"/>
+              <a:miter lim="800000"/>
+              <a:tailEnd type="triangle"/>
+            </a:ln>
+            <a:effectLst/>
+          </p:spPr>
+        </p:cxnSp>
+        <p:sp>
+          <p:nvSpPr>
+            <p:cNvPr id="18" name="TextBox 17">
+              <a:extLst>
+                <a:ext uri="{FF2B5EF4-FFF2-40B4-BE49-F238E27FC236}">
+                  <a16:creationId xmlns:a16="http://schemas.microsoft.com/office/drawing/2014/main" id="{199E590F-3895-5526-A08D-5BB47C6A81DB}"/>
+                </a:ext>
+              </a:extLst>
+            </p:cNvPr>
+            <p:cNvSpPr txBox="1"/>
+            <p:nvPr/>
+          </p:nvSpPr>
+          <p:spPr>
+            <a:xfrm>
+              <a:off x="3161263" y="2532129"/>
+              <a:ext cx="996727" cy="212847"/>
+            </a:xfrm>
+            <a:prstGeom prst="rect">
+              <a:avLst/>
+            </a:prstGeom>
+            <a:noFill/>
+          </p:spPr>
+          <p:txBody>
+            <a:bodyPr wrap="square" lIns="0" tIns="0" rIns="0" bIns="0">
+              <a:spAutoFit/>
+            </a:bodyPr>
+            <a:lstStyle/>
+            <a:p>
+              <a:pPr algn="ctr" defTabSz="1219170">
+                <a:lnSpc>
+                  <a:spcPts val="1100"/>
+                </a:lnSpc>
+                <a:defRPr/>
+              </a:pPr>
+              <a:r>
+                <a:rPr lang="en-US" sz="1050" kern="0" dirty="0">
+                  <a:solidFill>
+                    <a:srgbClr val="000000"/>
+                  </a:solidFill>
+                  <a:ea typeface="ヒラギノ角ゴ Pro W3" pitchFamily="-126" charset="-128"/>
+                  <a:cs typeface="Calibri" panose="020F0502020204030204" pitchFamily="34" charset="0"/>
+                </a:rPr>
+                <a:t>Launch DTR </a:t>
+              </a:r>
+            </a:p>
+            <a:p>
+              <a:pPr algn="ctr" defTabSz="1219170">
+                <a:lnSpc>
+                  <a:spcPts val="1100"/>
+                </a:lnSpc>
+                <a:defRPr/>
+              </a:pPr>
+              <a:r>
+                <a:rPr lang="en-US" sz="1050" kern="0" dirty="0">
+                  <a:solidFill>
+                    <a:srgbClr val="000000"/>
+                  </a:solidFill>
+                  <a:ea typeface="ヒラギノ角ゴ Pro W3" pitchFamily="-126" charset="-128"/>
+                  <a:cs typeface="Calibri" panose="020F0502020204030204" pitchFamily="34" charset="0"/>
+                </a:rPr>
+                <a:t>with context</a:t>
+              </a:r>
+            </a:p>
+          </p:txBody>
+        </p:sp>
+      </p:grpSp>
+      <p:sp>
+        <p:nvSpPr>
+          <p:cNvPr id="19" name="Rectangle: Rounded Corners 18">
+            <a:extLst>
+              <a:ext uri="{FF2B5EF4-FFF2-40B4-BE49-F238E27FC236}">
+                <a16:creationId xmlns:a16="http://schemas.microsoft.com/office/drawing/2014/main" id="{923953E2-A1F2-6C14-1F13-C5D7080CE6C7}"/>
+              </a:ext>
+            </a:extLst>
+          </p:cNvPr>
+          <p:cNvSpPr/>
+          <p:nvPr/>
+        </p:nvSpPr>
+        <p:spPr>
+          <a:xfrm>
+            <a:off x="7151137" y="2752644"/>
+            <a:ext cx="85344" cy="2679192"/>
+          </a:xfrm>
+          <a:prstGeom prst="roundRect">
+            <a:avLst>
+              <a:gd name="adj" fmla="val 0"/>
+            </a:avLst>
+          </a:prstGeom>
+          <a:solidFill>
+            <a:sysClr val="window" lastClr="FFFFFF"/>
+          </a:solidFill>
+          <a:ln w="9525" cap="flat" cmpd="sng" algn="ctr">
+            <a:solidFill>
+              <a:srgbClr val="FFFFFF">
+                <a:lumMod val="75000"/>
+              </a:srgbClr>
+            </a:solidFill>
+            <a:prstDash val="solid"/>
+            <a:miter lim="800000"/>
+          </a:ln>
+          <a:effectLst/>
+        </p:spPr>
+        <p:txBody>
+          <a:bodyPr lIns="0" rIns="0" rtlCol="0" anchor="ctr"/>
+          <a:lstStyle/>
+          <a:p>
+            <a:pPr algn="ctr" defTabSz="1219170">
+              <a:defRPr/>
+            </a:pPr>
+            <a:endParaRPr lang="en-US" sz="1091" kern="0" dirty="0">
+              <a:solidFill>
+                <a:srgbClr val="000000"/>
+              </a:solidFill>
+              <a:ea typeface="ヒラギノ角ゴ Pro W3" pitchFamily="-126" charset="-128"/>
+              <a:cs typeface="Calibri" panose="020F0502020204030204" pitchFamily="34" charset="0"/>
+            </a:endParaRPr>
+          </a:p>
+        </p:txBody>
+      </p:sp>
+      <p:sp>
+        <p:nvSpPr>
+          <p:cNvPr id="20" name="Rectangle: Rounded Corners 19">
+            <a:extLst>
+              <a:ext uri="{FF2B5EF4-FFF2-40B4-BE49-F238E27FC236}">
+                <a16:creationId xmlns:a16="http://schemas.microsoft.com/office/drawing/2014/main" id="{B4A25451-546D-8202-0F1D-95807923A4C5}"/>
+              </a:ext>
+            </a:extLst>
+          </p:cNvPr>
+          <p:cNvSpPr/>
+          <p:nvPr/>
+        </p:nvSpPr>
+        <p:spPr>
+          <a:xfrm>
+            <a:off x="8591278" y="2752644"/>
+            <a:ext cx="85344" cy="2679192"/>
+          </a:xfrm>
+          <a:prstGeom prst="roundRect">
+            <a:avLst>
+              <a:gd name="adj" fmla="val 0"/>
+            </a:avLst>
+          </a:prstGeom>
+          <a:solidFill>
+            <a:sysClr val="window" lastClr="FFFFFF"/>
+          </a:solidFill>
+          <a:ln w="9525" cap="flat" cmpd="sng" algn="ctr">
+            <a:solidFill>
+              <a:srgbClr val="FFFFFF">
+                <a:lumMod val="75000"/>
+              </a:srgbClr>
+            </a:solidFill>
+            <a:prstDash val="solid"/>
+            <a:miter lim="800000"/>
+          </a:ln>
+          <a:effectLst/>
+        </p:spPr>
+        <p:txBody>
+          <a:bodyPr lIns="0" rIns="0" rtlCol="0" anchor="ctr"/>
+          <a:lstStyle/>
+          <a:p>
+            <a:pPr algn="ctr" defTabSz="1219170">
+              <a:defRPr/>
+            </a:pPr>
+            <a:endParaRPr lang="en-US" sz="1091" kern="0" dirty="0">
+              <a:solidFill>
+                <a:srgbClr val="000000"/>
+              </a:solidFill>
+              <a:ea typeface="ヒラギノ角ゴ Pro W3" pitchFamily="-126" charset="-128"/>
+              <a:cs typeface="Calibri" panose="020F0502020204030204" pitchFamily="34" charset="0"/>
+            </a:endParaRPr>
+          </a:p>
+        </p:txBody>
+      </p:sp>
+      <p:grpSp>
+        <p:nvGrpSpPr>
+          <p:cNvPr id="21" name="Group 20">
+            <a:extLst>
+              <a:ext uri="{FF2B5EF4-FFF2-40B4-BE49-F238E27FC236}">
+                <a16:creationId xmlns:a16="http://schemas.microsoft.com/office/drawing/2014/main" id="{469513C2-5A93-2E0D-DED8-C585DD20C3D0}"/>
+              </a:ext>
+            </a:extLst>
+          </p:cNvPr>
+          <p:cNvGrpSpPr/>
+          <p:nvPr/>
+        </p:nvGrpSpPr>
+        <p:grpSpPr>
+          <a:xfrm>
+            <a:off x="3144888" y="4702125"/>
+            <a:ext cx="1393840" cy="169079"/>
+            <a:chOff x="3135557" y="3181463"/>
+            <a:chExt cx="1045380" cy="126809"/>
+          </a:xfrm>
+        </p:grpSpPr>
+        <p:cxnSp>
+          <p:nvCxnSpPr>
+            <p:cNvPr id="22" name="Straight Arrow Connector 21">
+              <a:extLst>
+                <a:ext uri="{FF2B5EF4-FFF2-40B4-BE49-F238E27FC236}">
+                  <a16:creationId xmlns:a16="http://schemas.microsoft.com/office/drawing/2014/main" id="{F63A0E01-5CB0-8007-42FB-2E5D440982EB}"/>
+                </a:ext>
+              </a:extLst>
+            </p:cNvPr>
+            <p:cNvCxnSpPr>
+              <a:cxnSpLocks/>
+            </p:cNvCxnSpPr>
+            <p:nvPr/>
+          </p:nvCxnSpPr>
+          <p:spPr>
+            <a:xfrm>
+              <a:off x="3135557" y="3308272"/>
+              <a:ext cx="1045380" cy="0"/>
+            </a:xfrm>
+            <a:prstGeom prst="straightConnector1">
+              <a:avLst/>
+            </a:prstGeom>
+            <a:noFill/>
+            <a:ln w="6350" cap="flat" cmpd="sng" algn="ctr">
+              <a:solidFill>
+                <a:srgbClr val="000000"/>
+              </a:solidFill>
+              <a:prstDash val="solid"/>
+              <a:miter lim="800000"/>
+              <a:headEnd type="triangle"/>
+              <a:tailEnd type="triangle"/>
+            </a:ln>
+            <a:effectLst/>
+          </p:spPr>
+        </p:cxnSp>
+        <p:sp>
+          <p:nvSpPr>
+            <p:cNvPr id="23" name="TextBox 22">
+              <a:extLst>
+                <a:ext uri="{FF2B5EF4-FFF2-40B4-BE49-F238E27FC236}">
+                  <a16:creationId xmlns:a16="http://schemas.microsoft.com/office/drawing/2014/main" id="{97D2EFAD-B105-A10A-03DD-D111ECD1B4D0}"/>
+                </a:ext>
+              </a:extLst>
+            </p:cNvPr>
+            <p:cNvSpPr txBox="1"/>
+            <p:nvPr/>
+          </p:nvSpPr>
+          <p:spPr>
+            <a:xfrm>
+              <a:off x="3201306" y="3181463"/>
+              <a:ext cx="918878" cy="125900"/>
+            </a:xfrm>
+            <a:prstGeom prst="rect">
+              <a:avLst/>
+            </a:prstGeom>
+            <a:noFill/>
+          </p:spPr>
+          <p:txBody>
+            <a:bodyPr wrap="square" lIns="0" tIns="0" rIns="0" bIns="0">
+              <a:spAutoFit/>
+            </a:bodyPr>
+            <a:lstStyle/>
+            <a:p>
+              <a:pPr algn="ctr" defTabSz="1219170">
+                <a:defRPr/>
+              </a:pPr>
+              <a:r>
+                <a:rPr lang="en-US" sz="1050" kern="0" dirty="0">
+                  <a:solidFill>
+                    <a:srgbClr val="000000"/>
+                  </a:solidFill>
+                  <a:ea typeface="ヒラギノ角ゴ Pro W3" pitchFamily="-126" charset="-128"/>
+                  <a:cs typeface="Calibri" panose="020F0502020204030204" pitchFamily="34" charset="0"/>
+                </a:rPr>
+                <a:t>Pre-populate Form</a:t>
+              </a:r>
+            </a:p>
+          </p:txBody>
+        </p:sp>
+      </p:grpSp>
+      <p:grpSp>
+        <p:nvGrpSpPr>
+          <p:cNvPr id="24" name="Group 23">
+            <a:extLst>
+              <a:ext uri="{FF2B5EF4-FFF2-40B4-BE49-F238E27FC236}">
+                <a16:creationId xmlns:a16="http://schemas.microsoft.com/office/drawing/2014/main" id="{6DA8363A-FD91-3A53-81A7-4FB627666E6B}"/>
+              </a:ext>
+            </a:extLst>
+          </p:cNvPr>
+          <p:cNvGrpSpPr/>
+          <p:nvPr/>
+        </p:nvGrpSpPr>
+        <p:grpSpPr>
+          <a:xfrm>
+            <a:off x="1686699" y="5027377"/>
+            <a:ext cx="2852029" cy="217111"/>
+            <a:chOff x="2041915" y="3623359"/>
+            <a:chExt cx="2139022" cy="162833"/>
+          </a:xfrm>
+        </p:grpSpPr>
+        <p:sp>
+          <p:nvSpPr>
+            <p:cNvPr id="25" name="TextBox 24">
+              <a:extLst>
+                <a:ext uri="{FF2B5EF4-FFF2-40B4-BE49-F238E27FC236}">
+                  <a16:creationId xmlns:a16="http://schemas.microsoft.com/office/drawing/2014/main" id="{D3C803EA-8D8D-8B03-6D24-FA14305E35E7}"/>
+                </a:ext>
+              </a:extLst>
+            </p:cNvPr>
+            <p:cNvSpPr txBox="1"/>
+            <p:nvPr/>
+          </p:nvSpPr>
+          <p:spPr>
+            <a:xfrm>
+              <a:off x="2167812" y="3623359"/>
+              <a:ext cx="1893364" cy="162833"/>
+            </a:xfrm>
+            <a:prstGeom prst="rect">
+              <a:avLst/>
+            </a:prstGeom>
+            <a:solidFill>
+              <a:sysClr val="window" lastClr="FFFFFF"/>
+            </a:solidFill>
+          </p:spPr>
+          <p:txBody>
+            <a:bodyPr wrap="square" lIns="0" tIns="0" rIns="0" bIns="48768">
+              <a:spAutoFit/>
+            </a:bodyPr>
+            <a:lstStyle/>
+            <a:p>
+              <a:pPr marL="0" marR="0" lvl="0" indent="0" algn="ctr" defTabSz="1219170" eaLnBrk="1" fontAlgn="auto" latinLnBrk="0" hangingPunct="1">
+                <a:lnSpc>
+                  <a:spcPct val="100000"/>
+                </a:lnSpc>
+                <a:spcBef>
+                  <a:spcPts val="0"/>
+                </a:spcBef>
+                <a:spcAft>
+                  <a:spcPts val="0"/>
+                </a:spcAft>
+                <a:buClrTx/>
+                <a:buSzTx/>
+                <a:buFontTx/>
+                <a:buNone/>
+                <a:tabLst/>
+                <a:defRPr/>
+              </a:pPr>
+              <a:r>
+                <a:rPr kumimoji="0" lang="en-US" sz="1050" b="0" i="0" u="none" strike="noStrike" kern="0" cap="none" spc="0" normalizeH="0" baseline="0" noProof="0" dirty="0">
+                  <a:ln>
+                    <a:noFill/>
+                  </a:ln>
+                  <a:solidFill>
+                    <a:prstClr val="black">
+                      <a:lumMod val="65000"/>
+                      <a:lumOff val="35000"/>
+                    </a:prstClr>
+                  </a:solidFill>
+                  <a:effectLst/>
+                  <a:uLnTx/>
+                  <a:uFillTx/>
+                  <a:ea typeface="ヒラギノ角ゴ Pro W3" pitchFamily="-126" charset="-128"/>
+                  <a:cs typeface="Calibri" panose="020F0502020204030204" pitchFamily="34" charset="0"/>
+                </a:rPr>
+                <a:t>Collect missing information and/or review</a:t>
+              </a:r>
+            </a:p>
+          </p:txBody>
+        </p:sp>
+        <p:cxnSp>
+          <p:nvCxnSpPr>
+            <p:cNvPr id="26" name="Straight Arrow Connector 25">
+              <a:extLst>
+                <a:ext uri="{FF2B5EF4-FFF2-40B4-BE49-F238E27FC236}">
+                  <a16:creationId xmlns:a16="http://schemas.microsoft.com/office/drawing/2014/main" id="{25379C6C-2EC2-977E-BCE5-266FC8E6F18B}"/>
+                </a:ext>
+              </a:extLst>
+            </p:cNvPr>
+            <p:cNvCxnSpPr>
+              <a:cxnSpLocks/>
+            </p:cNvCxnSpPr>
+            <p:nvPr/>
+          </p:nvCxnSpPr>
+          <p:spPr>
+            <a:xfrm flipH="1">
+              <a:off x="2041915" y="3759381"/>
+              <a:ext cx="2139022" cy="0"/>
+            </a:xfrm>
+            <a:prstGeom prst="straightConnector1">
+              <a:avLst/>
+            </a:prstGeom>
+            <a:noFill/>
+            <a:ln w="6350" cap="flat" cmpd="sng" algn="ctr">
+              <a:solidFill>
+                <a:sysClr val="windowText" lastClr="000000">
+                  <a:lumMod val="75000"/>
+                  <a:lumOff val="25000"/>
+                </a:sysClr>
+              </a:solidFill>
+              <a:prstDash val="dash"/>
+              <a:miter lim="800000"/>
+              <a:headEnd type="triangle"/>
+              <a:tailEnd type="triangle"/>
+            </a:ln>
+            <a:effectLst/>
+          </p:spPr>
+        </p:cxnSp>
+      </p:grpSp>
+      <p:grpSp>
+        <p:nvGrpSpPr>
+          <p:cNvPr id="27" name="Group 26">
+            <a:extLst>
+              <a:ext uri="{FF2B5EF4-FFF2-40B4-BE49-F238E27FC236}">
+                <a16:creationId xmlns:a16="http://schemas.microsoft.com/office/drawing/2014/main" id="{CADF5EF6-4D72-FCDC-3596-6BBE82DB8141}"/>
+              </a:ext>
+            </a:extLst>
+          </p:cNvPr>
+          <p:cNvGrpSpPr/>
+          <p:nvPr/>
+        </p:nvGrpSpPr>
+        <p:grpSpPr>
+          <a:xfrm>
+            <a:off x="4621269" y="3294756"/>
+            <a:ext cx="2496312" cy="175721"/>
+            <a:chOff x="4433792" y="3037329"/>
+            <a:chExt cx="1872234" cy="131791"/>
+          </a:xfrm>
+        </p:grpSpPr>
+        <p:cxnSp>
+          <p:nvCxnSpPr>
+            <p:cNvPr id="28" name="Straight Arrow Connector 27">
+              <a:extLst>
+                <a:ext uri="{FF2B5EF4-FFF2-40B4-BE49-F238E27FC236}">
+                  <a16:creationId xmlns:a16="http://schemas.microsoft.com/office/drawing/2014/main" id="{42755275-E50C-29D3-0E00-AF986D6A74FC}"/>
+                </a:ext>
+              </a:extLst>
+            </p:cNvPr>
+            <p:cNvCxnSpPr>
+              <a:cxnSpLocks/>
+            </p:cNvCxnSpPr>
+            <p:nvPr/>
+          </p:nvCxnSpPr>
+          <p:spPr>
+            <a:xfrm flipH="1">
+              <a:off x="4433792" y="3169120"/>
+              <a:ext cx="1872234" cy="0"/>
+            </a:xfrm>
+            <a:prstGeom prst="straightConnector1">
+              <a:avLst/>
+            </a:prstGeom>
+            <a:noFill/>
+            <a:ln w="6350" cap="flat" cmpd="sng" algn="ctr">
+              <a:solidFill>
+                <a:srgbClr val="000000"/>
+              </a:solidFill>
+              <a:prstDash val="solid"/>
+              <a:miter lim="800000"/>
+              <a:tailEnd type="triangle"/>
+            </a:ln>
+            <a:effectLst/>
+          </p:spPr>
+        </p:cxnSp>
+        <p:sp>
+          <p:nvSpPr>
+            <p:cNvPr id="29" name="TextBox 28">
+              <a:extLst>
+                <a:ext uri="{FF2B5EF4-FFF2-40B4-BE49-F238E27FC236}">
+                  <a16:creationId xmlns:a16="http://schemas.microsoft.com/office/drawing/2014/main" id="{E52ACED0-074F-154F-5C58-F9933B33C0E0}"/>
+                </a:ext>
+              </a:extLst>
+            </p:cNvPr>
+            <p:cNvSpPr txBox="1"/>
+            <p:nvPr/>
+          </p:nvSpPr>
+          <p:spPr>
+            <a:xfrm>
+              <a:off x="4637631" y="3037329"/>
+              <a:ext cx="1418501" cy="125900"/>
+            </a:xfrm>
+            <a:prstGeom prst="rect">
+              <a:avLst/>
+            </a:prstGeom>
+            <a:noFill/>
+          </p:spPr>
+          <p:txBody>
+            <a:bodyPr wrap="square" lIns="0" tIns="0" rIns="0" bIns="0">
+              <a:spAutoFit/>
+            </a:bodyPr>
+            <a:lstStyle/>
+            <a:p>
+              <a:pPr algn="ctr" defTabSz="609585" fontAlgn="base">
+                <a:spcBef>
+                  <a:spcPct val="0"/>
+                </a:spcBef>
+                <a:spcAft>
+                  <a:spcPct val="0"/>
+                </a:spcAft>
+              </a:pPr>
+              <a:r>
+                <a:rPr lang="en-US" sz="1050" dirty="0">
+                  <a:solidFill>
+                    <a:srgbClr val="000000"/>
+                  </a:solidFill>
+                  <a:ea typeface="ヒラギノ角ゴ Pro W3" pitchFamily="-126" charset="-128"/>
+                  <a:cs typeface="Calibri" panose="020F0502020204030204" pitchFamily="34" charset="0"/>
+                </a:rPr>
+                <a:t>Return Questionnaire Package</a:t>
+              </a:r>
+            </a:p>
+          </p:txBody>
+        </p:sp>
+      </p:grpSp>
+      <p:grpSp>
+        <p:nvGrpSpPr>
+          <p:cNvPr id="31" name="Group 30">
+            <a:extLst>
+              <a:ext uri="{FF2B5EF4-FFF2-40B4-BE49-F238E27FC236}">
+                <a16:creationId xmlns:a16="http://schemas.microsoft.com/office/drawing/2014/main" id="{35864983-2F7F-F5ED-A4D3-6C1F194A0080}"/>
+              </a:ext>
+            </a:extLst>
+          </p:cNvPr>
+          <p:cNvGrpSpPr/>
+          <p:nvPr/>
+        </p:nvGrpSpPr>
+        <p:grpSpPr>
+          <a:xfrm>
+            <a:off x="3135439" y="5417616"/>
+            <a:ext cx="1413532" cy="300514"/>
+            <a:chOff x="3128470" y="4120963"/>
+            <a:chExt cx="1060149" cy="225385"/>
+          </a:xfrm>
+        </p:grpSpPr>
+        <p:sp>
+          <p:nvSpPr>
+            <p:cNvPr id="32" name="TextBox 31">
+              <a:extLst>
+                <a:ext uri="{FF2B5EF4-FFF2-40B4-BE49-F238E27FC236}">
+                  <a16:creationId xmlns:a16="http://schemas.microsoft.com/office/drawing/2014/main" id="{73D14D1B-F7A3-2124-0E6A-8A0A0D25D5FC}"/>
+                </a:ext>
+              </a:extLst>
+            </p:cNvPr>
+            <p:cNvSpPr txBox="1"/>
+            <p:nvPr/>
+          </p:nvSpPr>
+          <p:spPr>
+            <a:xfrm>
+              <a:off x="3132188" y="4120963"/>
+              <a:ext cx="1056431" cy="212847"/>
+            </a:xfrm>
+            <a:prstGeom prst="rect">
+              <a:avLst/>
+            </a:prstGeom>
+            <a:solidFill>
+              <a:sysClr val="window" lastClr="FFFFFF"/>
+            </a:solidFill>
+          </p:spPr>
+          <p:txBody>
+            <a:bodyPr wrap="square" lIns="0" tIns="0" rIns="0" bIns="0">
+              <a:spAutoFit/>
+            </a:bodyPr>
+            <a:lstStyle/>
+            <a:p>
+              <a:pPr marL="0" marR="0" lvl="0" indent="0" algn="ctr" defTabSz="1219170" eaLnBrk="1" fontAlgn="auto" latinLnBrk="0" hangingPunct="1">
+                <a:lnSpc>
+                  <a:spcPts val="1100"/>
+                </a:lnSpc>
+                <a:spcBef>
+                  <a:spcPts val="0"/>
+                </a:spcBef>
+                <a:spcAft>
+                  <a:spcPts val="0"/>
+                </a:spcAft>
+                <a:buClrTx/>
+                <a:buSzTx/>
+                <a:buFontTx/>
+                <a:buNone/>
+                <a:tabLst/>
+                <a:defRPr/>
+              </a:pPr>
+              <a:r>
+                <a:rPr kumimoji="0" lang="en-US" sz="1050" b="0" i="0" u="none" strike="noStrike" kern="0" cap="none" spc="0" normalizeH="0" baseline="0" noProof="0" dirty="0">
+                  <a:ln>
+                    <a:noFill/>
+                  </a:ln>
+                  <a:solidFill>
+                    <a:srgbClr val="000000"/>
+                  </a:solidFill>
+                  <a:effectLst/>
+                  <a:uLnTx/>
+                  <a:uFillTx/>
+                  <a:ea typeface="ヒラギノ角ゴ Pro W3" pitchFamily="-126" charset="-128"/>
+                  <a:cs typeface="Calibri" panose="020F0502020204030204" pitchFamily="34" charset="0"/>
+                </a:rPr>
+                <a:t>Save Completed QuestionnaireResponse</a:t>
+              </a:r>
+            </a:p>
+          </p:txBody>
+        </p:sp>
+        <p:cxnSp>
+          <p:nvCxnSpPr>
+            <p:cNvPr id="33" name="Straight Arrow Connector 32">
+              <a:extLst>
+                <a:ext uri="{FF2B5EF4-FFF2-40B4-BE49-F238E27FC236}">
+                  <a16:creationId xmlns:a16="http://schemas.microsoft.com/office/drawing/2014/main" id="{D0CDFBBB-9143-1EFD-8064-FC36A5F4C1CF}"/>
+                </a:ext>
+              </a:extLst>
+            </p:cNvPr>
+            <p:cNvCxnSpPr>
+              <a:cxnSpLocks/>
+            </p:cNvCxnSpPr>
+            <p:nvPr/>
+          </p:nvCxnSpPr>
+          <p:spPr>
+            <a:xfrm>
+              <a:off x="3128470" y="4346348"/>
+              <a:ext cx="1042416" cy="0"/>
+            </a:xfrm>
+            <a:prstGeom prst="straightConnector1">
+              <a:avLst/>
+            </a:prstGeom>
+            <a:noFill/>
+            <a:ln w="6350" cap="flat" cmpd="sng" algn="ctr">
+              <a:solidFill>
+                <a:srgbClr val="000000"/>
+              </a:solidFill>
+              <a:prstDash val="solid"/>
+              <a:miter lim="800000"/>
+              <a:headEnd type="triangle"/>
+              <a:tailEnd type="none"/>
+            </a:ln>
+            <a:effectLst/>
+          </p:spPr>
+        </p:cxnSp>
+      </p:grpSp>
+      <p:grpSp>
+        <p:nvGrpSpPr>
+          <p:cNvPr id="34" name="Group 33">
+            <a:extLst>
+              <a:ext uri="{FF2B5EF4-FFF2-40B4-BE49-F238E27FC236}">
+                <a16:creationId xmlns:a16="http://schemas.microsoft.com/office/drawing/2014/main" id="{9E7FCECA-C050-51BB-962F-67E0401840BE}"/>
+              </a:ext>
+            </a:extLst>
+          </p:cNvPr>
+          <p:cNvGrpSpPr/>
+          <p:nvPr/>
+        </p:nvGrpSpPr>
+        <p:grpSpPr>
+          <a:xfrm>
+            <a:off x="4630600" y="4503781"/>
+            <a:ext cx="2496312" cy="184647"/>
+            <a:chOff x="4440790" y="4115391"/>
+            <a:chExt cx="1872234" cy="138485"/>
+          </a:xfrm>
+        </p:grpSpPr>
+        <p:sp>
+          <p:nvSpPr>
+            <p:cNvPr id="35" name="TextBox 34">
+              <a:extLst>
+                <a:ext uri="{FF2B5EF4-FFF2-40B4-BE49-F238E27FC236}">
+                  <a16:creationId xmlns:a16="http://schemas.microsoft.com/office/drawing/2014/main" id="{3B06E53F-02D2-9AB0-B48A-8F36AD1B82F7}"/>
+                </a:ext>
+              </a:extLst>
+            </p:cNvPr>
+            <p:cNvSpPr txBox="1"/>
+            <p:nvPr/>
+          </p:nvSpPr>
+          <p:spPr>
+            <a:xfrm>
+              <a:off x="4617438" y="4115391"/>
+              <a:ext cx="1341129" cy="125900"/>
+            </a:xfrm>
+            <a:prstGeom prst="rect">
+              <a:avLst/>
+            </a:prstGeom>
+            <a:noFill/>
+          </p:spPr>
+          <p:txBody>
+            <a:bodyPr wrap="square" lIns="0" tIns="0" rIns="0" bIns="0">
+              <a:spAutoFit/>
+            </a:bodyPr>
+            <a:lstStyle/>
+            <a:p>
+              <a:pPr algn="ctr" defTabSz="609585" fontAlgn="base">
+                <a:spcBef>
+                  <a:spcPct val="0"/>
+                </a:spcBef>
+                <a:spcAft>
+                  <a:spcPct val="0"/>
+                </a:spcAft>
+                <a:defRPr/>
+              </a:pPr>
+              <a:r>
+                <a:rPr lang="en-US" sz="1050" kern="0" dirty="0">
+                  <a:solidFill>
+                    <a:prstClr val="black"/>
+                  </a:solidFill>
+                  <a:ea typeface="ヒラギノ角ゴ Pro W3" pitchFamily="-126" charset="-128"/>
+                  <a:cs typeface="Calibri" panose="020F0502020204030204" pitchFamily="34" charset="0"/>
+                </a:rPr>
+                <a:t>Return QuestionnaireResponse</a:t>
+              </a:r>
+            </a:p>
+          </p:txBody>
+        </p:sp>
+        <p:cxnSp>
+          <p:nvCxnSpPr>
+            <p:cNvPr id="36" name="Straight Arrow Connector 35">
+              <a:extLst>
+                <a:ext uri="{FF2B5EF4-FFF2-40B4-BE49-F238E27FC236}">
+                  <a16:creationId xmlns:a16="http://schemas.microsoft.com/office/drawing/2014/main" id="{B9D419FE-B09D-2D3F-24A9-3103309145F0}"/>
+                </a:ext>
+              </a:extLst>
+            </p:cNvPr>
+            <p:cNvCxnSpPr>
+              <a:cxnSpLocks/>
+            </p:cNvCxnSpPr>
+            <p:nvPr/>
+          </p:nvCxnSpPr>
+          <p:spPr>
+            <a:xfrm flipH="1">
+              <a:off x="4440790" y="4253876"/>
+              <a:ext cx="1872234" cy="0"/>
+            </a:xfrm>
+            <a:prstGeom prst="straightConnector1">
+              <a:avLst/>
+            </a:prstGeom>
+            <a:noFill/>
+            <a:ln w="6350" cap="flat" cmpd="sng" algn="ctr">
+              <a:solidFill>
+                <a:sysClr val="windowText" lastClr="000000"/>
+              </a:solidFill>
+              <a:prstDash val="solid"/>
+              <a:miter lim="800000"/>
+              <a:tailEnd type="triangle"/>
+            </a:ln>
+            <a:effectLst/>
+          </p:spPr>
+        </p:cxnSp>
+      </p:grpSp>
+      <p:sp>
+        <p:nvSpPr>
+          <p:cNvPr id="37" name="TextBox 36">
+            <a:extLst>
+              <a:ext uri="{FF2B5EF4-FFF2-40B4-BE49-F238E27FC236}">
+                <a16:creationId xmlns:a16="http://schemas.microsoft.com/office/drawing/2014/main" id="{ECF6543E-D148-C709-A912-248B5455EAA1}"/>
+              </a:ext>
+            </a:extLst>
+          </p:cNvPr>
+          <p:cNvSpPr txBox="1"/>
+          <p:nvPr/>
+        </p:nvSpPr>
+        <p:spPr>
+          <a:xfrm>
+            <a:off x="6599909" y="3663416"/>
+            <a:ext cx="1206327" cy="138499"/>
+          </a:xfrm>
+          <a:prstGeom prst="rect">
+            <a:avLst/>
+          </a:prstGeom>
+          <a:solidFill>
+            <a:srgbClr val="F5F7FC"/>
+          </a:solidFill>
+        </p:spPr>
+        <p:txBody>
+          <a:bodyPr wrap="square" lIns="0" tIns="0" rIns="0" bIns="0">
+            <a:spAutoFit/>
+          </a:bodyPr>
+          <a:lstStyle/>
+          <a:p>
+            <a:pPr algn="ctr" defTabSz="609585" fontAlgn="base">
+              <a:spcBef>
+                <a:spcPct val="0"/>
+              </a:spcBef>
+            </a:pPr>
+            <a:r>
+              <a:rPr lang="en-US" sz="900" b="1" dirty="0">
+                <a:solidFill>
+                  <a:srgbClr val="1F497D">
+                    <a:lumMod val="75000"/>
+                  </a:srgbClr>
+                </a:solidFill>
+                <a:ea typeface="ヒラギノ角ゴ Pro W3" pitchFamily="-126" charset="-128"/>
+                <a:cs typeface="Calibri" panose="020F0502020204030204" pitchFamily="34" charset="0"/>
+              </a:rPr>
+              <a:t>(Adaptive Forms only)</a:t>
+            </a:r>
+          </a:p>
+        </p:txBody>
+      </p:sp>
+      <p:grpSp>
+        <p:nvGrpSpPr>
+          <p:cNvPr id="38" name="Group 37">
+            <a:extLst>
+              <a:ext uri="{FF2B5EF4-FFF2-40B4-BE49-F238E27FC236}">
+                <a16:creationId xmlns:a16="http://schemas.microsoft.com/office/drawing/2014/main" id="{0381C357-9D3C-009E-2BCD-81D9FB9C2895}"/>
+              </a:ext>
+            </a:extLst>
+          </p:cNvPr>
+          <p:cNvGrpSpPr/>
+          <p:nvPr/>
+        </p:nvGrpSpPr>
+        <p:grpSpPr>
+          <a:xfrm>
+            <a:off x="4633766" y="2821301"/>
+            <a:ext cx="2496312" cy="341371"/>
+            <a:chOff x="4443164" y="2710724"/>
+            <a:chExt cx="1872234" cy="256028"/>
+          </a:xfrm>
+        </p:grpSpPr>
+        <p:sp>
+          <p:nvSpPr>
+            <p:cNvPr id="39" name="TextBox 38">
+              <a:extLst>
+                <a:ext uri="{FF2B5EF4-FFF2-40B4-BE49-F238E27FC236}">
+                  <a16:creationId xmlns:a16="http://schemas.microsoft.com/office/drawing/2014/main" id="{DAF34CF5-B454-01B0-9FDE-6A6B01C4A7FC}"/>
+                </a:ext>
+              </a:extLst>
+            </p:cNvPr>
+            <p:cNvSpPr txBox="1"/>
+            <p:nvPr/>
+          </p:nvSpPr>
+          <p:spPr>
+            <a:xfrm>
+              <a:off x="4637631" y="2710724"/>
+              <a:ext cx="1418501" cy="125900"/>
+            </a:xfrm>
+            <a:prstGeom prst="rect">
+              <a:avLst/>
+            </a:prstGeom>
+            <a:noFill/>
+          </p:spPr>
+          <p:txBody>
+            <a:bodyPr wrap="square" lIns="0" tIns="0" rIns="0" bIns="0">
+              <a:spAutoFit/>
+            </a:bodyPr>
+            <a:lstStyle/>
+            <a:p>
+              <a:pPr algn="ctr" defTabSz="609585" fontAlgn="base">
+                <a:spcBef>
+                  <a:spcPct val="0"/>
+                </a:spcBef>
+                <a:spcAft>
+                  <a:spcPct val="0"/>
+                </a:spcAft>
+              </a:pPr>
+              <a:r>
+                <a:rPr lang="en-US" sz="1050" dirty="0">
+                  <a:solidFill>
+                    <a:srgbClr val="000000"/>
+                  </a:solidFill>
+                  <a:ea typeface="ヒラギノ角ゴ Pro W3" pitchFamily="-126" charset="-128"/>
+                  <a:cs typeface="Calibri" panose="020F0502020204030204" pitchFamily="34" charset="0"/>
+                </a:rPr>
+                <a:t>Request Questionnaire Package</a:t>
+              </a:r>
+            </a:p>
+          </p:txBody>
+        </p:sp>
+        <p:sp>
+          <p:nvSpPr>
+            <p:cNvPr id="40" name="TextBox 39">
+              <a:extLst>
+                <a:ext uri="{FF2B5EF4-FFF2-40B4-BE49-F238E27FC236}">
+                  <a16:creationId xmlns:a16="http://schemas.microsoft.com/office/drawing/2014/main" id="{A4F9E494-152F-A15B-E048-D0AAA80F00DD}"/>
+                </a:ext>
+              </a:extLst>
+            </p:cNvPr>
+            <p:cNvSpPr txBox="1"/>
+            <p:nvPr/>
+          </p:nvSpPr>
+          <p:spPr>
+            <a:xfrm>
+              <a:off x="4530120" y="2851336"/>
+              <a:ext cx="1633523" cy="115416"/>
+            </a:xfrm>
+            <a:prstGeom prst="rect">
+              <a:avLst/>
+            </a:prstGeom>
+            <a:noFill/>
+          </p:spPr>
+          <p:txBody>
+            <a:bodyPr wrap="square" lIns="0" tIns="0" rIns="0" bIns="0">
+              <a:spAutoFit/>
+            </a:bodyPr>
+            <a:lstStyle/>
+            <a:p>
+              <a:pPr algn="ctr" defTabSz="609585" fontAlgn="base">
+                <a:spcBef>
+                  <a:spcPct val="0"/>
+                </a:spcBef>
+                <a:spcAft>
+                  <a:spcPct val="0"/>
+                </a:spcAft>
+              </a:pPr>
+              <a:r>
+                <a:rPr lang="en-US" sz="1000" dirty="0">
+                  <a:solidFill>
+                    <a:prstClr val="black"/>
+                  </a:solidFill>
+                  <a:ea typeface="ヒラギノ角ゴ Pro W3" pitchFamily="-126" charset="-128"/>
+                  <a:cs typeface="Calibri" panose="020F0502020204030204" pitchFamily="34" charset="0"/>
+                </a:rPr>
+                <a:t>(</a:t>
+              </a:r>
+              <a:r>
+                <a:rPr lang="en-US" sz="800" dirty="0">
+                  <a:solidFill>
+                    <a:srgbClr val="167FAC">
+                      <a:lumMod val="50000"/>
+                    </a:srgbClr>
+                  </a:solidFill>
+                  <a:latin typeface="Consolas" panose="020B0609020204030204" pitchFamily="49" charset="0"/>
+                  <a:ea typeface="ヒラギノ角ゴ Pro W3" pitchFamily="-126" charset="-128"/>
+                  <a:cs typeface="Calibri" panose="020F0502020204030204" pitchFamily="34" charset="0"/>
+                </a:rPr>
+                <a:t>$questionnaire-package</a:t>
+              </a:r>
+              <a:r>
+                <a:rPr lang="en-US" sz="500" dirty="0">
+                  <a:solidFill>
+                    <a:srgbClr val="167FAC">
+                      <a:lumMod val="50000"/>
+                    </a:srgbClr>
+                  </a:solidFill>
+                  <a:latin typeface="Consolas" panose="020B0609020204030204" pitchFamily="49" charset="0"/>
+                  <a:ea typeface="ヒラギノ角ゴ Pro W3" pitchFamily="-126" charset="-128"/>
+                  <a:cs typeface="Calibri" panose="020F0502020204030204" pitchFamily="34" charset="0"/>
+                </a:rPr>
+                <a:t> </a:t>
+              </a:r>
+              <a:r>
+                <a:rPr lang="en-US" sz="1000" dirty="0">
+                  <a:solidFill>
+                    <a:prstClr val="black"/>
+                  </a:solidFill>
+                  <a:ea typeface="ヒラギノ角ゴ Pro W3" pitchFamily="-126" charset="-128"/>
+                  <a:cs typeface="Calibri" panose="020F0502020204030204" pitchFamily="34" charset="0"/>
+                </a:rPr>
+                <a:t>operation)</a:t>
+              </a:r>
+            </a:p>
+          </p:txBody>
+        </p:sp>
+        <p:cxnSp>
+          <p:nvCxnSpPr>
+            <p:cNvPr id="41" name="Straight Arrow Connector 40">
+              <a:extLst>
+                <a:ext uri="{FF2B5EF4-FFF2-40B4-BE49-F238E27FC236}">
+                  <a16:creationId xmlns:a16="http://schemas.microsoft.com/office/drawing/2014/main" id="{85596055-7278-04D2-146C-AF2493762045}"/>
+                </a:ext>
+              </a:extLst>
+            </p:cNvPr>
+            <p:cNvCxnSpPr>
+              <a:cxnSpLocks/>
+            </p:cNvCxnSpPr>
+            <p:nvPr/>
+          </p:nvCxnSpPr>
+          <p:spPr>
+            <a:xfrm>
+              <a:off x="4443164" y="2846117"/>
+              <a:ext cx="1872234" cy="0"/>
+            </a:xfrm>
+            <a:prstGeom prst="straightConnector1">
+              <a:avLst/>
+            </a:prstGeom>
+            <a:noFill/>
+            <a:ln w="6350" cap="flat" cmpd="sng" algn="ctr">
+              <a:solidFill>
+                <a:srgbClr val="000000"/>
+              </a:solidFill>
+              <a:prstDash val="solid"/>
+              <a:miter lim="800000"/>
+              <a:tailEnd type="triangle"/>
+            </a:ln>
+            <a:effectLst/>
+          </p:spPr>
+        </p:cxnSp>
+      </p:grpSp>
+      <p:grpSp>
+        <p:nvGrpSpPr>
+          <p:cNvPr id="42" name="Group 41">
+            <a:extLst>
+              <a:ext uri="{FF2B5EF4-FFF2-40B4-BE49-F238E27FC236}">
+                <a16:creationId xmlns:a16="http://schemas.microsoft.com/office/drawing/2014/main" id="{985C951B-E3E9-BFC7-1237-E1F2EEC46B01}"/>
+              </a:ext>
+            </a:extLst>
+          </p:cNvPr>
+          <p:cNvGrpSpPr/>
+          <p:nvPr/>
+        </p:nvGrpSpPr>
+        <p:grpSpPr>
+          <a:xfrm>
+            <a:off x="4633766" y="3822112"/>
+            <a:ext cx="2496312" cy="340399"/>
+            <a:chOff x="4443164" y="3787076"/>
+            <a:chExt cx="1872234" cy="255299"/>
+          </a:xfrm>
+        </p:grpSpPr>
+        <p:cxnSp>
+          <p:nvCxnSpPr>
+            <p:cNvPr id="43" name="Straight Arrow Connector 42">
+              <a:extLst>
+                <a:ext uri="{FF2B5EF4-FFF2-40B4-BE49-F238E27FC236}">
+                  <a16:creationId xmlns:a16="http://schemas.microsoft.com/office/drawing/2014/main" id="{D136F453-94AC-8D40-CAB1-C201BFC7B7F6}"/>
+                </a:ext>
+              </a:extLst>
+            </p:cNvPr>
+            <p:cNvCxnSpPr>
+              <a:cxnSpLocks/>
+            </p:cNvCxnSpPr>
+            <p:nvPr/>
+          </p:nvCxnSpPr>
+          <p:spPr>
+            <a:xfrm>
+              <a:off x="4443164" y="3921790"/>
+              <a:ext cx="1872234" cy="0"/>
+            </a:xfrm>
+            <a:prstGeom prst="straightConnector1">
+              <a:avLst/>
+            </a:prstGeom>
+            <a:noFill/>
+            <a:ln w="6350" cap="flat" cmpd="sng" algn="ctr">
+              <a:solidFill>
+                <a:sysClr val="windowText" lastClr="000000"/>
+              </a:solidFill>
+              <a:prstDash val="solid"/>
+              <a:miter lim="800000"/>
+              <a:tailEnd type="triangle"/>
+            </a:ln>
+            <a:effectLst/>
+          </p:spPr>
+        </p:cxnSp>
+        <p:sp>
+          <p:nvSpPr>
+            <p:cNvPr id="44" name="TextBox 43">
+              <a:extLst>
+                <a:ext uri="{FF2B5EF4-FFF2-40B4-BE49-F238E27FC236}">
+                  <a16:creationId xmlns:a16="http://schemas.microsoft.com/office/drawing/2014/main" id="{46BA143E-E90C-0440-DA82-20E4B42E0199}"/>
+                </a:ext>
+              </a:extLst>
+            </p:cNvPr>
+            <p:cNvSpPr txBox="1"/>
+            <p:nvPr/>
+          </p:nvSpPr>
+          <p:spPr>
+            <a:xfrm>
+              <a:off x="4668666" y="3787076"/>
+              <a:ext cx="1238673" cy="125900"/>
+            </a:xfrm>
+            <a:prstGeom prst="rect">
+              <a:avLst/>
+            </a:prstGeom>
+            <a:noFill/>
+          </p:spPr>
+          <p:txBody>
+            <a:bodyPr wrap="square" lIns="0" tIns="0" rIns="0" bIns="0">
+              <a:spAutoFit/>
+            </a:bodyPr>
+            <a:lstStyle/>
+            <a:p>
+              <a:pPr algn="ctr" defTabSz="609585" fontAlgn="base">
+                <a:spcBef>
+                  <a:spcPct val="0"/>
+                </a:spcBef>
+                <a:spcAft>
+                  <a:spcPct val="0"/>
+                </a:spcAft>
+                <a:defRPr/>
+              </a:pPr>
+              <a:r>
+                <a:rPr lang="en-US" sz="1050" kern="0" dirty="0">
+                  <a:solidFill>
+                    <a:prstClr val="black"/>
+                  </a:solidFill>
+                  <a:ea typeface="ヒラギノ角ゴ Pro W3" pitchFamily="-126" charset="-128"/>
+                  <a:cs typeface="Calibri" panose="020F0502020204030204" pitchFamily="34" charset="0"/>
+                </a:rPr>
+                <a:t>Call for Next Question</a:t>
+              </a:r>
+            </a:p>
+          </p:txBody>
+        </p:sp>
+        <p:sp>
+          <p:nvSpPr>
+            <p:cNvPr id="45" name="TextBox 44">
+              <a:extLst>
+                <a:ext uri="{FF2B5EF4-FFF2-40B4-BE49-F238E27FC236}">
+                  <a16:creationId xmlns:a16="http://schemas.microsoft.com/office/drawing/2014/main" id="{7B0F069F-6DB6-8F45-EAA4-C9889A8CE8B8}"/>
+                </a:ext>
+              </a:extLst>
+            </p:cNvPr>
+            <p:cNvSpPr txBox="1"/>
+            <p:nvPr/>
+          </p:nvSpPr>
+          <p:spPr>
+            <a:xfrm>
+              <a:off x="4589810" y="3926959"/>
+              <a:ext cx="1396385" cy="115416"/>
+            </a:xfrm>
+            <a:prstGeom prst="rect">
+              <a:avLst/>
+            </a:prstGeom>
+            <a:noFill/>
+          </p:spPr>
+          <p:txBody>
+            <a:bodyPr wrap="square" lIns="0" tIns="0" rIns="0" bIns="0">
+              <a:spAutoFit/>
+            </a:bodyPr>
+            <a:lstStyle/>
+            <a:p>
+              <a:pPr algn="ctr" defTabSz="609585" fontAlgn="base">
+                <a:spcBef>
+                  <a:spcPct val="0"/>
+                </a:spcBef>
+                <a:spcAft>
+                  <a:spcPct val="0"/>
+                </a:spcAft>
+                <a:defRPr/>
+              </a:pPr>
+              <a:r>
+                <a:rPr lang="en-US" sz="800" kern="0" dirty="0">
+                  <a:solidFill>
+                    <a:prstClr val="black"/>
+                  </a:solidFill>
+                  <a:latin typeface="Consolas" panose="020B0609020204030204" pitchFamily="49" charset="0"/>
+                  <a:ea typeface="ヒラギノ角ゴ Pro W3" pitchFamily="-126" charset="-128"/>
+                  <a:cs typeface="Calibri" panose="020F0502020204030204" pitchFamily="34" charset="0"/>
+                </a:rPr>
+                <a:t>(</a:t>
+              </a:r>
+              <a:r>
+                <a:rPr lang="en-US" sz="800" kern="0" dirty="0">
+                  <a:solidFill>
+                    <a:srgbClr val="167FAC">
+                      <a:lumMod val="50000"/>
+                    </a:srgbClr>
+                  </a:solidFill>
+                  <a:latin typeface="Consolas" panose="020B0609020204030204" pitchFamily="49" charset="0"/>
+                  <a:ea typeface="ヒラギノ角ゴ Pro W3" pitchFamily="-126" charset="-128"/>
+                  <a:cs typeface="Calibri" panose="020F0502020204030204" pitchFamily="34" charset="0"/>
+                </a:rPr>
+                <a:t>$next-question</a:t>
+              </a:r>
+              <a:r>
+                <a:rPr lang="en-US" sz="500" kern="0" dirty="0">
+                  <a:solidFill>
+                    <a:srgbClr val="167FAC">
+                      <a:lumMod val="50000"/>
+                    </a:srgbClr>
+                  </a:solidFill>
+                  <a:latin typeface="Consolas" panose="020B0609020204030204" pitchFamily="49" charset="0"/>
+                  <a:ea typeface="ヒラギノ角ゴ Pro W3" pitchFamily="-126" charset="-128"/>
+                  <a:cs typeface="Calibri" panose="020F0502020204030204" pitchFamily="34" charset="0"/>
+                </a:rPr>
+                <a:t> </a:t>
+              </a:r>
+              <a:r>
+                <a:rPr lang="en-US" sz="1000" kern="0" dirty="0">
+                  <a:solidFill>
+                    <a:prstClr val="black"/>
+                  </a:solidFill>
+                  <a:ea typeface="Calibri" panose="020F0502020204030204" pitchFamily="34" charset="0"/>
+                  <a:cs typeface="Calibri" panose="020F0502020204030204" pitchFamily="34" charset="0"/>
+                </a:rPr>
+                <a:t>operation</a:t>
+              </a:r>
+              <a:r>
+                <a:rPr lang="en-US" sz="800" kern="0" dirty="0">
+                  <a:solidFill>
+                    <a:prstClr val="black"/>
+                  </a:solidFill>
+                  <a:ea typeface="Calibri" panose="020F0502020204030204" pitchFamily="34" charset="0"/>
+                  <a:cs typeface="Calibri" panose="020F0502020204030204" pitchFamily="34" charset="0"/>
+                </a:rPr>
+                <a:t>)</a:t>
+              </a:r>
+            </a:p>
+          </p:txBody>
+        </p:sp>
+      </p:grpSp>
+      <p:sp>
+        <p:nvSpPr>
+          <p:cNvPr id="46" name="Rectangle: Rounded Corners 45">
+            <a:extLst>
+              <a:ext uri="{FF2B5EF4-FFF2-40B4-BE49-F238E27FC236}">
+                <a16:creationId xmlns:a16="http://schemas.microsoft.com/office/drawing/2014/main" id="{6773C177-8826-C0D1-3CD8-945F6450EB9F}"/>
+              </a:ext>
+            </a:extLst>
+          </p:cNvPr>
+          <p:cNvSpPr/>
+          <p:nvPr/>
+        </p:nvSpPr>
+        <p:spPr>
+          <a:xfrm>
+            <a:off x="4538728" y="2752125"/>
+            <a:ext cx="78837" cy="3108960"/>
+          </a:xfrm>
+          <a:prstGeom prst="roundRect">
+            <a:avLst>
+              <a:gd name="adj" fmla="val 0"/>
+            </a:avLst>
+          </a:prstGeom>
+          <a:solidFill>
+            <a:sysClr val="window" lastClr="FFFFFF"/>
+          </a:solidFill>
+          <a:ln w="9525" cap="flat" cmpd="sng" algn="ctr">
+            <a:solidFill>
+              <a:srgbClr val="FFFFFF">
+                <a:lumMod val="75000"/>
+              </a:srgbClr>
+            </a:solidFill>
+            <a:prstDash val="solid"/>
+            <a:miter lim="800000"/>
+          </a:ln>
+          <a:effectLst/>
+        </p:spPr>
+        <p:txBody>
+          <a:bodyPr lIns="0" rIns="0" rtlCol="0" anchor="ctr"/>
+          <a:lstStyle/>
+          <a:p>
+            <a:pPr algn="ctr" defTabSz="1219170">
+              <a:defRPr/>
+            </a:pPr>
+            <a:endParaRPr lang="en-US" sz="1091" kern="0" dirty="0">
+              <a:solidFill>
+                <a:srgbClr val="000000"/>
+              </a:solidFill>
+              <a:ea typeface="ヒラギノ角ゴ Pro W3" pitchFamily="-126" charset="-128"/>
+              <a:cs typeface="Calibri" panose="020F0502020204030204" pitchFamily="34" charset="0"/>
+            </a:endParaRPr>
+          </a:p>
+        </p:txBody>
+      </p:sp>
+      <p:grpSp>
+        <p:nvGrpSpPr>
+          <p:cNvPr id="47" name="Group 46">
+            <a:extLst>
+              <a:ext uri="{FF2B5EF4-FFF2-40B4-BE49-F238E27FC236}">
+                <a16:creationId xmlns:a16="http://schemas.microsoft.com/office/drawing/2014/main" id="{8D09863A-7CE3-AA75-9935-D747D66AE9C4}"/>
+              </a:ext>
+            </a:extLst>
+          </p:cNvPr>
+          <p:cNvGrpSpPr/>
+          <p:nvPr/>
+        </p:nvGrpSpPr>
+        <p:grpSpPr>
+          <a:xfrm>
+            <a:off x="7237848" y="2960693"/>
+            <a:ext cx="1341120" cy="289029"/>
+            <a:chOff x="6382569" y="2807772"/>
+            <a:chExt cx="1005840" cy="216772"/>
+          </a:xfrm>
+        </p:grpSpPr>
+        <p:cxnSp>
+          <p:nvCxnSpPr>
+            <p:cNvPr id="48" name="Straight Arrow Connector 47">
+              <a:extLst>
+                <a:ext uri="{FF2B5EF4-FFF2-40B4-BE49-F238E27FC236}">
+                  <a16:creationId xmlns:a16="http://schemas.microsoft.com/office/drawing/2014/main" id="{2F3B000D-6B31-EC2F-5757-C96CEE0195EB}"/>
+                </a:ext>
+              </a:extLst>
+            </p:cNvPr>
+            <p:cNvCxnSpPr>
+              <a:cxnSpLocks/>
+            </p:cNvCxnSpPr>
+            <p:nvPr/>
+          </p:nvCxnSpPr>
+          <p:spPr>
+            <a:xfrm>
+              <a:off x="6382569" y="3024544"/>
+              <a:ext cx="1005840" cy="0"/>
+            </a:xfrm>
+            <a:prstGeom prst="straightConnector1">
+              <a:avLst/>
+            </a:prstGeom>
+            <a:noFill/>
+            <a:ln w="6350" cap="flat" cmpd="sng" algn="ctr">
+              <a:solidFill>
+                <a:srgbClr val="000000"/>
+              </a:solidFill>
+              <a:prstDash val="solid"/>
+              <a:miter lim="800000"/>
+              <a:headEnd type="triangle"/>
+              <a:tailEnd type="triangle"/>
+            </a:ln>
+            <a:effectLst/>
+          </p:spPr>
+        </p:cxnSp>
+        <p:sp>
+          <p:nvSpPr>
+            <p:cNvPr id="49" name="TextBox 48">
+              <a:extLst>
+                <a:ext uri="{FF2B5EF4-FFF2-40B4-BE49-F238E27FC236}">
+                  <a16:creationId xmlns:a16="http://schemas.microsoft.com/office/drawing/2014/main" id="{E8BB2E5E-3EEA-3385-7230-47DA554E4CF7}"/>
+                </a:ext>
+              </a:extLst>
+            </p:cNvPr>
+            <p:cNvSpPr txBox="1"/>
+            <p:nvPr/>
+          </p:nvSpPr>
+          <p:spPr>
+            <a:xfrm>
+              <a:off x="6534257" y="2807772"/>
+              <a:ext cx="714601" cy="212847"/>
+            </a:xfrm>
+            <a:prstGeom prst="rect">
+              <a:avLst/>
+            </a:prstGeom>
+            <a:noFill/>
+          </p:spPr>
+          <p:txBody>
+            <a:bodyPr wrap="square" lIns="0" tIns="0" rIns="0" bIns="0">
+              <a:spAutoFit/>
+            </a:bodyPr>
+            <a:lstStyle/>
+            <a:p>
+              <a:pPr algn="ctr" defTabSz="1219170">
+                <a:lnSpc>
+                  <a:spcPts val="1100"/>
+                </a:lnSpc>
+                <a:defRPr/>
+              </a:pPr>
+              <a:r>
+                <a:rPr lang="en-US" sz="1050" kern="0" dirty="0">
+                  <a:solidFill>
+                    <a:srgbClr val="000000"/>
+                  </a:solidFill>
+                  <a:ea typeface="ヒラギノ角ゴ Pro W3" pitchFamily="-126" charset="-128"/>
+                  <a:cs typeface="Calibri" panose="020F0502020204030204" pitchFamily="34" charset="0"/>
+                </a:rPr>
+                <a:t>Templates/Rules </a:t>
+              </a:r>
+            </a:p>
+            <a:p>
+              <a:pPr algn="ctr" defTabSz="1219170">
+                <a:lnSpc>
+                  <a:spcPts val="1100"/>
+                </a:lnSpc>
+                <a:defRPr/>
+              </a:pPr>
+              <a:r>
+                <a:rPr lang="en-US" sz="1050" kern="0" dirty="0">
+                  <a:solidFill>
+                    <a:srgbClr val="000000"/>
+                  </a:solidFill>
+                  <a:ea typeface="ヒラギノ角ゴ Pro W3" pitchFamily="-126" charset="-128"/>
+                  <a:cs typeface="Calibri" panose="020F0502020204030204" pitchFamily="34" charset="0"/>
+                </a:rPr>
+                <a:t>Processing</a:t>
+              </a:r>
+            </a:p>
+          </p:txBody>
+        </p:sp>
+      </p:grpSp>
+      <p:sp>
+        <p:nvSpPr>
+          <p:cNvPr id="50" name="TextBox 49">
+            <a:extLst>
+              <a:ext uri="{FF2B5EF4-FFF2-40B4-BE49-F238E27FC236}">
+                <a16:creationId xmlns:a16="http://schemas.microsoft.com/office/drawing/2014/main" id="{4BFD3868-42C5-118C-1AE3-B6DC58BD0749}"/>
+              </a:ext>
+            </a:extLst>
+          </p:cNvPr>
+          <p:cNvSpPr txBox="1"/>
+          <p:nvPr/>
+        </p:nvSpPr>
+        <p:spPr>
+          <a:xfrm>
+            <a:off x="1052708" y="803135"/>
+            <a:ext cx="4068021" cy="260199"/>
+          </a:xfrm>
+          <a:prstGeom prst="rect">
+            <a:avLst/>
+          </a:prstGeom>
+          <a:noFill/>
+        </p:spPr>
+        <p:txBody>
+          <a:bodyPr wrap="square">
+            <a:spAutoFit/>
+          </a:bodyPr>
+          <a:lstStyle/>
+          <a:p>
+            <a:pPr algn="ctr" defTabSz="609585" fontAlgn="base">
+              <a:spcBef>
+                <a:spcPct val="0"/>
+              </a:spcBef>
+              <a:spcAft>
+                <a:spcPct val="0"/>
+              </a:spcAft>
+            </a:pPr>
+            <a:r>
+              <a:rPr lang="en-US" sz="1100" b="1" kern="0" dirty="0">
+                <a:solidFill>
+                  <a:srgbClr val="000000"/>
+                </a:solidFill>
+                <a:ea typeface="ヒラギノ角ゴ Pro W3" pitchFamily="-126" charset="-128"/>
+                <a:cs typeface="Calibri" panose="020F0502020204030204" pitchFamily="34" charset="0"/>
+              </a:rPr>
+              <a:t>Provider System</a:t>
+            </a:r>
+          </a:p>
+        </p:txBody>
+      </p:sp>
+      <p:grpSp>
+        <p:nvGrpSpPr>
+          <p:cNvPr id="51" name="Group 50">
+            <a:extLst>
+              <a:ext uri="{FF2B5EF4-FFF2-40B4-BE49-F238E27FC236}">
+                <a16:creationId xmlns:a16="http://schemas.microsoft.com/office/drawing/2014/main" id="{EADCFA5E-5759-A86D-8A7C-7DC5A116E030}"/>
+              </a:ext>
+            </a:extLst>
+          </p:cNvPr>
+          <p:cNvGrpSpPr/>
+          <p:nvPr/>
+        </p:nvGrpSpPr>
+        <p:grpSpPr>
+          <a:xfrm>
+            <a:off x="7248281" y="3937799"/>
+            <a:ext cx="1341120" cy="167866"/>
+            <a:chOff x="6397392" y="3957409"/>
+            <a:chExt cx="1005840" cy="125900"/>
+          </a:xfrm>
+        </p:grpSpPr>
+        <p:cxnSp>
+          <p:nvCxnSpPr>
+            <p:cNvPr id="52" name="Straight Arrow Connector 51">
+              <a:extLst>
+                <a:ext uri="{FF2B5EF4-FFF2-40B4-BE49-F238E27FC236}">
+                  <a16:creationId xmlns:a16="http://schemas.microsoft.com/office/drawing/2014/main" id="{E7525F39-2529-45A3-AA8F-4A081C8DF4CC}"/>
+                </a:ext>
+              </a:extLst>
+            </p:cNvPr>
+            <p:cNvCxnSpPr>
+              <a:cxnSpLocks/>
+            </p:cNvCxnSpPr>
+            <p:nvPr/>
+          </p:nvCxnSpPr>
+          <p:spPr>
+            <a:xfrm>
+              <a:off x="6397392" y="4083309"/>
+              <a:ext cx="1005840" cy="0"/>
+            </a:xfrm>
+            <a:prstGeom prst="straightConnector1">
+              <a:avLst/>
+            </a:prstGeom>
+            <a:noFill/>
+            <a:ln w="6350" cap="flat" cmpd="sng" algn="ctr">
+              <a:solidFill>
+                <a:srgbClr val="000000"/>
+              </a:solidFill>
+              <a:prstDash val="solid"/>
+              <a:miter lim="800000"/>
+              <a:headEnd type="none"/>
+              <a:tailEnd type="triangle"/>
+            </a:ln>
+            <a:effectLst/>
+          </p:spPr>
+        </p:cxnSp>
+        <p:sp>
+          <p:nvSpPr>
+            <p:cNvPr id="53" name="TextBox 52">
+              <a:extLst>
+                <a:ext uri="{FF2B5EF4-FFF2-40B4-BE49-F238E27FC236}">
+                  <a16:creationId xmlns:a16="http://schemas.microsoft.com/office/drawing/2014/main" id="{5B4708E0-C6D3-489D-1EF6-DA028999C2AF}"/>
+                </a:ext>
+              </a:extLst>
+            </p:cNvPr>
+            <p:cNvSpPr txBox="1"/>
+            <p:nvPr/>
+          </p:nvSpPr>
+          <p:spPr>
+            <a:xfrm>
+              <a:off x="6488658" y="3957409"/>
+              <a:ext cx="787980" cy="121188"/>
+            </a:xfrm>
+            <a:prstGeom prst="rect">
+              <a:avLst/>
+            </a:prstGeom>
+            <a:noFill/>
+          </p:spPr>
+          <p:txBody>
+            <a:bodyPr wrap="square" lIns="0" tIns="0" rIns="0" bIns="0">
+              <a:spAutoFit/>
+            </a:bodyPr>
+            <a:lstStyle/>
+            <a:p>
+              <a:pPr algn="ctr" defTabSz="1219170">
+                <a:defRPr/>
+              </a:pPr>
+              <a:r>
+                <a:rPr lang="en-US" sz="1050" kern="0" dirty="0">
+                  <a:solidFill>
+                    <a:srgbClr val="000000"/>
+                  </a:solidFill>
+                  <a:ea typeface="ヒラギノ角ゴ Pro W3" pitchFamily="-126" charset="-128"/>
+                  <a:cs typeface="Calibri" panose="020F0502020204030204" pitchFamily="34" charset="0"/>
+                </a:rPr>
+                <a:t>Payer Evaluation</a:t>
+              </a:r>
+            </a:p>
+          </p:txBody>
+        </p:sp>
+      </p:grpSp>
+      <p:sp>
+        <p:nvSpPr>
+          <p:cNvPr id="54" name="Rectangle: Rounded Corners 53">
+            <a:extLst>
+              <a:ext uri="{FF2B5EF4-FFF2-40B4-BE49-F238E27FC236}">
+                <a16:creationId xmlns:a16="http://schemas.microsoft.com/office/drawing/2014/main" id="{8A31740E-6724-86E2-D463-739C3C6926AD}"/>
+              </a:ext>
+            </a:extLst>
+          </p:cNvPr>
+          <p:cNvSpPr/>
+          <p:nvPr/>
+        </p:nvSpPr>
+        <p:spPr>
+          <a:xfrm>
+            <a:off x="6655689" y="1082009"/>
+            <a:ext cx="1097280" cy="353781"/>
+          </a:xfrm>
+          <a:prstGeom prst="roundRect">
+            <a:avLst>
+              <a:gd name="adj" fmla="val 0"/>
+            </a:avLst>
+          </a:prstGeom>
+          <a:solidFill>
+            <a:srgbClr val="FCF0D0"/>
+          </a:solidFill>
+          <a:ln w="9525" cap="flat" cmpd="sng" algn="ctr">
+            <a:solidFill>
+              <a:srgbClr val="E5EEEF">
+                <a:lumMod val="25000"/>
+              </a:srgbClr>
+            </a:solidFill>
+            <a:prstDash val="solid"/>
+            <a:miter lim="800000"/>
+          </a:ln>
+          <a:effectLst/>
+        </p:spPr>
+        <p:txBody>
+          <a:bodyPr lIns="0" rIns="0" rtlCol="0" anchor="ctr"/>
+          <a:lstStyle/>
+          <a:p>
+            <a:pPr algn="ctr" defTabSz="1219170">
+              <a:defRPr/>
+            </a:pPr>
+            <a:r>
+              <a:rPr lang="en-US" sz="1067" kern="0" dirty="0">
+                <a:solidFill>
+                  <a:srgbClr val="000000"/>
+                </a:solidFill>
+                <a:ea typeface="ヒラギノ角ゴ Pro W3" pitchFamily="-126" charset="-128"/>
+                <a:cs typeface="Calibri" panose="020F0502020204030204" pitchFamily="34" charset="0"/>
+              </a:rPr>
+              <a:t>DTR Endpoint</a:t>
+            </a:r>
+          </a:p>
+        </p:txBody>
+      </p:sp>
+      <p:sp>
+        <p:nvSpPr>
+          <p:cNvPr id="55" name="Rectangle: Rounded Corners 54">
+            <a:extLst>
+              <a:ext uri="{FF2B5EF4-FFF2-40B4-BE49-F238E27FC236}">
+                <a16:creationId xmlns:a16="http://schemas.microsoft.com/office/drawing/2014/main" id="{5DA52009-51AC-F1BA-5E5F-79EA8FF28D88}"/>
+              </a:ext>
+            </a:extLst>
+          </p:cNvPr>
+          <p:cNvSpPr/>
+          <p:nvPr/>
+        </p:nvSpPr>
+        <p:spPr>
+          <a:xfrm>
+            <a:off x="8084834" y="1082009"/>
+            <a:ext cx="1097280" cy="353781"/>
+          </a:xfrm>
+          <a:prstGeom prst="roundRect">
+            <a:avLst>
+              <a:gd name="adj" fmla="val 0"/>
+            </a:avLst>
+          </a:prstGeom>
+          <a:solidFill>
+            <a:srgbClr val="FCF0D0"/>
+          </a:solidFill>
+          <a:ln w="9525" cap="flat" cmpd="sng" algn="ctr">
+            <a:solidFill>
+              <a:srgbClr val="E5EEEF">
+                <a:lumMod val="25000"/>
+              </a:srgbClr>
+            </a:solidFill>
+            <a:prstDash val="solid"/>
+            <a:miter lim="800000"/>
+          </a:ln>
+          <a:effectLst/>
+        </p:spPr>
+        <p:txBody>
+          <a:bodyPr lIns="0" rIns="0" rtlCol="0" anchor="ctr"/>
+          <a:lstStyle/>
+          <a:p>
+            <a:pPr algn="ctr" defTabSz="1219170">
+              <a:defRPr/>
+            </a:pPr>
+            <a:r>
+              <a:rPr lang="en-US" sz="1067" kern="0" dirty="0">
+                <a:solidFill>
+                  <a:srgbClr val="000000"/>
+                </a:solidFill>
+                <a:ea typeface="ヒラギノ角ゴ Pro W3" pitchFamily="-126" charset="-128"/>
+                <a:cs typeface="Calibri" panose="020F0502020204030204" pitchFamily="34" charset="0"/>
+              </a:rPr>
+              <a:t>Templates / Rules</a:t>
+            </a:r>
+          </a:p>
+          <a:p>
+            <a:pPr algn="ctr" defTabSz="1219170">
+              <a:defRPr/>
+            </a:pPr>
+            <a:r>
+              <a:rPr lang="en-US" sz="1067" kern="0" dirty="0">
+                <a:solidFill>
+                  <a:srgbClr val="000000"/>
+                </a:solidFill>
+                <a:ea typeface="ヒラギノ角ゴ Pro W3" pitchFamily="-126" charset="-128"/>
+                <a:cs typeface="Calibri" panose="020F0502020204030204" pitchFamily="34" charset="0"/>
+              </a:rPr>
+              <a:t>System</a:t>
+            </a:r>
+          </a:p>
+        </p:txBody>
+      </p:sp>
+      <p:sp>
+        <p:nvSpPr>
+          <p:cNvPr id="56" name="Rectangle: Rounded Corners 55">
+            <a:extLst>
+              <a:ext uri="{FF2B5EF4-FFF2-40B4-BE49-F238E27FC236}">
+                <a16:creationId xmlns:a16="http://schemas.microsoft.com/office/drawing/2014/main" id="{DDEF0CCE-D53F-09BE-EC08-E93E585B6777}"/>
+              </a:ext>
+            </a:extLst>
+          </p:cNvPr>
+          <p:cNvSpPr/>
+          <p:nvPr/>
+        </p:nvSpPr>
+        <p:spPr>
+          <a:xfrm>
+            <a:off x="1178661" y="1082009"/>
+            <a:ext cx="914400" cy="353781"/>
+          </a:xfrm>
+          <a:prstGeom prst="roundRect">
+            <a:avLst>
+              <a:gd name="adj" fmla="val 0"/>
+            </a:avLst>
+          </a:prstGeom>
+          <a:solidFill>
+            <a:srgbClr val="FCF0D0"/>
+          </a:solidFill>
+          <a:ln w="9525" cap="flat" cmpd="sng" algn="ctr">
+            <a:solidFill>
+              <a:srgbClr val="E5EEEF">
+                <a:lumMod val="25000"/>
+              </a:srgbClr>
+            </a:solidFill>
+            <a:prstDash val="solid"/>
+            <a:miter lim="800000"/>
+          </a:ln>
+          <a:effectLst/>
+        </p:spPr>
+        <p:txBody>
+          <a:bodyPr lIns="0" rIns="0" rtlCol="0" anchor="ctr"/>
+          <a:lstStyle/>
+          <a:p>
+            <a:pPr algn="ctr" defTabSz="1219170">
+              <a:defRPr/>
+            </a:pPr>
+            <a:r>
+              <a:rPr lang="en-US" sz="1067" kern="0" dirty="0">
+                <a:solidFill>
+                  <a:srgbClr val="000000"/>
+                </a:solidFill>
+                <a:ea typeface="ヒラギノ角ゴ Pro W3" pitchFamily="-126" charset="-128"/>
+                <a:cs typeface="Calibri" panose="020F0502020204030204" pitchFamily="34" charset="0"/>
+              </a:rPr>
+              <a:t>Provider</a:t>
+            </a:r>
+            <a:endParaRPr lang="en-US" sz="1091" kern="0" dirty="0">
+              <a:solidFill>
+                <a:srgbClr val="000000"/>
+              </a:solidFill>
+              <a:ea typeface="ヒラギノ角ゴ Pro W3" pitchFamily="-126" charset="-128"/>
+              <a:cs typeface="Calibri" panose="020F0502020204030204" pitchFamily="34" charset="0"/>
+            </a:endParaRPr>
+          </a:p>
+        </p:txBody>
+      </p:sp>
+      <p:cxnSp>
+        <p:nvCxnSpPr>
+          <p:cNvPr id="57" name="Straight Arrow Connector 56">
+            <a:extLst>
+              <a:ext uri="{FF2B5EF4-FFF2-40B4-BE49-F238E27FC236}">
+                <a16:creationId xmlns:a16="http://schemas.microsoft.com/office/drawing/2014/main" id="{49440142-6809-E42E-8BFA-B164A00ED746}"/>
+              </a:ext>
+            </a:extLst>
+          </p:cNvPr>
+          <p:cNvCxnSpPr>
+            <a:cxnSpLocks/>
+          </p:cNvCxnSpPr>
+          <p:nvPr/>
+        </p:nvCxnSpPr>
+        <p:spPr>
+          <a:xfrm flipV="1">
+            <a:off x="10314962" y="3649284"/>
+            <a:ext cx="8442" cy="1728216"/>
+          </a:xfrm>
+          <a:prstGeom prst="straightConnector1">
+            <a:avLst/>
+          </a:prstGeom>
+          <a:noFill/>
+          <a:ln w="9525" cap="flat" cmpd="sng" algn="ctr">
+            <a:solidFill>
+              <a:sysClr val="windowText" lastClr="000000"/>
+            </a:solidFill>
+            <a:prstDash val="dash"/>
+            <a:miter lim="800000"/>
+            <a:tailEnd type="none"/>
+          </a:ln>
+          <a:effectLst/>
+        </p:spPr>
+      </p:cxnSp>
+      <p:grpSp>
+        <p:nvGrpSpPr>
+          <p:cNvPr id="58" name="Group 57">
+            <a:extLst>
+              <a:ext uri="{FF2B5EF4-FFF2-40B4-BE49-F238E27FC236}">
+                <a16:creationId xmlns:a16="http://schemas.microsoft.com/office/drawing/2014/main" id="{7269E55F-75B4-26AA-4B31-FAEB23A0385A}"/>
+              </a:ext>
+            </a:extLst>
+          </p:cNvPr>
+          <p:cNvGrpSpPr/>
+          <p:nvPr/>
+        </p:nvGrpSpPr>
+        <p:grpSpPr>
+          <a:xfrm>
+            <a:off x="3135884" y="5883813"/>
+            <a:ext cx="3096957" cy="329225"/>
+            <a:chOff x="2915964" y="4460063"/>
+            <a:chExt cx="2322707" cy="246919"/>
+          </a:xfrm>
+        </p:grpSpPr>
+        <p:sp>
+          <p:nvSpPr>
+            <p:cNvPr id="59" name="TextBox 58">
+              <a:extLst>
+                <a:ext uri="{FF2B5EF4-FFF2-40B4-BE49-F238E27FC236}">
+                  <a16:creationId xmlns:a16="http://schemas.microsoft.com/office/drawing/2014/main" id="{C44424A1-777E-03BD-BC24-9716F4CBAC2F}"/>
+                </a:ext>
+              </a:extLst>
+            </p:cNvPr>
+            <p:cNvSpPr txBox="1"/>
+            <p:nvPr/>
+          </p:nvSpPr>
+          <p:spPr>
+            <a:xfrm>
+              <a:off x="3193810" y="4461124"/>
+              <a:ext cx="539388" cy="125900"/>
+            </a:xfrm>
+            <a:prstGeom prst="rect">
+              <a:avLst/>
+            </a:prstGeom>
+            <a:noFill/>
+          </p:spPr>
+          <p:txBody>
+            <a:bodyPr wrap="square" lIns="0" tIns="0" rIns="0" bIns="0">
+              <a:spAutoFit/>
+            </a:bodyPr>
+            <a:lstStyle/>
+            <a:p>
+              <a:pPr algn="ctr" defTabSz="1219170">
+                <a:defRPr/>
+              </a:pPr>
+              <a:r>
+                <a:rPr lang="en-US" sz="1050" kern="0" dirty="0">
+                  <a:solidFill>
+                    <a:srgbClr val="C0504D">
+                      <a:lumMod val="50000"/>
+                    </a:srgbClr>
+                  </a:solidFill>
+                  <a:ea typeface="ヒラギノ角ゴ Pro W3" pitchFamily="-126" charset="-128"/>
+                  <a:cs typeface="Calibri" panose="020F0502020204030204" pitchFamily="34" charset="0"/>
+                </a:rPr>
+                <a:t>Launch PAS</a:t>
+              </a:r>
+            </a:p>
+          </p:txBody>
+        </p:sp>
+        <p:cxnSp>
+          <p:nvCxnSpPr>
+            <p:cNvPr id="60" name="Straight Arrow Connector 59">
+              <a:extLst>
+                <a:ext uri="{FF2B5EF4-FFF2-40B4-BE49-F238E27FC236}">
+                  <a16:creationId xmlns:a16="http://schemas.microsoft.com/office/drawing/2014/main" id="{AB93C7F0-8237-FC5F-133F-D6535A954693}"/>
+                </a:ext>
+              </a:extLst>
+            </p:cNvPr>
+            <p:cNvCxnSpPr>
+              <a:cxnSpLocks/>
+            </p:cNvCxnSpPr>
+            <p:nvPr/>
+          </p:nvCxnSpPr>
+          <p:spPr>
+            <a:xfrm flipH="1">
+              <a:off x="2915964" y="4576480"/>
+              <a:ext cx="2057400" cy="0"/>
+            </a:xfrm>
+            <a:prstGeom prst="straightConnector1">
+              <a:avLst/>
+            </a:prstGeom>
+            <a:noFill/>
+            <a:ln w="6350" cap="flat" cmpd="sng" algn="ctr">
+              <a:solidFill>
+                <a:srgbClr val="C0504D">
+                  <a:lumMod val="75000"/>
+                </a:srgbClr>
+              </a:solidFill>
+              <a:prstDash val="dash"/>
+              <a:miter lim="800000"/>
+              <a:headEnd type="triangle"/>
+              <a:tailEnd type="none"/>
+            </a:ln>
+            <a:effectLst/>
+          </p:spPr>
+        </p:cxnSp>
+        <p:sp>
+          <p:nvSpPr>
+            <p:cNvPr id="61" name="Flowchart: Off-page Connector 60">
+              <a:extLst>
+                <a:ext uri="{FF2B5EF4-FFF2-40B4-BE49-F238E27FC236}">
+                  <a16:creationId xmlns:a16="http://schemas.microsoft.com/office/drawing/2014/main" id="{E5E30B85-C697-97CF-0741-D6579875BEE4}"/>
+                </a:ext>
+              </a:extLst>
+            </p:cNvPr>
+            <p:cNvSpPr/>
+            <p:nvPr/>
+          </p:nvSpPr>
+          <p:spPr>
+            <a:xfrm>
+              <a:off x="4982639" y="4460063"/>
+              <a:ext cx="256032" cy="246919"/>
+            </a:xfrm>
+            <a:prstGeom prst="flowChartOffpageConnector">
+              <a:avLst/>
+            </a:prstGeom>
+            <a:gradFill flip="none" rotWithShape="1">
+              <a:gsLst>
+                <a:gs pos="100000">
+                  <a:srgbClr val="C0504D">
+                    <a:lumMod val="20000"/>
+                    <a:lumOff val="80000"/>
+                  </a:srgbClr>
+                </a:gs>
+                <a:gs pos="32000">
+                  <a:sysClr val="window" lastClr="FFFFFF">
+                    <a:lumMod val="95000"/>
+                  </a:sysClr>
+                </a:gs>
+              </a:gsLst>
+              <a:lin ang="16200000" scaled="1"/>
+              <a:tileRect/>
+            </a:gradFill>
+            <a:ln w="9525" cap="flat" cmpd="sng" algn="ctr">
+              <a:solidFill>
+                <a:srgbClr val="C0504D">
+                  <a:lumMod val="75000"/>
+                </a:srgbClr>
+              </a:solidFill>
+              <a:prstDash val="solid"/>
+            </a:ln>
+            <a:effectLst>
+              <a:outerShdw blurRad="50800" dist="25400" dir="4200000" algn="tl" rotWithShape="0">
+                <a:prstClr val="black">
+                  <a:alpha val="40000"/>
+                </a:prstClr>
+              </a:outerShdw>
+            </a:effectLst>
+          </p:spPr>
+          <p:txBody>
+            <a:bodyPr rtlCol="0" anchor="ctr"/>
+            <a:lstStyle/>
+            <a:p>
+              <a:pPr algn="ctr" defTabSz="609585" fontAlgn="base">
+                <a:spcBef>
+                  <a:spcPct val="0"/>
+                </a:spcBef>
+                <a:spcAft>
+                  <a:spcPct val="0"/>
+                </a:spcAft>
+                <a:defRPr/>
+              </a:pPr>
+              <a:endParaRPr lang="en-US" sz="2400" kern="0" dirty="0">
+                <a:solidFill>
+                  <a:prstClr val="white"/>
+                </a:solidFill>
+                <a:latin typeface="Arial"/>
+              </a:endParaRPr>
+            </a:p>
+          </p:txBody>
+        </p:sp>
+        <p:sp>
+          <p:nvSpPr>
+            <p:cNvPr id="62" name="TextBox 61">
+              <a:extLst>
+                <a:ext uri="{FF2B5EF4-FFF2-40B4-BE49-F238E27FC236}">
+                  <a16:creationId xmlns:a16="http://schemas.microsoft.com/office/drawing/2014/main" id="{BBD2EED3-9A06-682B-A8A1-26809B4F407A}"/>
+                </a:ext>
+              </a:extLst>
+            </p:cNvPr>
+            <p:cNvSpPr txBox="1"/>
+            <p:nvPr/>
+          </p:nvSpPr>
+          <p:spPr>
+            <a:xfrm>
+              <a:off x="4999581" y="4499469"/>
+              <a:ext cx="232472" cy="125900"/>
+            </a:xfrm>
+            <a:prstGeom prst="rect">
+              <a:avLst/>
+            </a:prstGeom>
+            <a:noFill/>
+          </p:spPr>
+          <p:txBody>
+            <a:bodyPr wrap="square" lIns="0" tIns="0" rIns="0" bIns="0">
+              <a:spAutoFit/>
+            </a:bodyPr>
+            <a:lstStyle/>
+            <a:p>
+              <a:pPr algn="ctr" defTabSz="1219170">
+                <a:defRPr/>
+              </a:pPr>
+              <a:r>
+                <a:rPr lang="en-US" sz="1091" b="1" kern="0" dirty="0">
+                  <a:solidFill>
+                    <a:srgbClr val="9A0000"/>
+                  </a:solidFill>
+                  <a:ea typeface="ヒラギノ角ゴ Pro W3" pitchFamily="-126" charset="-128"/>
+                  <a:cs typeface="Calibri" panose="020F0502020204030204" pitchFamily="34" charset="0"/>
+                </a:rPr>
+                <a:t>PAS</a:t>
+              </a:r>
+            </a:p>
+          </p:txBody>
+        </p:sp>
+      </p:grpSp>
+      <p:sp>
+        <p:nvSpPr>
+          <p:cNvPr id="63" name="Diamond 62">
+            <a:extLst>
+              <a:ext uri="{FF2B5EF4-FFF2-40B4-BE49-F238E27FC236}">
+                <a16:creationId xmlns:a16="http://schemas.microsoft.com/office/drawing/2014/main" id="{E25C056D-5AD0-2E4F-1356-8B8B03F6F9E7}"/>
+              </a:ext>
+            </a:extLst>
+          </p:cNvPr>
+          <p:cNvSpPr/>
+          <p:nvPr/>
+        </p:nvSpPr>
+        <p:spPr>
+          <a:xfrm>
+            <a:off x="1586011" y="2664744"/>
+            <a:ext cx="99983" cy="104503"/>
+          </a:xfrm>
+          <a:prstGeom prst="diamond">
+            <a:avLst/>
+          </a:prstGeom>
+          <a:solidFill>
+            <a:srgbClr val="E5EEEF">
+              <a:lumMod val="90000"/>
+            </a:srgbClr>
+          </a:solidFill>
+          <a:ln w="12700" cap="flat" cmpd="sng" algn="ctr">
+            <a:solidFill>
+              <a:srgbClr val="E5EEEF">
+                <a:lumMod val="50000"/>
+              </a:srgbClr>
+            </a:solidFill>
+            <a:prstDash val="solid"/>
+            <a:miter lim="800000"/>
+          </a:ln>
+          <a:effectLst/>
+        </p:spPr>
+        <p:txBody>
+          <a:bodyPr rtlCol="0" anchor="ctr"/>
+          <a:lstStyle/>
+          <a:p>
+            <a:pPr algn="ctr">
+              <a:defRPr/>
+            </a:pPr>
+            <a:endParaRPr lang="en-US" kern="0">
+              <a:solidFill>
+                <a:srgbClr val="FFFFFF"/>
+              </a:solidFill>
+              <a:latin typeface="Arial" panose="020B0604020202020204"/>
+            </a:endParaRPr>
+          </a:p>
+        </p:txBody>
+      </p:sp>
+      <p:cxnSp>
+        <p:nvCxnSpPr>
+          <p:cNvPr id="66" name="Straight Connector 65">
+            <a:extLst>
+              <a:ext uri="{FF2B5EF4-FFF2-40B4-BE49-F238E27FC236}">
+                <a16:creationId xmlns:a16="http://schemas.microsoft.com/office/drawing/2014/main" id="{2BEDAE15-0016-D75F-185B-4FE24AEC06FA}"/>
+              </a:ext>
+            </a:extLst>
+          </p:cNvPr>
+          <p:cNvCxnSpPr>
+            <a:cxnSpLocks/>
+          </p:cNvCxnSpPr>
+          <p:nvPr/>
+        </p:nvCxnSpPr>
+        <p:spPr>
+          <a:xfrm>
+            <a:off x="10053905" y="1390559"/>
+            <a:ext cx="0" cy="4754880"/>
+          </a:xfrm>
+          <a:prstGeom prst="line">
+            <a:avLst/>
+          </a:prstGeom>
+          <a:noFill/>
+          <a:ln w="6350" cap="flat" cmpd="sng" algn="ctr">
+            <a:solidFill>
+              <a:srgbClr val="FFFFFF">
+                <a:lumMod val="75000"/>
+              </a:srgbClr>
+            </a:solidFill>
+            <a:prstDash val="dash"/>
+            <a:miter lim="800000"/>
+          </a:ln>
+          <a:effectLst/>
+        </p:spPr>
+      </p:cxnSp>
+      <p:sp>
+        <p:nvSpPr>
+          <p:cNvPr id="67" name="Rectangle: Rounded Corners 66">
+            <a:extLst>
+              <a:ext uri="{FF2B5EF4-FFF2-40B4-BE49-F238E27FC236}">
+                <a16:creationId xmlns:a16="http://schemas.microsoft.com/office/drawing/2014/main" id="{C79C47AD-4299-8109-4AC3-B59105528A2A}"/>
+              </a:ext>
+            </a:extLst>
+          </p:cNvPr>
+          <p:cNvSpPr/>
+          <p:nvPr/>
+        </p:nvSpPr>
+        <p:spPr>
+          <a:xfrm>
+            <a:off x="10011709" y="2752644"/>
+            <a:ext cx="85344" cy="2679192"/>
+          </a:xfrm>
+          <a:prstGeom prst="roundRect">
+            <a:avLst>
+              <a:gd name="adj" fmla="val 0"/>
+            </a:avLst>
+          </a:prstGeom>
+          <a:solidFill>
+            <a:sysClr val="window" lastClr="FFFFFF"/>
+          </a:solidFill>
+          <a:ln w="9525" cap="flat" cmpd="sng" algn="ctr">
+            <a:solidFill>
+              <a:srgbClr val="FFFFFF">
+                <a:lumMod val="75000"/>
+              </a:srgbClr>
+            </a:solidFill>
+            <a:prstDash val="solid"/>
+            <a:miter lim="800000"/>
+          </a:ln>
+          <a:effectLst/>
+        </p:spPr>
+        <p:txBody>
+          <a:bodyPr lIns="0" rIns="0" rtlCol="0" anchor="ctr"/>
+          <a:lstStyle/>
+          <a:p>
+            <a:pPr algn="ctr" defTabSz="1219170">
+              <a:defRPr/>
+            </a:pPr>
+            <a:endParaRPr lang="en-US" sz="1091" kern="0" dirty="0">
+              <a:solidFill>
+                <a:srgbClr val="000000"/>
+              </a:solidFill>
+              <a:ea typeface="ヒラギノ角ゴ Pro W3" pitchFamily="-126" charset="-128"/>
+              <a:cs typeface="Calibri" panose="020F0502020204030204" pitchFamily="34" charset="0"/>
+            </a:endParaRPr>
+          </a:p>
+        </p:txBody>
+      </p:sp>
+      <p:sp>
+        <p:nvSpPr>
+          <p:cNvPr id="68" name="Rectangle: Rounded Corners 67">
+            <a:extLst>
+              <a:ext uri="{FF2B5EF4-FFF2-40B4-BE49-F238E27FC236}">
+                <a16:creationId xmlns:a16="http://schemas.microsoft.com/office/drawing/2014/main" id="{8FAB9D9A-E46D-901B-54D9-95D0F4D171D4}"/>
+              </a:ext>
+            </a:extLst>
+          </p:cNvPr>
+          <p:cNvSpPr/>
+          <p:nvPr/>
+        </p:nvSpPr>
+        <p:spPr>
+          <a:xfrm>
+            <a:off x="9509307" y="1079663"/>
+            <a:ext cx="1097280" cy="353781"/>
+          </a:xfrm>
+          <a:prstGeom prst="roundRect">
+            <a:avLst>
+              <a:gd name="adj" fmla="val 0"/>
+            </a:avLst>
+          </a:prstGeom>
+          <a:solidFill>
+            <a:srgbClr val="FCF0D0"/>
+          </a:solidFill>
+          <a:ln w="9525" cap="flat" cmpd="sng" algn="ctr">
+            <a:solidFill>
+              <a:srgbClr val="E5EEEF">
+                <a:lumMod val="25000"/>
+              </a:srgbClr>
+            </a:solidFill>
+            <a:prstDash val="solid"/>
+            <a:miter lim="800000"/>
+          </a:ln>
+          <a:effectLst/>
+        </p:spPr>
+        <p:txBody>
+          <a:bodyPr lIns="0" rIns="0" rtlCol="0" anchor="ctr"/>
+          <a:lstStyle/>
+          <a:p>
+            <a:pPr algn="ctr" defTabSz="1219170">
+              <a:defRPr/>
+            </a:pPr>
+            <a:r>
+              <a:rPr lang="en-US" sz="1067" kern="0" dirty="0">
+                <a:solidFill>
+                  <a:srgbClr val="000000"/>
+                </a:solidFill>
+                <a:ea typeface="ヒラギノ角ゴ Pro W3" pitchFamily="-126" charset="-128"/>
+                <a:cs typeface="Calibri" panose="020F0502020204030204" pitchFamily="34" charset="0"/>
+              </a:rPr>
+              <a:t>Prior Authorization</a:t>
+            </a:r>
+          </a:p>
+          <a:p>
+            <a:pPr algn="ctr" defTabSz="1219170">
+              <a:defRPr/>
+            </a:pPr>
+            <a:r>
+              <a:rPr lang="en-US" sz="1067" kern="0" dirty="0">
+                <a:solidFill>
+                  <a:srgbClr val="000000"/>
+                </a:solidFill>
+                <a:ea typeface="ヒラギノ角ゴ Pro W3" pitchFamily="-126" charset="-128"/>
+                <a:cs typeface="Calibri" panose="020F0502020204030204" pitchFamily="34" charset="0"/>
+              </a:rPr>
+              <a:t>Processing</a:t>
+            </a:r>
+          </a:p>
+        </p:txBody>
+      </p:sp>
+      <p:grpSp>
+        <p:nvGrpSpPr>
+          <p:cNvPr id="69" name="Group 68">
+            <a:extLst>
+              <a:ext uri="{FF2B5EF4-FFF2-40B4-BE49-F238E27FC236}">
+                <a16:creationId xmlns:a16="http://schemas.microsoft.com/office/drawing/2014/main" id="{B647FC24-2880-4242-FBFC-154053713BB6}"/>
+              </a:ext>
+            </a:extLst>
+          </p:cNvPr>
+          <p:cNvGrpSpPr/>
+          <p:nvPr/>
+        </p:nvGrpSpPr>
+        <p:grpSpPr>
+          <a:xfrm>
+            <a:off x="8680017" y="4149280"/>
+            <a:ext cx="1341120" cy="195734"/>
+            <a:chOff x="6397392" y="3936507"/>
+            <a:chExt cx="1005840" cy="146802"/>
+          </a:xfrm>
+        </p:grpSpPr>
+        <p:cxnSp>
+          <p:nvCxnSpPr>
+            <p:cNvPr id="70" name="Straight Arrow Connector 69">
+              <a:extLst>
+                <a:ext uri="{FF2B5EF4-FFF2-40B4-BE49-F238E27FC236}">
+                  <a16:creationId xmlns:a16="http://schemas.microsoft.com/office/drawing/2014/main" id="{211C0634-A753-AEBD-55C8-2644BC4156C2}"/>
+                </a:ext>
+              </a:extLst>
+            </p:cNvPr>
+            <p:cNvCxnSpPr>
+              <a:cxnSpLocks/>
+            </p:cNvCxnSpPr>
+            <p:nvPr/>
+          </p:nvCxnSpPr>
+          <p:spPr>
+            <a:xfrm>
+              <a:off x="6397392" y="4083309"/>
+              <a:ext cx="1005840" cy="0"/>
+            </a:xfrm>
+            <a:prstGeom prst="straightConnector1">
+              <a:avLst/>
+            </a:prstGeom>
+            <a:noFill/>
+            <a:ln w="6350" cap="flat" cmpd="sng" algn="ctr">
+              <a:solidFill>
+                <a:srgbClr val="E7E6E6">
+                  <a:lumMod val="50000"/>
+                </a:srgbClr>
+              </a:solidFill>
+              <a:prstDash val="dash"/>
+              <a:miter lim="800000"/>
+              <a:headEnd type="triangle"/>
+              <a:tailEnd type="triangle"/>
+            </a:ln>
+            <a:effectLst/>
+          </p:spPr>
+        </p:cxnSp>
+        <p:sp>
+          <p:nvSpPr>
+            <p:cNvPr id="71" name="TextBox 70">
+              <a:extLst>
+                <a:ext uri="{FF2B5EF4-FFF2-40B4-BE49-F238E27FC236}">
+                  <a16:creationId xmlns:a16="http://schemas.microsoft.com/office/drawing/2014/main" id="{4C9F31D8-1615-9753-4328-2605CD9BE7E6}"/>
+                </a:ext>
+              </a:extLst>
+            </p:cNvPr>
+            <p:cNvSpPr txBox="1"/>
+            <p:nvPr/>
+          </p:nvSpPr>
+          <p:spPr>
+            <a:xfrm>
+              <a:off x="6424375" y="3936507"/>
+              <a:ext cx="976583" cy="125901"/>
+            </a:xfrm>
+            <a:prstGeom prst="rect">
+              <a:avLst/>
+            </a:prstGeom>
+            <a:noFill/>
+          </p:spPr>
+          <p:txBody>
+            <a:bodyPr wrap="square" lIns="0" tIns="0" rIns="0" bIns="0">
+              <a:spAutoFit/>
+            </a:bodyPr>
+            <a:lstStyle/>
+            <a:p>
+              <a:pPr algn="ctr" defTabSz="1219170">
+                <a:defRPr/>
+              </a:pPr>
+              <a:r>
+                <a:rPr lang="en-US" sz="1050" kern="0" dirty="0">
+                  <a:solidFill>
+                    <a:prstClr val="black">
+                      <a:lumMod val="65000"/>
+                      <a:lumOff val="35000"/>
+                    </a:prstClr>
+                  </a:solidFill>
+                  <a:ea typeface="ヒラギノ角ゴ Pro W3" pitchFamily="-126" charset="-128"/>
+                  <a:cs typeface="Calibri" panose="020F0502020204030204" pitchFamily="34" charset="0"/>
+                </a:rPr>
+                <a:t>Prior Auth Approval?</a:t>
+              </a:r>
+            </a:p>
+          </p:txBody>
+        </p:sp>
+      </p:grpSp>
+      <p:grpSp>
+        <p:nvGrpSpPr>
+          <p:cNvPr id="77" name="Group 76">
+            <a:extLst>
+              <a:ext uri="{FF2B5EF4-FFF2-40B4-BE49-F238E27FC236}">
+                <a16:creationId xmlns:a16="http://schemas.microsoft.com/office/drawing/2014/main" id="{0833AF77-3C14-3DC7-6C1E-3B7059DBCBBE}"/>
+              </a:ext>
+            </a:extLst>
+          </p:cNvPr>
+          <p:cNvGrpSpPr/>
+          <p:nvPr/>
+        </p:nvGrpSpPr>
+        <p:grpSpPr>
+          <a:xfrm>
+            <a:off x="7228517" y="4268807"/>
+            <a:ext cx="1388780" cy="289162"/>
+            <a:chOff x="6387109" y="3880431"/>
+            <a:chExt cx="1041585" cy="216874"/>
+          </a:xfrm>
+        </p:grpSpPr>
+        <p:cxnSp>
+          <p:nvCxnSpPr>
+            <p:cNvPr id="78" name="Straight Arrow Connector 77">
+              <a:extLst>
+                <a:ext uri="{FF2B5EF4-FFF2-40B4-BE49-F238E27FC236}">
+                  <a16:creationId xmlns:a16="http://schemas.microsoft.com/office/drawing/2014/main" id="{1D19611E-D8CE-5710-3097-992EF47E2047}"/>
+                </a:ext>
+              </a:extLst>
+            </p:cNvPr>
+            <p:cNvCxnSpPr>
+              <a:cxnSpLocks/>
+            </p:cNvCxnSpPr>
+            <p:nvPr/>
+          </p:nvCxnSpPr>
+          <p:spPr>
+            <a:xfrm>
+              <a:off x="6397392" y="4097305"/>
+              <a:ext cx="1005840" cy="0"/>
+            </a:xfrm>
+            <a:prstGeom prst="straightConnector1">
+              <a:avLst/>
+            </a:prstGeom>
+            <a:noFill/>
+            <a:ln w="6350" cap="flat" cmpd="sng" algn="ctr">
+              <a:solidFill>
+                <a:srgbClr val="000000"/>
+              </a:solidFill>
+              <a:prstDash val="solid"/>
+              <a:miter lim="800000"/>
+              <a:headEnd type="triangle"/>
+              <a:tailEnd type="none"/>
+            </a:ln>
+            <a:effectLst/>
+          </p:spPr>
+        </p:cxnSp>
+        <p:sp>
+          <p:nvSpPr>
+            <p:cNvPr id="79" name="TextBox 78">
+              <a:extLst>
+                <a:ext uri="{FF2B5EF4-FFF2-40B4-BE49-F238E27FC236}">
+                  <a16:creationId xmlns:a16="http://schemas.microsoft.com/office/drawing/2014/main" id="{D45F43C5-A211-B87F-50D5-27BDB2D827BF}"/>
+                </a:ext>
+              </a:extLst>
+            </p:cNvPr>
+            <p:cNvSpPr txBox="1"/>
+            <p:nvPr/>
+          </p:nvSpPr>
+          <p:spPr>
+            <a:xfrm>
+              <a:off x="6387109" y="3880431"/>
+              <a:ext cx="1041585" cy="192362"/>
+            </a:xfrm>
+            <a:prstGeom prst="rect">
+              <a:avLst/>
+            </a:prstGeom>
+            <a:noFill/>
+          </p:spPr>
+          <p:txBody>
+            <a:bodyPr wrap="square" lIns="0" tIns="0" rIns="0" bIns="0">
+              <a:spAutoFit/>
+            </a:bodyPr>
+            <a:lstStyle/>
+            <a:p>
+              <a:pPr algn="ctr" defTabSz="1219170">
+                <a:lnSpc>
+                  <a:spcPts val="1000"/>
+                </a:lnSpc>
+                <a:defRPr/>
+              </a:pPr>
+              <a:r>
+                <a:rPr lang="en-US" sz="1050" kern="0" dirty="0">
+                  <a:solidFill>
+                    <a:srgbClr val="000000"/>
+                  </a:solidFill>
+                  <a:ea typeface="ヒラギノ角ゴ Pro W3" pitchFamily="-126" charset="-128"/>
+                  <a:cs typeface="Calibri" panose="020F0502020204030204" pitchFamily="34" charset="0"/>
+                </a:rPr>
+                <a:t>Prepare QR</a:t>
+              </a:r>
+            </a:p>
+            <a:p>
+              <a:pPr algn="ctr" defTabSz="1219170">
+                <a:lnSpc>
+                  <a:spcPts val="1000"/>
+                </a:lnSpc>
+                <a:defRPr/>
+              </a:pPr>
+              <a:r>
+                <a:rPr lang="en-US" sz="900" kern="0" dirty="0">
+                  <a:solidFill>
+                    <a:srgbClr val="000000"/>
+                  </a:solidFill>
+                  <a:ea typeface="ヒラギノ角ゴ Pro W3" pitchFamily="-126" charset="-128"/>
+                  <a:cs typeface="Calibri" panose="020F0502020204030204" pitchFamily="34" charset="0"/>
+                </a:rPr>
+                <a:t>more questions or complete</a:t>
+              </a:r>
+            </a:p>
+          </p:txBody>
+        </p:sp>
+      </p:grpSp>
+      <p:cxnSp>
+        <p:nvCxnSpPr>
+          <p:cNvPr id="80" name="Straight Arrow Connector 79">
+            <a:extLst>
+              <a:ext uri="{FF2B5EF4-FFF2-40B4-BE49-F238E27FC236}">
+                <a16:creationId xmlns:a16="http://schemas.microsoft.com/office/drawing/2014/main" id="{B29E0DB8-0FED-D4F4-9C82-78DC5CD3E553}"/>
+              </a:ext>
+            </a:extLst>
+          </p:cNvPr>
+          <p:cNvCxnSpPr>
+            <a:cxnSpLocks/>
+          </p:cNvCxnSpPr>
+          <p:nvPr/>
+        </p:nvCxnSpPr>
+        <p:spPr>
+          <a:xfrm>
+            <a:off x="4639478" y="5382399"/>
+            <a:ext cx="5669280" cy="0"/>
+          </a:xfrm>
+          <a:prstGeom prst="straightConnector1">
+            <a:avLst/>
+          </a:prstGeom>
+          <a:noFill/>
+          <a:ln w="9525" cap="flat" cmpd="sng" algn="ctr">
+            <a:solidFill>
+              <a:sysClr val="windowText" lastClr="000000"/>
+            </a:solidFill>
+            <a:prstDash val="dash"/>
+            <a:miter lim="800000"/>
+            <a:tailEnd type="triangle"/>
+          </a:ln>
+          <a:effectLst/>
+        </p:spPr>
+      </p:cxnSp>
+      <p:cxnSp>
+        <p:nvCxnSpPr>
+          <p:cNvPr id="81" name="Straight Arrow Connector 80">
+            <a:extLst>
+              <a:ext uri="{FF2B5EF4-FFF2-40B4-BE49-F238E27FC236}">
+                <a16:creationId xmlns:a16="http://schemas.microsoft.com/office/drawing/2014/main" id="{D2FA7B10-9AD9-093D-D4FF-3C9B2942A445}"/>
+              </a:ext>
+            </a:extLst>
+          </p:cNvPr>
+          <p:cNvCxnSpPr>
+            <a:cxnSpLocks/>
+          </p:cNvCxnSpPr>
+          <p:nvPr/>
+        </p:nvCxnSpPr>
+        <p:spPr>
+          <a:xfrm flipH="1">
+            <a:off x="4614720" y="3663880"/>
+            <a:ext cx="5687568" cy="0"/>
+          </a:xfrm>
+          <a:prstGeom prst="straightConnector1">
+            <a:avLst/>
+          </a:prstGeom>
+          <a:noFill/>
+          <a:ln w="9525" cap="flat" cmpd="sng" algn="ctr">
+            <a:solidFill>
+              <a:sysClr val="windowText" lastClr="000000"/>
+            </a:solidFill>
+            <a:prstDash val="dash"/>
+            <a:miter lim="800000"/>
+            <a:tailEnd type="triangle"/>
+          </a:ln>
+          <a:effectLst/>
+        </p:spPr>
+      </p:cxnSp>
+      <p:sp>
+        <p:nvSpPr>
+          <p:cNvPr id="82" name="Rectangle: Rounded Corners 81">
+            <a:extLst>
+              <a:ext uri="{FF2B5EF4-FFF2-40B4-BE49-F238E27FC236}">
+                <a16:creationId xmlns:a16="http://schemas.microsoft.com/office/drawing/2014/main" id="{441775E4-2F68-73E5-E59B-26321D30C914}"/>
+              </a:ext>
+            </a:extLst>
+          </p:cNvPr>
+          <p:cNvSpPr/>
+          <p:nvPr/>
+        </p:nvSpPr>
+        <p:spPr>
+          <a:xfrm>
+            <a:off x="3537287" y="1079848"/>
+            <a:ext cx="582043" cy="356616"/>
+          </a:xfrm>
+          <a:prstGeom prst="roundRect">
+            <a:avLst>
+              <a:gd name="adj" fmla="val 0"/>
+            </a:avLst>
+          </a:prstGeom>
+          <a:solidFill>
+            <a:srgbClr val="F6F5EE"/>
+          </a:solidFill>
+          <a:ln w="10795" cap="flat" cmpd="sng" algn="ctr">
+            <a:solidFill>
+              <a:srgbClr val="E7E6E6">
+                <a:lumMod val="90000"/>
+              </a:srgbClr>
+            </a:solidFill>
+            <a:prstDash val="sysDash"/>
+            <a:miter lim="800000"/>
+          </a:ln>
+          <a:effectLst/>
+        </p:spPr>
+        <p:txBody>
+          <a:bodyPr lIns="0" rIns="0" rtlCol="0" anchor="ctr"/>
+          <a:lstStyle/>
+          <a:p>
+            <a:pPr algn="ctr" defTabSz="1219170">
+              <a:defRPr/>
+            </a:pPr>
+            <a:endParaRPr lang="en-US" sz="1091" kern="0" dirty="0">
+              <a:solidFill>
+                <a:srgbClr val="000000"/>
+              </a:solidFill>
+              <a:ea typeface="ヒラギノ角ゴ Pro W3" pitchFamily="-126" charset="-128"/>
+              <a:cs typeface="Calibri" panose="020F0502020204030204" pitchFamily="34" charset="0"/>
+            </a:endParaRPr>
+          </a:p>
+        </p:txBody>
+      </p:sp>
+      <p:sp>
+        <p:nvSpPr>
+          <p:cNvPr id="83" name="Rectangle: Rounded Corners 82">
+            <a:extLst>
+              <a:ext uri="{FF2B5EF4-FFF2-40B4-BE49-F238E27FC236}">
+                <a16:creationId xmlns:a16="http://schemas.microsoft.com/office/drawing/2014/main" id="{D436AA33-B5DD-22AA-97DD-08525DF58100}"/>
+              </a:ext>
+            </a:extLst>
+          </p:cNvPr>
+          <p:cNvSpPr/>
+          <p:nvPr/>
+        </p:nvSpPr>
+        <p:spPr>
+          <a:xfrm>
+            <a:off x="2623908" y="1082009"/>
+            <a:ext cx="914400" cy="353781"/>
+          </a:xfrm>
+          <a:prstGeom prst="roundRect">
+            <a:avLst>
+              <a:gd name="adj" fmla="val 0"/>
+            </a:avLst>
+          </a:prstGeom>
+          <a:solidFill>
+            <a:srgbClr val="FCF0D0"/>
+          </a:solidFill>
+          <a:ln w="9525" cap="flat" cmpd="sng" algn="ctr">
+            <a:solidFill>
+              <a:srgbClr val="E5EEEF">
+                <a:lumMod val="25000"/>
+              </a:srgbClr>
+            </a:solidFill>
+            <a:prstDash val="solid"/>
+            <a:miter lim="800000"/>
+          </a:ln>
+          <a:effectLst/>
+        </p:spPr>
+        <p:txBody>
+          <a:bodyPr lIns="0" rIns="0" rtlCol="0" anchor="ctr"/>
+          <a:lstStyle/>
+          <a:p>
+            <a:pPr algn="ctr" defTabSz="1219170">
+              <a:defRPr/>
+            </a:pPr>
+            <a:r>
+              <a:rPr lang="en-US" sz="1067" kern="0" dirty="0">
+                <a:solidFill>
+                  <a:srgbClr val="000000"/>
+                </a:solidFill>
+                <a:ea typeface="ヒラギノ角ゴ Pro W3" pitchFamily="-126" charset="-128"/>
+                <a:cs typeface="Calibri" panose="020F0502020204030204" pitchFamily="34" charset="0"/>
+              </a:rPr>
+              <a:t>EHR</a:t>
+            </a:r>
+            <a:endParaRPr lang="en-US" sz="1091" kern="0" dirty="0">
+              <a:solidFill>
+                <a:srgbClr val="000000"/>
+              </a:solidFill>
+              <a:ea typeface="ヒラギノ角ゴ Pro W3" pitchFamily="-126" charset="-128"/>
+              <a:cs typeface="Calibri" panose="020F0502020204030204" pitchFamily="34" charset="0"/>
+            </a:endParaRPr>
+          </a:p>
+        </p:txBody>
+      </p:sp>
+      <p:sp>
+        <p:nvSpPr>
+          <p:cNvPr id="84" name="Rectangle: Rounded Corners 83">
+            <a:extLst>
+              <a:ext uri="{FF2B5EF4-FFF2-40B4-BE49-F238E27FC236}">
+                <a16:creationId xmlns:a16="http://schemas.microsoft.com/office/drawing/2014/main" id="{F69302C0-604A-4BDA-4118-8EA47B3B049A}"/>
+              </a:ext>
+            </a:extLst>
+          </p:cNvPr>
+          <p:cNvSpPr/>
+          <p:nvPr/>
+        </p:nvSpPr>
+        <p:spPr>
+          <a:xfrm>
+            <a:off x="4108833" y="1082009"/>
+            <a:ext cx="914400" cy="353781"/>
+          </a:xfrm>
+          <a:prstGeom prst="roundRect">
+            <a:avLst>
+              <a:gd name="adj" fmla="val 0"/>
+            </a:avLst>
+          </a:prstGeom>
+          <a:solidFill>
+            <a:srgbClr val="FCF0D0"/>
+          </a:solidFill>
+          <a:ln w="9525" cap="flat" cmpd="sng" algn="ctr">
+            <a:solidFill>
+              <a:srgbClr val="E5EEEF">
+                <a:lumMod val="25000"/>
+              </a:srgbClr>
+            </a:solidFill>
+            <a:prstDash val="solid"/>
+            <a:miter lim="800000"/>
+          </a:ln>
+          <a:effectLst/>
+        </p:spPr>
+        <p:txBody>
+          <a:bodyPr lIns="0" rIns="0" rtlCol="0" anchor="ctr"/>
+          <a:lstStyle/>
+          <a:p>
+            <a:pPr algn="ctr" defTabSz="1219170">
+              <a:defRPr/>
+            </a:pPr>
+            <a:r>
+              <a:rPr lang="en-US" sz="1067" kern="0" dirty="0">
+                <a:solidFill>
+                  <a:srgbClr val="000000"/>
+                </a:solidFill>
+                <a:ea typeface="ヒラギノ角ゴ Pro W3" pitchFamily="-126" charset="-128"/>
+                <a:cs typeface="Calibri" panose="020F0502020204030204" pitchFamily="34" charset="0"/>
+              </a:rPr>
+              <a:t>SMART/Native </a:t>
+            </a:r>
+          </a:p>
+          <a:p>
+            <a:pPr algn="ctr" defTabSz="1219170">
+              <a:defRPr/>
+            </a:pPr>
+            <a:r>
+              <a:rPr lang="en-US" sz="1067" kern="0" dirty="0">
+                <a:solidFill>
+                  <a:srgbClr val="000000"/>
+                </a:solidFill>
+                <a:ea typeface="ヒラギノ角ゴ Pro W3" pitchFamily="-126" charset="-128"/>
+                <a:cs typeface="Calibri" panose="020F0502020204030204" pitchFamily="34" charset="0"/>
+              </a:rPr>
+              <a:t>DTR App</a:t>
+            </a:r>
+          </a:p>
+        </p:txBody>
+      </p:sp>
+      <p:grpSp>
+        <p:nvGrpSpPr>
+          <p:cNvPr id="85" name="Group 84">
+            <a:extLst>
+              <a:ext uri="{FF2B5EF4-FFF2-40B4-BE49-F238E27FC236}">
+                <a16:creationId xmlns:a16="http://schemas.microsoft.com/office/drawing/2014/main" id="{A0653820-E652-6A83-8348-EA936060B658}"/>
+              </a:ext>
+            </a:extLst>
+          </p:cNvPr>
+          <p:cNvGrpSpPr/>
+          <p:nvPr/>
+        </p:nvGrpSpPr>
+        <p:grpSpPr>
+          <a:xfrm>
+            <a:off x="4304586" y="3791383"/>
+            <a:ext cx="589420" cy="425392"/>
+            <a:chOff x="4387714" y="3500671"/>
+            <a:chExt cx="589420" cy="425392"/>
+          </a:xfrm>
+        </p:grpSpPr>
+        <p:sp>
+          <p:nvSpPr>
+            <p:cNvPr id="86" name="Diamond 85">
+              <a:extLst>
+                <a:ext uri="{FF2B5EF4-FFF2-40B4-BE49-F238E27FC236}">
+                  <a16:creationId xmlns:a16="http://schemas.microsoft.com/office/drawing/2014/main" id="{D636BBD3-CCCE-9D0F-A594-F0E22B10F785}"/>
+                </a:ext>
+              </a:extLst>
+            </p:cNvPr>
+            <p:cNvSpPr/>
+            <p:nvPr/>
+          </p:nvSpPr>
+          <p:spPr>
+            <a:xfrm>
+              <a:off x="4434115" y="3500671"/>
+              <a:ext cx="457248" cy="418779"/>
+            </a:xfrm>
+            <a:prstGeom prst="diamond">
+              <a:avLst/>
+            </a:prstGeom>
+            <a:solidFill>
+              <a:sysClr val="window" lastClr="FFFFFF"/>
+            </a:solidFill>
+            <a:ln w="6350" cap="flat" cmpd="sng" algn="ctr">
+              <a:solidFill>
+                <a:sysClr val="window" lastClr="FFFFFF">
+                  <a:lumMod val="65000"/>
+                </a:sysClr>
+              </a:solidFill>
+              <a:prstDash val="solid"/>
+              <a:miter lim="800000"/>
+            </a:ln>
+            <a:effectLst/>
+          </p:spPr>
+          <p:txBody>
+            <a:bodyPr lIns="0" tIns="0" rIns="0" bIns="0" rtlCol="0" anchor="ctr"/>
+            <a:lstStyle/>
+            <a:p>
+              <a:pPr marL="0" marR="0" lvl="0" indent="0" algn="ctr" defTabSz="914400" eaLnBrk="1" fontAlgn="auto" latinLnBrk="0" hangingPunct="1">
+                <a:lnSpc>
+                  <a:spcPct val="100000"/>
+                </a:lnSpc>
+                <a:spcBef>
+                  <a:spcPts val="0"/>
+                </a:spcBef>
+                <a:spcAft>
+                  <a:spcPts val="0"/>
+                </a:spcAft>
+                <a:buClrTx/>
+                <a:buSzTx/>
+                <a:buFontTx/>
+                <a:buNone/>
+                <a:tabLst/>
+                <a:defRPr/>
+              </a:pPr>
+              <a:endParaRPr kumimoji="0" lang="en-US" sz="800" b="0" i="0" u="none" strike="noStrike" kern="0" cap="none" spc="0" normalizeH="0" baseline="0" noProof="0" dirty="0">
+                <a:ln>
+                  <a:noFill/>
+                </a:ln>
+                <a:solidFill>
+                  <a:prstClr val="black"/>
+                </a:solidFill>
+                <a:effectLst/>
+                <a:uLnTx/>
+                <a:uFillTx/>
+                <a:latin typeface="Arial" panose="020B0604020202020204"/>
+              </a:endParaRPr>
+            </a:p>
+          </p:txBody>
+        </p:sp>
+        <p:sp>
+          <p:nvSpPr>
+            <p:cNvPr id="87" name="TextBox 86">
+              <a:extLst>
+                <a:ext uri="{FF2B5EF4-FFF2-40B4-BE49-F238E27FC236}">
+                  <a16:creationId xmlns:a16="http://schemas.microsoft.com/office/drawing/2014/main" id="{6100E458-074A-20EC-31BF-604BBCE7BBE8}"/>
+                </a:ext>
+              </a:extLst>
+            </p:cNvPr>
+            <p:cNvSpPr txBox="1"/>
+            <p:nvPr/>
+          </p:nvSpPr>
+          <p:spPr>
+            <a:xfrm>
+              <a:off x="4387714" y="3602898"/>
+              <a:ext cx="589420" cy="323165"/>
+            </a:xfrm>
+            <a:prstGeom prst="rect">
+              <a:avLst/>
+            </a:prstGeom>
+            <a:noFill/>
+          </p:spPr>
+          <p:txBody>
+            <a:bodyPr wrap="square">
+              <a:spAutoFit/>
+            </a:bodyPr>
+            <a:lstStyle/>
+            <a:p>
+              <a:pPr marL="0" marR="0" lvl="0" indent="0" defTabSz="914400" eaLnBrk="1" fontAlgn="base" latinLnBrk="0" hangingPunct="1">
+                <a:lnSpc>
+                  <a:spcPts val="900"/>
+                </a:lnSpc>
+                <a:spcBef>
+                  <a:spcPct val="0"/>
+                </a:spcBef>
+                <a:spcAft>
+                  <a:spcPct val="0"/>
+                </a:spcAft>
+                <a:buClrTx/>
+                <a:buSzTx/>
+                <a:buFontTx/>
+                <a:buNone/>
+                <a:tabLst/>
+                <a:defRPr/>
+              </a:pPr>
+              <a:r>
+                <a:rPr kumimoji="0" lang="en-US" sz="800" b="0" i="0" u="none" strike="noStrike" kern="0" cap="none" spc="0" normalizeH="0" baseline="0" noProof="0" dirty="0">
+                  <a:ln>
+                    <a:noFill/>
+                  </a:ln>
+                  <a:solidFill>
+                    <a:srgbClr val="4F81BD">
+                      <a:lumMod val="50000"/>
+                    </a:srgbClr>
+                  </a:solidFill>
+                  <a:effectLst/>
+                  <a:uLnTx/>
+                  <a:uFillTx/>
+                  <a:ea typeface="Calibri" panose="020F0502020204030204" pitchFamily="34" charset="0"/>
+                  <a:cs typeface="Calibri" panose="020F0502020204030204" pitchFamily="34" charset="0"/>
+                </a:rPr>
+                <a:t>Adaptive</a:t>
+              </a:r>
+            </a:p>
+            <a:p>
+              <a:pPr marL="0" marR="0" lvl="0" indent="0" algn="ctr" defTabSz="914400" eaLnBrk="1" fontAlgn="base" latinLnBrk="0" hangingPunct="1">
+                <a:lnSpc>
+                  <a:spcPts val="900"/>
+                </a:lnSpc>
+                <a:spcBef>
+                  <a:spcPct val="0"/>
+                </a:spcBef>
+                <a:spcAft>
+                  <a:spcPct val="0"/>
+                </a:spcAft>
+                <a:buClrTx/>
+                <a:buSzTx/>
+                <a:buFontTx/>
+                <a:buNone/>
+                <a:tabLst/>
+                <a:defRPr/>
+              </a:pPr>
+              <a:r>
+                <a:rPr kumimoji="0" lang="en-US" sz="800" b="0" i="0" u="none" strike="noStrike" kern="0" cap="none" spc="0" normalizeH="0" baseline="0" noProof="0" dirty="0">
+                  <a:ln>
+                    <a:noFill/>
+                  </a:ln>
+                  <a:solidFill>
+                    <a:srgbClr val="4F81BD">
+                      <a:lumMod val="50000"/>
+                    </a:srgbClr>
+                  </a:solidFill>
+                  <a:effectLst/>
+                  <a:uLnTx/>
+                  <a:uFillTx/>
+                  <a:ea typeface="Calibri" panose="020F0502020204030204" pitchFamily="34" charset="0"/>
+                  <a:cs typeface="Calibri" panose="020F0502020204030204" pitchFamily="34" charset="0"/>
+                </a:rPr>
+                <a:t>?</a:t>
+              </a:r>
+              <a:endParaRPr kumimoji="0" lang="en-US" sz="1400" b="0" i="0" u="none" strike="noStrike" kern="0" cap="none" spc="0" normalizeH="0" baseline="0" noProof="0" dirty="0">
+                <a:ln>
+                  <a:noFill/>
+                </a:ln>
+                <a:solidFill>
+                  <a:srgbClr val="4F81BD">
+                    <a:lumMod val="50000"/>
+                  </a:srgbClr>
+                </a:solidFill>
+                <a:effectLst/>
+                <a:uLnTx/>
+                <a:uFillTx/>
+                <a:latin typeface="Arial" panose="020B0604020202020204" pitchFamily="34" charset="0"/>
+              </a:endParaRPr>
+            </a:p>
+          </p:txBody>
+        </p:sp>
+      </p:grpSp>
+      <p:sp>
+        <p:nvSpPr>
+          <p:cNvPr id="88" name="TextBox 87">
+            <a:extLst>
+              <a:ext uri="{FF2B5EF4-FFF2-40B4-BE49-F238E27FC236}">
+                <a16:creationId xmlns:a16="http://schemas.microsoft.com/office/drawing/2014/main" id="{1D2B7C09-AA16-C842-9AE0-BAC5F9962584}"/>
+              </a:ext>
+            </a:extLst>
+          </p:cNvPr>
+          <p:cNvSpPr txBox="1"/>
+          <p:nvPr/>
+        </p:nvSpPr>
+        <p:spPr>
+          <a:xfrm>
+            <a:off x="4716526" y="3843815"/>
+            <a:ext cx="327969" cy="215444"/>
+          </a:xfrm>
+          <a:prstGeom prst="rect">
+            <a:avLst/>
+          </a:prstGeom>
+          <a:noFill/>
+        </p:spPr>
+        <p:txBody>
+          <a:bodyPr wrap="square">
+            <a:spAutoFit/>
+          </a:bodyPr>
+          <a:lstStyle/>
+          <a:p>
+            <a:pPr fontAlgn="base">
+              <a:spcBef>
+                <a:spcPct val="0"/>
+              </a:spcBef>
+              <a:spcAft>
+                <a:spcPct val="0"/>
+              </a:spcAft>
+            </a:pPr>
+            <a:r>
+              <a:rPr lang="en-US" sz="800" kern="0" dirty="0">
+                <a:solidFill>
+                  <a:srgbClr val="4F81BD">
+                    <a:lumMod val="50000"/>
+                  </a:srgbClr>
+                </a:solidFill>
+                <a:ea typeface="Calibri" panose="020F0502020204030204" pitchFamily="34" charset="0"/>
+                <a:cs typeface="Calibri" panose="020F0502020204030204" pitchFamily="34" charset="0"/>
+              </a:rPr>
+              <a:t>Yes</a:t>
+            </a:r>
+            <a:endParaRPr lang="en-US" dirty="0">
+              <a:solidFill>
+                <a:srgbClr val="4F81BD">
+                  <a:lumMod val="50000"/>
+                </a:srgbClr>
+              </a:solidFill>
+              <a:latin typeface="Arial" panose="020B0604020202020204" pitchFamily="34" charset="0"/>
+            </a:endParaRPr>
+          </a:p>
+        </p:txBody>
+      </p:sp>
+      <p:sp>
+        <p:nvSpPr>
+          <p:cNvPr id="92" name="TextBox 91">
+            <a:extLst>
+              <a:ext uri="{FF2B5EF4-FFF2-40B4-BE49-F238E27FC236}">
+                <a16:creationId xmlns:a16="http://schemas.microsoft.com/office/drawing/2014/main" id="{248D821A-8B0B-7102-91B3-A3D6F42954C4}"/>
+              </a:ext>
+            </a:extLst>
+          </p:cNvPr>
+          <p:cNvSpPr txBox="1"/>
+          <p:nvPr/>
+        </p:nvSpPr>
+        <p:spPr>
+          <a:xfrm>
+            <a:off x="2015601" y="1692704"/>
+            <a:ext cx="1045197" cy="420756"/>
+          </a:xfrm>
+          <a:prstGeom prst="rect">
+            <a:avLst/>
+          </a:prstGeom>
+          <a:noFill/>
+        </p:spPr>
+        <p:txBody>
+          <a:bodyPr wrap="square">
+            <a:spAutoFit/>
+          </a:bodyPr>
+          <a:lstStyle/>
+          <a:p>
+            <a:pPr algn="ctr" defTabSz="609585" fontAlgn="base">
+              <a:spcBef>
+                <a:spcPct val="0"/>
+              </a:spcBef>
+              <a:spcAft>
+                <a:spcPct val="0"/>
+              </a:spcAft>
+            </a:pPr>
+            <a:r>
+              <a:rPr lang="en-US" sz="1050" b="1" kern="0" dirty="0">
+                <a:solidFill>
+                  <a:srgbClr val="500000"/>
+                </a:solidFill>
+                <a:latin typeface="Calibri" panose="020F0502020204030204" pitchFamily="34" charset="0"/>
+                <a:ea typeface="ヒラギノ角ゴ Pro W3" pitchFamily="-126" charset="-128"/>
+                <a:cs typeface="Calibri" panose="020F0502020204030204" pitchFamily="34" charset="0"/>
+              </a:rPr>
+              <a:t>DTR Configuration</a:t>
+            </a:r>
+          </a:p>
+        </p:txBody>
+      </p:sp>
+      <p:grpSp>
+        <p:nvGrpSpPr>
+          <p:cNvPr id="93" name="Group 92">
+            <a:extLst>
+              <a:ext uri="{FF2B5EF4-FFF2-40B4-BE49-F238E27FC236}">
+                <a16:creationId xmlns:a16="http://schemas.microsoft.com/office/drawing/2014/main" id="{18555744-5CCF-276E-31E6-304465FABCB3}"/>
+              </a:ext>
+            </a:extLst>
+          </p:cNvPr>
+          <p:cNvGrpSpPr/>
+          <p:nvPr/>
+        </p:nvGrpSpPr>
+        <p:grpSpPr>
+          <a:xfrm>
+            <a:off x="2986512" y="1629337"/>
+            <a:ext cx="1688882" cy="378568"/>
+            <a:chOff x="2833116" y="1552000"/>
+            <a:chExt cx="1266662" cy="283926"/>
+          </a:xfrm>
+        </p:grpSpPr>
+        <p:sp>
+          <p:nvSpPr>
+            <p:cNvPr id="94" name="TextBox 93">
+              <a:extLst>
+                <a:ext uri="{FF2B5EF4-FFF2-40B4-BE49-F238E27FC236}">
+                  <a16:creationId xmlns:a16="http://schemas.microsoft.com/office/drawing/2014/main" id="{A21C0B5C-48DE-715F-EDD6-0301D89AA8BD}"/>
+                </a:ext>
+              </a:extLst>
+            </p:cNvPr>
+            <p:cNvSpPr txBox="1"/>
+            <p:nvPr/>
+          </p:nvSpPr>
+          <p:spPr>
+            <a:xfrm>
+              <a:off x="2914522" y="1589168"/>
+              <a:ext cx="1085890" cy="125900"/>
+            </a:xfrm>
+            <a:prstGeom prst="rect">
+              <a:avLst/>
+            </a:prstGeom>
+            <a:noFill/>
+          </p:spPr>
+          <p:txBody>
+            <a:bodyPr wrap="square" lIns="0" tIns="0" rIns="0" bIns="0">
+              <a:spAutoFit/>
+            </a:bodyPr>
+            <a:lstStyle/>
+            <a:p>
+              <a:pPr algn="ctr" defTabSz="1219170">
+                <a:defRPr/>
+              </a:pPr>
+              <a:r>
+                <a:rPr lang="en-US" sz="1050" kern="0" dirty="0">
+                  <a:solidFill>
+                    <a:srgbClr val="C0504D">
+                      <a:lumMod val="50000"/>
+                    </a:srgbClr>
+                  </a:solidFill>
+                  <a:latin typeface="Calibri" panose="020F0502020204030204" pitchFamily="34" charset="0"/>
+                  <a:ea typeface="ヒラギノ角ゴ Pro W3" pitchFamily="-126" charset="-128"/>
+                  <a:cs typeface="Calibri" panose="020F0502020204030204" pitchFamily="34" charset="0"/>
+                </a:rPr>
+                <a:t>EHR to App Connectivity</a:t>
+              </a:r>
+            </a:p>
+          </p:txBody>
+        </p:sp>
+        <p:cxnSp>
+          <p:nvCxnSpPr>
+            <p:cNvPr id="95" name="Straight Arrow Connector 94">
+              <a:extLst>
+                <a:ext uri="{FF2B5EF4-FFF2-40B4-BE49-F238E27FC236}">
+                  <a16:creationId xmlns:a16="http://schemas.microsoft.com/office/drawing/2014/main" id="{1AA7A168-4C77-C8F3-EC1B-4B626301E5B9}"/>
+                </a:ext>
+              </a:extLst>
+            </p:cNvPr>
+            <p:cNvCxnSpPr>
+              <a:cxnSpLocks/>
+            </p:cNvCxnSpPr>
+            <p:nvPr/>
+          </p:nvCxnSpPr>
+          <p:spPr>
+            <a:xfrm>
+              <a:off x="2896144" y="1742324"/>
+              <a:ext cx="1106424" cy="0"/>
+            </a:xfrm>
+            <a:prstGeom prst="straightConnector1">
+              <a:avLst/>
+            </a:prstGeom>
+            <a:ln w="9525">
+              <a:solidFill>
+                <a:schemeClr val="accent6">
+                  <a:lumMod val="50000"/>
+                </a:schemeClr>
+              </a:solidFill>
+              <a:prstDash val="sysDash"/>
+              <a:headEnd type="none"/>
+              <a:tailEnd type="none"/>
+            </a:ln>
+            <a:effectLst/>
+          </p:spPr>
+          <p:style>
+            <a:lnRef idx="2">
+              <a:schemeClr val="accent1"/>
+            </a:lnRef>
+            <a:fillRef idx="0">
+              <a:schemeClr val="accent1"/>
+            </a:fillRef>
+            <a:effectRef idx="1">
+              <a:schemeClr val="accent1"/>
+            </a:effectRef>
+            <a:fontRef idx="minor">
+              <a:schemeClr val="tx1"/>
+            </a:fontRef>
+          </p:style>
+        </p:cxnSp>
+        <p:sp>
+          <p:nvSpPr>
+            <p:cNvPr id="102" name="TextBox 101">
+              <a:extLst>
+                <a:ext uri="{FF2B5EF4-FFF2-40B4-BE49-F238E27FC236}">
+                  <a16:creationId xmlns:a16="http://schemas.microsoft.com/office/drawing/2014/main" id="{01070EF8-273B-66DA-B5EC-F239CA5D7D2D}"/>
+                </a:ext>
+              </a:extLst>
+            </p:cNvPr>
+            <p:cNvSpPr txBox="1"/>
+            <p:nvPr/>
+          </p:nvSpPr>
+          <p:spPr>
+            <a:xfrm>
+              <a:off x="2833116" y="1558927"/>
+              <a:ext cx="151150" cy="276999"/>
+            </a:xfrm>
+            <a:prstGeom prst="rect">
+              <a:avLst/>
+            </a:prstGeom>
+            <a:noFill/>
+          </p:spPr>
+          <p:txBody>
+            <a:bodyPr wrap="square" lIns="0" tIns="0" rIns="0" bIns="0">
+              <a:spAutoFit/>
+            </a:bodyPr>
+            <a:lstStyle/>
+            <a:p>
+              <a:pPr algn="ctr" defTabSz="609585" fontAlgn="base">
+                <a:spcBef>
+                  <a:spcPct val="0"/>
+                </a:spcBef>
+                <a:spcAft>
+                  <a:spcPct val="0"/>
+                </a:spcAft>
+              </a:pPr>
+              <a:r>
+                <a:rPr lang="en-US" sz="2400" b="1" kern="0" dirty="0">
+                  <a:solidFill>
+                    <a:srgbClr val="C0504D">
+                      <a:lumMod val="50000"/>
+                    </a:srgbClr>
+                  </a:solidFill>
+                  <a:latin typeface="Bauhaus 93" panose="04030905020B02020C02" pitchFamily="82" charset="0"/>
+                  <a:ea typeface="ヒラギノ角ゴ Pro W3" pitchFamily="-126" charset="-128"/>
+                  <a:cs typeface="Calibri" panose="020F0502020204030204" pitchFamily="34" charset="0"/>
+                </a:rPr>
+                <a:t>.</a:t>
+              </a:r>
+              <a:endParaRPr lang="en-US" sz="2400" dirty="0">
+                <a:solidFill>
+                  <a:srgbClr val="C0504D">
+                    <a:lumMod val="50000"/>
+                  </a:srgbClr>
+                </a:solidFill>
+                <a:latin typeface="Bauhaus 93" panose="04030905020B02020C02" pitchFamily="82" charset="0"/>
+                <a:ea typeface="ヒラギノ角ゴ Pro W3" pitchFamily="-126" charset="-128"/>
+              </a:endParaRPr>
+            </a:p>
+          </p:txBody>
+        </p:sp>
+        <p:sp>
+          <p:nvSpPr>
+            <p:cNvPr id="103" name="TextBox 102">
+              <a:extLst>
+                <a:ext uri="{FF2B5EF4-FFF2-40B4-BE49-F238E27FC236}">
+                  <a16:creationId xmlns:a16="http://schemas.microsoft.com/office/drawing/2014/main" id="{452F3176-B536-C432-CF4C-40A3D5741F0A}"/>
+                </a:ext>
+              </a:extLst>
+            </p:cNvPr>
+            <p:cNvSpPr txBox="1"/>
+            <p:nvPr/>
+          </p:nvSpPr>
+          <p:spPr>
+            <a:xfrm>
+              <a:off x="3948628" y="1552000"/>
+              <a:ext cx="151150" cy="276999"/>
+            </a:xfrm>
+            <a:prstGeom prst="rect">
+              <a:avLst/>
+            </a:prstGeom>
+            <a:noFill/>
+          </p:spPr>
+          <p:txBody>
+            <a:bodyPr wrap="square" lIns="0" tIns="0" rIns="0" bIns="0">
+              <a:spAutoFit/>
+            </a:bodyPr>
+            <a:lstStyle/>
+            <a:p>
+              <a:pPr algn="ctr" defTabSz="609585" fontAlgn="base">
+                <a:spcBef>
+                  <a:spcPct val="0"/>
+                </a:spcBef>
+                <a:spcAft>
+                  <a:spcPct val="0"/>
+                </a:spcAft>
+              </a:pPr>
+              <a:r>
+                <a:rPr lang="en-US" sz="2400" b="1" kern="0" dirty="0">
+                  <a:solidFill>
+                    <a:srgbClr val="C0504D">
+                      <a:lumMod val="50000"/>
+                    </a:srgbClr>
+                  </a:solidFill>
+                  <a:latin typeface="Bauhaus 93" panose="04030905020B02020C02" pitchFamily="82" charset="0"/>
+                  <a:ea typeface="ヒラギノ角ゴ Pro W3" pitchFamily="-126" charset="-128"/>
+                  <a:cs typeface="Calibri" panose="020F0502020204030204" pitchFamily="34" charset="0"/>
+                </a:rPr>
+                <a:t>.</a:t>
+              </a:r>
+              <a:endParaRPr lang="en-US" sz="2400" dirty="0">
+                <a:solidFill>
+                  <a:srgbClr val="C0504D">
+                    <a:lumMod val="50000"/>
+                  </a:srgbClr>
+                </a:solidFill>
+                <a:latin typeface="Bauhaus 93" panose="04030905020B02020C02" pitchFamily="82" charset="0"/>
+                <a:ea typeface="ヒラギノ角ゴ Pro W3" pitchFamily="-126" charset="-128"/>
+              </a:endParaRPr>
+            </a:p>
+          </p:txBody>
+        </p:sp>
+      </p:grpSp>
+      <p:grpSp>
+        <p:nvGrpSpPr>
+          <p:cNvPr id="104" name="Group 103">
+            <a:extLst>
+              <a:ext uri="{FF2B5EF4-FFF2-40B4-BE49-F238E27FC236}">
+                <a16:creationId xmlns:a16="http://schemas.microsoft.com/office/drawing/2014/main" id="{0EDC92FB-CBBD-F4C8-52D9-6168211C9477}"/>
+              </a:ext>
+            </a:extLst>
+          </p:cNvPr>
+          <p:cNvGrpSpPr/>
+          <p:nvPr/>
+        </p:nvGrpSpPr>
+        <p:grpSpPr>
+          <a:xfrm>
+            <a:off x="4471831" y="1861707"/>
+            <a:ext cx="2817074" cy="369855"/>
+            <a:chOff x="4053426" y="1644684"/>
+            <a:chExt cx="2112809" cy="277391"/>
+          </a:xfrm>
+        </p:grpSpPr>
+        <p:grpSp>
+          <p:nvGrpSpPr>
+            <p:cNvPr id="105" name="Group 104">
+              <a:extLst>
+                <a:ext uri="{FF2B5EF4-FFF2-40B4-BE49-F238E27FC236}">
+                  <a16:creationId xmlns:a16="http://schemas.microsoft.com/office/drawing/2014/main" id="{4A021E5F-5D47-A046-83C2-728531B598DF}"/>
+                </a:ext>
+              </a:extLst>
+            </p:cNvPr>
+            <p:cNvGrpSpPr/>
+            <p:nvPr/>
+          </p:nvGrpSpPr>
+          <p:grpSpPr>
+            <a:xfrm>
+              <a:off x="4129319" y="1644684"/>
+              <a:ext cx="2036916" cy="276999"/>
+              <a:chOff x="4022999" y="1746403"/>
+              <a:chExt cx="2036916" cy="276999"/>
+            </a:xfrm>
+          </p:grpSpPr>
+          <p:sp>
+            <p:nvSpPr>
+              <p:cNvPr id="107" name="TextBox 106">
+                <a:extLst>
+                  <a:ext uri="{FF2B5EF4-FFF2-40B4-BE49-F238E27FC236}">
+                    <a16:creationId xmlns:a16="http://schemas.microsoft.com/office/drawing/2014/main" id="{A661A30F-A4D4-7705-B596-86A25ABAE3B3}"/>
+                  </a:ext>
+                </a:extLst>
+              </p:cNvPr>
+              <p:cNvSpPr txBox="1"/>
+              <p:nvPr/>
+            </p:nvSpPr>
+            <p:spPr>
+              <a:xfrm>
+                <a:off x="4086664" y="1797039"/>
+                <a:ext cx="1471381" cy="125899"/>
+              </a:xfrm>
+              <a:prstGeom prst="rect">
+                <a:avLst/>
+              </a:prstGeom>
+              <a:solidFill>
+                <a:srgbClr val="FBF4F3"/>
+              </a:solidFill>
+            </p:spPr>
+            <p:txBody>
+              <a:bodyPr wrap="square" lIns="0" tIns="0" rIns="0" bIns="0">
+                <a:spAutoFit/>
+              </a:bodyPr>
+              <a:lstStyle/>
+              <a:p>
+                <a:pPr algn="ctr" defTabSz="1219170">
+                  <a:defRPr/>
+                </a:pPr>
+                <a:r>
+                  <a:rPr lang="en-US" sz="1050" kern="0" dirty="0">
+                    <a:solidFill>
+                      <a:srgbClr val="C0504D">
+                        <a:lumMod val="50000"/>
+                      </a:srgbClr>
+                    </a:solidFill>
+                    <a:latin typeface="Calibri" panose="020F0502020204030204" pitchFamily="34" charset="0"/>
+                    <a:ea typeface="ヒラギノ角ゴ Pro W3" pitchFamily="-126" charset="-128"/>
+                    <a:cs typeface="Calibri" panose="020F0502020204030204" pitchFamily="34" charset="0"/>
+                  </a:rPr>
+                  <a:t>EHR/App to Payer Connectivity</a:t>
+                </a:r>
+              </a:p>
+            </p:txBody>
+          </p:sp>
+          <p:cxnSp>
+            <p:nvCxnSpPr>
+              <p:cNvPr id="108" name="Straight Arrow Connector 107">
+                <a:extLst>
+                  <a:ext uri="{FF2B5EF4-FFF2-40B4-BE49-F238E27FC236}">
+                    <a16:creationId xmlns:a16="http://schemas.microsoft.com/office/drawing/2014/main" id="{2C9AA477-BC28-8637-D4A6-9224530BA84C}"/>
+                  </a:ext>
+                </a:extLst>
+              </p:cNvPr>
+              <p:cNvCxnSpPr>
+                <a:cxnSpLocks/>
+              </p:cNvCxnSpPr>
+              <p:nvPr/>
+            </p:nvCxnSpPr>
+            <p:spPr>
+              <a:xfrm>
+                <a:off x="4022999" y="1936243"/>
+                <a:ext cx="1975107" cy="0"/>
+              </a:xfrm>
+              <a:prstGeom prst="straightConnector1">
+                <a:avLst/>
+              </a:prstGeom>
+              <a:ln w="9525">
+                <a:solidFill>
+                  <a:schemeClr val="accent6">
+                    <a:lumMod val="50000"/>
+                  </a:schemeClr>
+                </a:solidFill>
+                <a:prstDash val="sysDash"/>
+                <a:headEnd type="none"/>
+                <a:tailEnd type="none"/>
+              </a:ln>
+              <a:effectLst/>
+            </p:spPr>
+            <p:style>
+              <a:lnRef idx="2">
+                <a:schemeClr val="accent1"/>
+              </a:lnRef>
+              <a:fillRef idx="0">
+                <a:schemeClr val="accent1"/>
+              </a:fillRef>
+              <a:effectRef idx="1">
+                <a:schemeClr val="accent1"/>
+              </a:effectRef>
+              <a:fontRef idx="minor">
+                <a:schemeClr val="tx1"/>
+              </a:fontRef>
+            </p:style>
+          </p:cxnSp>
+          <p:sp>
+            <p:nvSpPr>
+              <p:cNvPr id="109" name="TextBox 108">
+                <a:extLst>
+                  <a:ext uri="{FF2B5EF4-FFF2-40B4-BE49-F238E27FC236}">
+                    <a16:creationId xmlns:a16="http://schemas.microsoft.com/office/drawing/2014/main" id="{DE199B8F-3670-3989-6CF4-12C721010A88}"/>
+                  </a:ext>
+                </a:extLst>
+              </p:cNvPr>
+              <p:cNvSpPr txBox="1"/>
+              <p:nvPr/>
+            </p:nvSpPr>
+            <p:spPr>
+              <a:xfrm>
+                <a:off x="5908765" y="1746403"/>
+                <a:ext cx="151150" cy="276999"/>
+              </a:xfrm>
+              <a:prstGeom prst="rect">
+                <a:avLst/>
+              </a:prstGeom>
+              <a:noFill/>
+            </p:spPr>
+            <p:txBody>
+              <a:bodyPr wrap="square" lIns="0" tIns="0" rIns="0" bIns="0">
+                <a:spAutoFit/>
+              </a:bodyPr>
+              <a:lstStyle/>
+              <a:p>
+                <a:pPr algn="ctr" defTabSz="609585" fontAlgn="base">
+                  <a:spcBef>
+                    <a:spcPct val="0"/>
+                  </a:spcBef>
+                  <a:spcAft>
+                    <a:spcPct val="0"/>
+                  </a:spcAft>
+                </a:pPr>
+                <a:r>
+                  <a:rPr lang="en-US" sz="2400" b="1" kern="0" dirty="0">
+                    <a:solidFill>
+                      <a:srgbClr val="C0504D">
+                        <a:lumMod val="50000"/>
+                      </a:srgbClr>
+                    </a:solidFill>
+                    <a:latin typeface="Bauhaus 93" panose="04030905020B02020C02" pitchFamily="82" charset="0"/>
+                    <a:ea typeface="ヒラギノ角ゴ Pro W3" pitchFamily="-126" charset="-128"/>
+                    <a:cs typeface="Calibri" panose="020F0502020204030204" pitchFamily="34" charset="0"/>
+                  </a:rPr>
+                  <a:t>.</a:t>
+                </a:r>
+                <a:endParaRPr lang="en-US" sz="2400" dirty="0">
+                  <a:solidFill>
+                    <a:srgbClr val="C0504D">
+                      <a:lumMod val="50000"/>
+                    </a:srgbClr>
+                  </a:solidFill>
+                  <a:latin typeface="Bauhaus 93" panose="04030905020B02020C02" pitchFamily="82" charset="0"/>
+                  <a:ea typeface="ヒラギノ角ゴ Pro W3" pitchFamily="-126" charset="-128"/>
+                </a:endParaRPr>
+              </a:p>
+            </p:txBody>
+          </p:sp>
+        </p:grpSp>
+        <p:sp>
+          <p:nvSpPr>
+            <p:cNvPr id="106" name="TextBox 105">
+              <a:extLst>
+                <a:ext uri="{FF2B5EF4-FFF2-40B4-BE49-F238E27FC236}">
+                  <a16:creationId xmlns:a16="http://schemas.microsoft.com/office/drawing/2014/main" id="{6321A9C3-155E-5074-C292-9DDC9DBA3148}"/>
+                </a:ext>
+              </a:extLst>
+            </p:cNvPr>
+            <p:cNvSpPr txBox="1"/>
+            <p:nvPr/>
+          </p:nvSpPr>
+          <p:spPr>
+            <a:xfrm>
+              <a:off x="4053426" y="1645076"/>
+              <a:ext cx="151150" cy="276999"/>
+            </a:xfrm>
+            <a:prstGeom prst="rect">
+              <a:avLst/>
+            </a:prstGeom>
+            <a:noFill/>
+          </p:spPr>
+          <p:txBody>
+            <a:bodyPr wrap="square" lIns="0" tIns="0" rIns="0" bIns="0">
+              <a:spAutoFit/>
+            </a:bodyPr>
+            <a:lstStyle/>
+            <a:p>
+              <a:pPr algn="ctr" defTabSz="609585" fontAlgn="base">
+                <a:spcBef>
+                  <a:spcPct val="0"/>
+                </a:spcBef>
+                <a:spcAft>
+                  <a:spcPct val="0"/>
+                </a:spcAft>
+              </a:pPr>
+              <a:r>
+                <a:rPr lang="en-US" sz="2400" b="1" kern="0" dirty="0">
+                  <a:solidFill>
+                    <a:srgbClr val="C0504D">
+                      <a:lumMod val="50000"/>
+                    </a:srgbClr>
+                  </a:solidFill>
+                  <a:latin typeface="Bauhaus 93" panose="04030905020B02020C02" pitchFamily="82" charset="0"/>
+                  <a:ea typeface="ヒラギノ角ゴ Pro W3" pitchFamily="-126" charset="-128"/>
+                  <a:cs typeface="Calibri" panose="020F0502020204030204" pitchFamily="34" charset="0"/>
+                </a:rPr>
+                <a:t>.</a:t>
+              </a:r>
+              <a:endParaRPr lang="en-US" sz="2400" dirty="0">
+                <a:solidFill>
+                  <a:srgbClr val="C0504D">
+                    <a:lumMod val="50000"/>
+                  </a:srgbClr>
+                </a:solidFill>
+                <a:latin typeface="Bauhaus 93" panose="04030905020B02020C02" pitchFamily="82" charset="0"/>
+                <a:ea typeface="ヒラギノ角ゴ Pro W3" pitchFamily="-126" charset="-128"/>
+              </a:endParaRPr>
+            </a:p>
+          </p:txBody>
+        </p:sp>
+      </p:grpSp>
+    </p:spTree>
+    <p:extLst>
+      <p:ext uri="{BB962C8B-B14F-4D97-AF65-F5344CB8AC3E}">
+        <p14:creationId xmlns:p14="http://schemas.microsoft.com/office/powerpoint/2010/main" val="3944122007"/>
+      </p:ext>
+    </p:extLst>
+  </p:cSld>
+  <p:clrMapOvr>
+    <a:masterClrMapping/>
+  </p:clrMapOvr>
+</p:sld>
+</file>
+
+<file path=ppt/slides/slide5.xml><?xml version="1.0" encoding="utf-8"?>
+<p:sld xmlns:a="http://schemas.openxmlformats.org/drawingml/2006/main" xmlns:r="http://schemas.openxmlformats.org/officeDocument/2006/relationships" xmlns:p="http://schemas.openxmlformats.org/presentationml/2006/main" showMasterSp="0">
+  <p:cSld>
+    <p:bg>
+      <p:bgPr>
+        <a:solidFill>
+          <a:schemeClr val="bg1"/>
+        </a:solidFill>
+        <a:effectLst/>
+      </p:bgPr>
+    </p:bg>
+    <p:spTree>
+      <p:nvGrpSpPr>
+        <p:cNvPr id="1" name="">
+          <a:extLst>
+            <a:ext uri="{FF2B5EF4-FFF2-40B4-BE49-F238E27FC236}">
               <a16:creationId xmlns:a16="http://schemas.microsoft.com/office/drawing/2014/main" id="{3677D3F2-EB5A-D2A8-2F76-9E002FEFC2FD}"/>
             </a:ext>
           </a:extLst>
@@ -24625,3656 +28860,12 @@
           </a:p>
         </p:txBody>
       </p:sp>
-    </p:spTree>
-    <p:extLst>
-      <p:ext uri="{BB962C8B-B14F-4D97-AF65-F5344CB8AC3E}">
-        <p14:creationId xmlns:p14="http://schemas.microsoft.com/office/powerpoint/2010/main" val="2176042660"/>
-      </p:ext>
-    </p:extLst>
-  </p:cSld>
-  <p:clrMapOvr>
-    <a:masterClrMapping/>
-  </p:clrMapOvr>
-</p:sld>
-</file>
-
-<file path=ppt/slides/slide5.xml><?xml version="1.0" encoding="utf-8"?>
-<p:sld xmlns:a="http://schemas.openxmlformats.org/drawingml/2006/main" xmlns:r="http://schemas.openxmlformats.org/officeDocument/2006/relationships" xmlns:p="http://schemas.openxmlformats.org/presentationml/2006/main" showMasterSp="0">
-  <p:cSld>
-    <p:bg>
-      <p:bgPr>
-        <a:solidFill>
-          <a:schemeClr val="bg1"/>
-        </a:solidFill>
-        <a:effectLst/>
-      </p:bgPr>
-    </p:bg>
-    <p:spTree>
-      <p:nvGrpSpPr>
-        <p:cNvPr id="1" name="">
-          <a:extLst>
-            <a:ext uri="{FF2B5EF4-FFF2-40B4-BE49-F238E27FC236}">
-              <a16:creationId xmlns:a16="http://schemas.microsoft.com/office/drawing/2014/main" id="{E9D8C6D6-3825-BA75-E94D-78D2C1896C59}"/>
-            </a:ext>
-          </a:extLst>
-        </p:cNvPr>
-        <p:cNvGrpSpPr/>
-        <p:nvPr/>
-      </p:nvGrpSpPr>
-      <p:grpSpPr>
-        <a:xfrm>
-          <a:off x="0" y="0"/>
-          <a:ext cx="0" cy="0"/>
-          <a:chOff x="0" y="0"/>
-          <a:chExt cx="0" cy="0"/>
-        </a:xfrm>
-      </p:grpSpPr>
       <p:sp>
         <p:nvSpPr>
-          <p:cNvPr id="21" name="Rectangle: Rounded Corners 20">
+          <p:cNvPr id="5" name="Rectangle 4">
             <a:extLst>
               <a:ext uri="{FF2B5EF4-FFF2-40B4-BE49-F238E27FC236}">
-                <a16:creationId xmlns:a16="http://schemas.microsoft.com/office/drawing/2014/main" id="{DFB201BF-0942-72B2-DCC2-55C9558DDA86}"/>
-              </a:ext>
-            </a:extLst>
-          </p:cNvPr>
-          <p:cNvSpPr/>
-          <p:nvPr/>
-        </p:nvSpPr>
-        <p:spPr>
-          <a:xfrm>
-            <a:off x="7879491" y="1283231"/>
-            <a:ext cx="2657856" cy="668172"/>
-          </a:xfrm>
-          <a:prstGeom prst="roundRect">
-            <a:avLst>
-              <a:gd name="adj" fmla="val 11189"/>
-            </a:avLst>
-          </a:prstGeom>
-          <a:solidFill>
-            <a:srgbClr val="F6F5EE"/>
-          </a:solidFill>
-          <a:ln w="3175">
-            <a:solidFill>
-              <a:schemeClr val="bg2">
-                <a:lumMod val="50000"/>
-              </a:schemeClr>
-            </a:solidFill>
-            <a:prstDash val="solid"/>
-          </a:ln>
-          <a:effectLst>
-            <a:outerShdw blurRad="50800" dist="38100" dir="2700000" algn="tl" rotWithShape="0">
-              <a:prstClr val="black">
-                <a:alpha val="40000"/>
-              </a:prstClr>
-            </a:outerShdw>
-          </a:effectLst>
-        </p:spPr>
-        <p:style>
-          <a:lnRef idx="1">
-            <a:schemeClr val="accent1"/>
-          </a:lnRef>
-          <a:fillRef idx="3">
-            <a:schemeClr val="accent1"/>
-          </a:fillRef>
-          <a:effectRef idx="2">
-            <a:schemeClr val="accent1"/>
-          </a:effectRef>
-          <a:fontRef idx="minor">
-            <a:schemeClr val="lt1"/>
-          </a:fontRef>
-        </p:style>
-        <p:txBody>
-          <a:bodyPr rtlCol="0" anchor="ctr"/>
-          <a:lstStyle/>
-          <a:p>
-            <a:pPr algn="ctr" defTabSz="609585" fontAlgn="base">
-              <a:spcBef>
-                <a:spcPct val="0"/>
-              </a:spcBef>
-              <a:spcAft>
-                <a:spcPct val="0"/>
-              </a:spcAft>
-            </a:pPr>
-            <a:endParaRPr lang="en-US" sz="2400" dirty="0">
-              <a:solidFill>
-                <a:prstClr val="white"/>
-              </a:solidFill>
-              <a:latin typeface="Arial"/>
-            </a:endParaRPr>
-          </a:p>
-        </p:txBody>
-      </p:sp>
-      <p:sp>
-        <p:nvSpPr>
-          <p:cNvPr id="29" name="Rectangle: Rounded Corners 28">
-            <a:extLst>
-              <a:ext uri="{FF2B5EF4-FFF2-40B4-BE49-F238E27FC236}">
-                <a16:creationId xmlns:a16="http://schemas.microsoft.com/office/drawing/2014/main" id="{14B849E9-0FC1-BFFA-4275-EB01FDD42817}"/>
-              </a:ext>
-            </a:extLst>
-          </p:cNvPr>
-          <p:cNvSpPr/>
-          <p:nvPr/>
-        </p:nvSpPr>
-        <p:spPr>
-          <a:xfrm>
-            <a:off x="2291358" y="1287110"/>
-            <a:ext cx="4086777" cy="668172"/>
-          </a:xfrm>
-          <a:prstGeom prst="roundRect">
-            <a:avLst>
-              <a:gd name="adj" fmla="val 11189"/>
-            </a:avLst>
-          </a:prstGeom>
-          <a:solidFill>
-            <a:srgbClr val="F6F5EE"/>
-          </a:solidFill>
-          <a:ln w="3175">
-            <a:solidFill>
-              <a:schemeClr val="bg2">
-                <a:lumMod val="50000"/>
-              </a:schemeClr>
-            </a:solidFill>
-            <a:prstDash val="solid"/>
-          </a:ln>
-          <a:effectLst>
-            <a:outerShdw blurRad="50800" dist="38100" dir="2700000" algn="tl" rotWithShape="0">
-              <a:prstClr val="black">
-                <a:alpha val="40000"/>
-              </a:prstClr>
-            </a:outerShdw>
-          </a:effectLst>
-        </p:spPr>
-        <p:style>
-          <a:lnRef idx="1">
-            <a:schemeClr val="accent1"/>
-          </a:lnRef>
-          <a:fillRef idx="3">
-            <a:schemeClr val="accent1"/>
-          </a:fillRef>
-          <a:effectRef idx="2">
-            <a:schemeClr val="accent1"/>
-          </a:effectRef>
-          <a:fontRef idx="minor">
-            <a:schemeClr val="lt1"/>
-          </a:fontRef>
-        </p:style>
-        <p:txBody>
-          <a:bodyPr rtlCol="0" anchor="ctr"/>
-          <a:lstStyle/>
-          <a:p>
-            <a:pPr algn="ctr" defTabSz="609585" fontAlgn="base">
-              <a:spcBef>
-                <a:spcPct val="0"/>
-              </a:spcBef>
-              <a:spcAft>
-                <a:spcPct val="0"/>
-              </a:spcAft>
-            </a:pPr>
-            <a:endParaRPr lang="en-US" sz="2400" dirty="0">
-              <a:solidFill>
-                <a:prstClr val="white"/>
-              </a:solidFill>
-              <a:latin typeface="Arial"/>
-            </a:endParaRPr>
-          </a:p>
-        </p:txBody>
-      </p:sp>
-      <p:sp>
-        <p:nvSpPr>
-          <p:cNvPr id="30" name="Rectangle: Rounded Corners 29">
-            <a:extLst>
-              <a:ext uri="{FF2B5EF4-FFF2-40B4-BE49-F238E27FC236}">
-                <a16:creationId xmlns:a16="http://schemas.microsoft.com/office/drawing/2014/main" id="{06D84BF9-2B1A-14E1-8824-0C40DC90A7AB}"/>
-              </a:ext>
-            </a:extLst>
-          </p:cNvPr>
-          <p:cNvSpPr/>
-          <p:nvPr/>
-        </p:nvSpPr>
-        <p:spPr>
-          <a:xfrm>
-            <a:off x="3264709" y="2064210"/>
-            <a:ext cx="5628008" cy="605199"/>
-          </a:xfrm>
-          <a:prstGeom prst="roundRect">
-            <a:avLst>
-              <a:gd name="adj" fmla="val 0"/>
-            </a:avLst>
-          </a:prstGeom>
-          <a:solidFill>
-            <a:srgbClr val="FBF4F3"/>
-          </a:solidFill>
-          <a:ln w="3175" cap="flat" cmpd="sng" algn="ctr">
-            <a:solidFill>
-              <a:schemeClr val="accent2">
-                <a:lumMod val="40000"/>
-                <a:lumOff val="60000"/>
-              </a:schemeClr>
-            </a:solidFill>
-            <a:prstDash val="solid"/>
-            <a:miter lim="800000"/>
-          </a:ln>
-          <a:effectLst/>
-        </p:spPr>
-        <p:txBody>
-          <a:bodyPr lIns="0" rIns="0" rtlCol="0" anchor="ctr"/>
-          <a:lstStyle/>
-          <a:p>
-            <a:pPr algn="ctr" defTabSz="1219170">
-              <a:defRPr/>
-            </a:pPr>
-            <a:endParaRPr lang="en-US" sz="1091" kern="0" dirty="0">
-              <a:solidFill>
-                <a:srgbClr val="000000"/>
-              </a:solidFill>
-              <a:latin typeface="Calibri" panose="020F0502020204030204" pitchFamily="34" charset="0"/>
-              <a:ea typeface="ヒラギノ角ゴ Pro W3" pitchFamily="-126" charset="-128"/>
-              <a:cs typeface="Calibri" panose="020F0502020204030204" pitchFamily="34" charset="0"/>
-            </a:endParaRPr>
-          </a:p>
-        </p:txBody>
-      </p:sp>
-      <p:cxnSp>
-        <p:nvCxnSpPr>
-          <p:cNvPr id="31" name="Straight Connector 30">
-            <a:extLst>
-              <a:ext uri="{FF2B5EF4-FFF2-40B4-BE49-F238E27FC236}">
-                <a16:creationId xmlns:a16="http://schemas.microsoft.com/office/drawing/2014/main" id="{58FA3398-3FA6-36D3-12BB-C87D5D56D3CE}"/>
-              </a:ext>
-            </a:extLst>
-          </p:cNvPr>
-          <p:cNvCxnSpPr>
-            <a:cxnSpLocks/>
-          </p:cNvCxnSpPr>
-          <p:nvPr/>
-        </p:nvCxnSpPr>
-        <p:spPr>
-          <a:xfrm>
-            <a:off x="4319757" y="1846458"/>
-            <a:ext cx="0" cy="4413504"/>
-          </a:xfrm>
-          <a:prstGeom prst="line">
-            <a:avLst/>
-          </a:prstGeom>
-          <a:noFill/>
-          <a:ln w="6350" cap="flat" cmpd="sng" algn="ctr">
-            <a:solidFill>
-              <a:srgbClr val="FFFFFF">
-                <a:lumMod val="75000"/>
-              </a:srgbClr>
-            </a:solidFill>
-            <a:prstDash val="dash"/>
-            <a:miter lim="800000"/>
-          </a:ln>
-          <a:effectLst/>
-        </p:spPr>
-      </p:cxnSp>
-      <p:cxnSp>
-        <p:nvCxnSpPr>
-          <p:cNvPr id="41" name="Straight Connector 40">
-            <a:extLst>
-              <a:ext uri="{FF2B5EF4-FFF2-40B4-BE49-F238E27FC236}">
-                <a16:creationId xmlns:a16="http://schemas.microsoft.com/office/drawing/2014/main" id="{EB1A2F8A-BADA-09F0-23BC-45D6B868B5A2}"/>
-              </a:ext>
-            </a:extLst>
-          </p:cNvPr>
-          <p:cNvCxnSpPr>
-            <a:cxnSpLocks/>
-          </p:cNvCxnSpPr>
-          <p:nvPr/>
-        </p:nvCxnSpPr>
-        <p:spPr>
-          <a:xfrm>
-            <a:off x="5815179" y="1846458"/>
-            <a:ext cx="0" cy="4413504"/>
-          </a:xfrm>
-          <a:prstGeom prst="line">
-            <a:avLst/>
-          </a:prstGeom>
-          <a:noFill/>
-          <a:ln w="6350" cap="flat" cmpd="sng" algn="ctr">
-            <a:solidFill>
-              <a:srgbClr val="FFFFFF">
-                <a:lumMod val="75000"/>
-              </a:srgbClr>
-            </a:solidFill>
-            <a:prstDash val="dash"/>
-            <a:miter lim="800000"/>
-          </a:ln>
-          <a:effectLst/>
-        </p:spPr>
-      </p:cxnSp>
-      <p:cxnSp>
-        <p:nvCxnSpPr>
-          <p:cNvPr id="44" name="Straight Connector 43">
-            <a:extLst>
-              <a:ext uri="{FF2B5EF4-FFF2-40B4-BE49-F238E27FC236}">
-                <a16:creationId xmlns:a16="http://schemas.microsoft.com/office/drawing/2014/main" id="{0DD152A5-E863-1406-BFFB-06E49AFDE18D}"/>
-              </a:ext>
-            </a:extLst>
-          </p:cNvPr>
-          <p:cNvCxnSpPr>
-            <a:cxnSpLocks/>
-          </p:cNvCxnSpPr>
-          <p:nvPr/>
-        </p:nvCxnSpPr>
-        <p:spPr>
-          <a:xfrm>
-            <a:off x="8435517" y="1846458"/>
-            <a:ext cx="0" cy="4413504"/>
-          </a:xfrm>
-          <a:prstGeom prst="line">
-            <a:avLst/>
-          </a:prstGeom>
-          <a:noFill/>
-          <a:ln w="6350" cap="flat" cmpd="sng" algn="ctr">
-            <a:solidFill>
-              <a:srgbClr val="FFFFFF">
-                <a:lumMod val="75000"/>
-              </a:srgbClr>
-            </a:solidFill>
-            <a:prstDash val="dash"/>
-            <a:miter lim="800000"/>
-          </a:ln>
-          <a:effectLst/>
-        </p:spPr>
-      </p:cxnSp>
-      <p:cxnSp>
-        <p:nvCxnSpPr>
-          <p:cNvPr id="45" name="Straight Connector 44">
-            <a:extLst>
-              <a:ext uri="{FF2B5EF4-FFF2-40B4-BE49-F238E27FC236}">
-                <a16:creationId xmlns:a16="http://schemas.microsoft.com/office/drawing/2014/main" id="{17D67D58-43E3-8E71-051E-95297E2A8D0C}"/>
-              </a:ext>
-            </a:extLst>
-          </p:cNvPr>
-          <p:cNvCxnSpPr>
-            <a:cxnSpLocks/>
-          </p:cNvCxnSpPr>
-          <p:nvPr/>
-        </p:nvCxnSpPr>
-        <p:spPr>
-          <a:xfrm>
-            <a:off x="9872123" y="1846458"/>
-            <a:ext cx="0" cy="4413504"/>
-          </a:xfrm>
-          <a:prstGeom prst="line">
-            <a:avLst/>
-          </a:prstGeom>
-          <a:noFill/>
-          <a:ln w="6350" cap="flat" cmpd="sng" algn="ctr">
-            <a:solidFill>
-              <a:srgbClr val="FFFFFF">
-                <a:lumMod val="75000"/>
-              </a:srgbClr>
-            </a:solidFill>
-            <a:prstDash val="dash"/>
-            <a:miter lim="800000"/>
-          </a:ln>
-          <a:effectLst/>
-        </p:spPr>
-      </p:cxnSp>
-      <p:cxnSp>
-        <p:nvCxnSpPr>
-          <p:cNvPr id="46" name="Straight Connector 45">
-            <a:extLst>
-              <a:ext uri="{FF2B5EF4-FFF2-40B4-BE49-F238E27FC236}">
-                <a16:creationId xmlns:a16="http://schemas.microsoft.com/office/drawing/2014/main" id="{24BAE3E0-ECCC-5028-C951-6A063ED6773D}"/>
-              </a:ext>
-            </a:extLst>
-          </p:cNvPr>
-          <p:cNvCxnSpPr>
-            <a:cxnSpLocks/>
-          </p:cNvCxnSpPr>
-          <p:nvPr/>
-        </p:nvCxnSpPr>
-        <p:spPr>
-          <a:xfrm>
-            <a:off x="2874510" y="1846458"/>
-            <a:ext cx="0" cy="4413504"/>
-          </a:xfrm>
-          <a:prstGeom prst="line">
-            <a:avLst/>
-          </a:prstGeom>
-          <a:noFill/>
-          <a:ln w="6350" cap="flat" cmpd="sng" algn="ctr">
-            <a:solidFill>
-              <a:srgbClr val="FFFFFF">
-                <a:lumMod val="75000"/>
-              </a:srgbClr>
-            </a:solidFill>
-            <a:prstDash val="dash"/>
-            <a:miter lim="800000"/>
-          </a:ln>
-          <a:effectLst/>
-        </p:spPr>
-      </p:cxnSp>
-      <p:sp>
-        <p:nvSpPr>
-          <p:cNvPr id="47" name="TextBox 46">
-            <a:extLst>
-              <a:ext uri="{FF2B5EF4-FFF2-40B4-BE49-F238E27FC236}">
-                <a16:creationId xmlns:a16="http://schemas.microsoft.com/office/drawing/2014/main" id="{CC8D1F05-0D0E-F14C-6162-5DCC60CE3489}"/>
-              </a:ext>
-            </a:extLst>
-          </p:cNvPr>
-          <p:cNvSpPr txBox="1"/>
-          <p:nvPr/>
-        </p:nvSpPr>
-        <p:spPr>
-          <a:xfrm>
-            <a:off x="7870256" y="1261970"/>
-            <a:ext cx="2667092" cy="260199"/>
-          </a:xfrm>
-          <a:prstGeom prst="rect">
-            <a:avLst/>
-          </a:prstGeom>
-          <a:noFill/>
-        </p:spPr>
-        <p:txBody>
-          <a:bodyPr wrap="square">
-            <a:spAutoFit/>
-          </a:bodyPr>
-          <a:lstStyle/>
-          <a:p>
-            <a:pPr algn="ctr" defTabSz="609585" fontAlgn="base">
-              <a:spcBef>
-                <a:spcPct val="0"/>
-              </a:spcBef>
-              <a:spcAft>
-                <a:spcPct val="0"/>
-              </a:spcAft>
-            </a:pPr>
-            <a:r>
-              <a:rPr lang="en-US" sz="1091" b="1" kern="0" dirty="0">
-                <a:solidFill>
-                  <a:srgbClr val="000000"/>
-                </a:solidFill>
-                <a:latin typeface="Calibri" panose="020F0502020204030204" pitchFamily="34" charset="0"/>
-                <a:ea typeface="ヒラギノ角ゴ Pro W3" pitchFamily="-126" charset="-128"/>
-                <a:cs typeface="Calibri" panose="020F0502020204030204" pitchFamily="34" charset="0"/>
-              </a:rPr>
-              <a:t>Payer System</a:t>
-            </a:r>
-          </a:p>
-        </p:txBody>
-      </p:sp>
-      <p:sp>
-        <p:nvSpPr>
-          <p:cNvPr id="48" name="Rectangle: Rounded Corners 47">
-            <a:extLst>
-              <a:ext uri="{FF2B5EF4-FFF2-40B4-BE49-F238E27FC236}">
-                <a16:creationId xmlns:a16="http://schemas.microsoft.com/office/drawing/2014/main" id="{5CE36586-8EF1-BDBD-B26C-19DEAFEE13EB}"/>
-              </a:ext>
-            </a:extLst>
-          </p:cNvPr>
-          <p:cNvSpPr/>
-          <p:nvPr/>
-        </p:nvSpPr>
-        <p:spPr>
-          <a:xfrm>
-            <a:off x="5872243" y="4244705"/>
-            <a:ext cx="4273084" cy="1327745"/>
-          </a:xfrm>
-          <a:prstGeom prst="roundRect">
-            <a:avLst>
-              <a:gd name="adj" fmla="val 463"/>
-            </a:avLst>
-          </a:prstGeom>
-          <a:solidFill>
-            <a:srgbClr val="F0F4FA"/>
-          </a:solidFill>
-          <a:ln w="3175">
-            <a:solidFill>
-              <a:srgbClr val="E6EDF6"/>
-            </a:solidFill>
-            <a:prstDash val="solid"/>
-          </a:ln>
-          <a:effectLst/>
-        </p:spPr>
-        <p:style>
-          <a:lnRef idx="1">
-            <a:schemeClr val="accent1"/>
-          </a:lnRef>
-          <a:fillRef idx="3">
-            <a:schemeClr val="accent1"/>
-          </a:fillRef>
-          <a:effectRef idx="2">
-            <a:schemeClr val="accent1"/>
-          </a:effectRef>
-          <a:fontRef idx="minor">
-            <a:schemeClr val="lt1"/>
-          </a:fontRef>
-        </p:style>
-        <p:txBody>
-          <a:bodyPr rtlCol="0" anchor="ctr"/>
-          <a:lstStyle/>
-          <a:p>
-            <a:pPr algn="ctr" defTabSz="609585" fontAlgn="base">
-              <a:spcBef>
-                <a:spcPct val="0"/>
-              </a:spcBef>
-              <a:spcAft>
-                <a:spcPct val="0"/>
-              </a:spcAft>
-            </a:pPr>
-            <a:endParaRPr lang="en-US" sz="2400" dirty="0">
-              <a:solidFill>
-                <a:prstClr val="white"/>
-              </a:solidFill>
-              <a:latin typeface="Arial"/>
-            </a:endParaRPr>
-          </a:p>
-        </p:txBody>
-      </p:sp>
-      <p:sp>
-        <p:nvSpPr>
-          <p:cNvPr id="49" name="Rectangle: Rounded Corners 48">
-            <a:extLst>
-              <a:ext uri="{FF2B5EF4-FFF2-40B4-BE49-F238E27FC236}">
-                <a16:creationId xmlns:a16="http://schemas.microsoft.com/office/drawing/2014/main" id="{7FF36BB7-7A38-B105-FF1C-9C5EB1AF6DD8}"/>
-              </a:ext>
-            </a:extLst>
-          </p:cNvPr>
-          <p:cNvSpPr/>
-          <p:nvPr/>
-        </p:nvSpPr>
-        <p:spPr>
-          <a:xfrm>
-            <a:off x="2828150" y="2786402"/>
-            <a:ext cx="85344" cy="2316480"/>
-          </a:xfrm>
-          <a:prstGeom prst="roundRect">
-            <a:avLst>
-              <a:gd name="adj" fmla="val 0"/>
-            </a:avLst>
-          </a:prstGeom>
-          <a:solidFill>
-            <a:srgbClr val="FFFFFF">
-              <a:lumMod val="95000"/>
-            </a:srgbClr>
-          </a:solidFill>
-          <a:ln w="9525" cap="flat" cmpd="sng" algn="ctr">
-            <a:solidFill>
-              <a:srgbClr val="FFFFFF">
-                <a:lumMod val="75000"/>
-              </a:srgbClr>
-            </a:solidFill>
-            <a:prstDash val="solid"/>
-            <a:miter lim="800000"/>
-          </a:ln>
-          <a:effectLst/>
-        </p:spPr>
-        <p:txBody>
-          <a:bodyPr lIns="0" rIns="0" rtlCol="0" anchor="ctr"/>
-          <a:lstStyle/>
-          <a:p>
-            <a:pPr algn="ctr" defTabSz="1219170">
-              <a:defRPr/>
-            </a:pPr>
-            <a:endParaRPr lang="en-US" sz="1091" kern="0" dirty="0">
-              <a:solidFill>
-                <a:srgbClr val="000000"/>
-              </a:solidFill>
-              <a:latin typeface="Calibri" panose="020F0502020204030204" pitchFamily="34" charset="0"/>
-              <a:ea typeface="ヒラギノ角ゴ Pro W3" pitchFamily="-126" charset="-128"/>
-              <a:cs typeface="Calibri" panose="020F0502020204030204" pitchFamily="34" charset="0"/>
-            </a:endParaRPr>
-          </a:p>
-        </p:txBody>
-      </p:sp>
-      <p:grpSp>
-        <p:nvGrpSpPr>
-          <p:cNvPr id="50" name="Group 49">
-            <a:extLst>
-              <a:ext uri="{FF2B5EF4-FFF2-40B4-BE49-F238E27FC236}">
-                <a16:creationId xmlns:a16="http://schemas.microsoft.com/office/drawing/2014/main" id="{1F410884-7ED6-1F35-B708-EA4AD423BE14}"/>
-              </a:ext>
-            </a:extLst>
-          </p:cNvPr>
-          <p:cNvGrpSpPr/>
-          <p:nvPr/>
-        </p:nvGrpSpPr>
-        <p:grpSpPr>
-          <a:xfrm>
-            <a:off x="2925348" y="2842352"/>
-            <a:ext cx="1360655" cy="363784"/>
-            <a:chOff x="2041915" y="2002554"/>
-            <a:chExt cx="1020491" cy="272838"/>
-          </a:xfrm>
-        </p:grpSpPr>
-        <p:sp>
-          <p:nvSpPr>
-            <p:cNvPr id="51" name="TextBox 50">
-              <a:extLst>
-                <a:ext uri="{FF2B5EF4-FFF2-40B4-BE49-F238E27FC236}">
-                  <a16:creationId xmlns:a16="http://schemas.microsoft.com/office/drawing/2014/main" id="{544E7BBA-A4FD-068F-D241-FCC8179DC524}"/>
-                </a:ext>
-              </a:extLst>
-            </p:cNvPr>
-            <p:cNvSpPr txBox="1"/>
-            <p:nvPr/>
-          </p:nvSpPr>
-          <p:spPr>
-            <a:xfrm>
-              <a:off x="2041915" y="2002554"/>
-              <a:ext cx="1020491" cy="251800"/>
-            </a:xfrm>
-            <a:prstGeom prst="rect">
-              <a:avLst/>
-            </a:prstGeom>
-            <a:noFill/>
-          </p:spPr>
-          <p:txBody>
-            <a:bodyPr wrap="square" lIns="0" tIns="0" rIns="0" bIns="0">
-              <a:spAutoFit/>
-            </a:bodyPr>
-            <a:lstStyle/>
-            <a:p>
-              <a:pPr algn="ctr" defTabSz="1219170">
-                <a:defRPr/>
-              </a:pPr>
-              <a:r>
-                <a:rPr lang="en-US" sz="1091" kern="0" dirty="0">
-                  <a:solidFill>
-                    <a:prstClr val="black"/>
-                  </a:solidFill>
-                  <a:latin typeface="Calibri" panose="020F0502020204030204" pitchFamily="34" charset="0"/>
-                  <a:ea typeface="ヒラギノ角ゴ Pro W3" pitchFamily="-126" charset="-128"/>
-                  <a:cs typeface="Calibri" panose="020F0502020204030204" pitchFamily="34" charset="0"/>
-                </a:rPr>
-                <a:t>Request DTR </a:t>
-              </a:r>
-            </a:p>
-            <a:p>
-              <a:pPr algn="ctr" defTabSz="1219170">
-                <a:defRPr/>
-              </a:pPr>
-              <a:r>
-                <a:rPr lang="en-US" sz="1091" kern="0" dirty="0">
-                  <a:solidFill>
-                    <a:prstClr val="black"/>
-                  </a:solidFill>
-                  <a:latin typeface="Calibri" panose="020F0502020204030204" pitchFamily="34" charset="0"/>
-                  <a:ea typeface="ヒラギノ角ゴ Pro W3" pitchFamily="-126" charset="-128"/>
-                  <a:cs typeface="Calibri" panose="020F0502020204030204" pitchFamily="34" charset="0"/>
-                </a:rPr>
-                <a:t>and establish context</a:t>
-              </a:r>
-            </a:p>
-          </p:txBody>
-        </p:sp>
-        <p:cxnSp>
-          <p:nvCxnSpPr>
-            <p:cNvPr id="52" name="Straight Arrow Connector 51">
-              <a:extLst>
-                <a:ext uri="{FF2B5EF4-FFF2-40B4-BE49-F238E27FC236}">
-                  <a16:creationId xmlns:a16="http://schemas.microsoft.com/office/drawing/2014/main" id="{F97F54AE-28AE-62DB-F9D2-7B41F5541D9F}"/>
-                </a:ext>
-              </a:extLst>
-            </p:cNvPr>
-            <p:cNvCxnSpPr>
-              <a:cxnSpLocks/>
-            </p:cNvCxnSpPr>
-            <p:nvPr/>
-          </p:nvCxnSpPr>
-          <p:spPr>
-            <a:xfrm flipH="1">
-              <a:off x="2041915" y="2275392"/>
-              <a:ext cx="1013447" cy="0"/>
-            </a:xfrm>
-            <a:prstGeom prst="straightConnector1">
-              <a:avLst/>
-            </a:prstGeom>
-            <a:noFill/>
-            <a:ln w="6350" cap="flat" cmpd="sng" algn="ctr">
-              <a:solidFill>
-                <a:schemeClr val="tx1"/>
-              </a:solidFill>
-              <a:prstDash val="solid"/>
-              <a:miter lim="800000"/>
-              <a:headEnd type="triangle"/>
-              <a:tailEnd type="none"/>
-            </a:ln>
-            <a:effectLst/>
-          </p:spPr>
-        </p:cxnSp>
-      </p:grpSp>
-      <p:sp>
-        <p:nvSpPr>
-          <p:cNvPr id="53" name="Rectangle: Rounded Corners 52">
-            <a:extLst>
-              <a:ext uri="{FF2B5EF4-FFF2-40B4-BE49-F238E27FC236}">
-                <a16:creationId xmlns:a16="http://schemas.microsoft.com/office/drawing/2014/main" id="{839F9B88-2976-AB72-1D31-C283EBE9AF8B}"/>
-              </a:ext>
-            </a:extLst>
-          </p:cNvPr>
-          <p:cNvSpPr/>
-          <p:nvPr/>
-        </p:nvSpPr>
-        <p:spPr>
-          <a:xfrm>
-            <a:off x="4279037" y="2780824"/>
-            <a:ext cx="85344" cy="3474720"/>
-          </a:xfrm>
-          <a:prstGeom prst="roundRect">
-            <a:avLst>
-              <a:gd name="adj" fmla="val 0"/>
-            </a:avLst>
-          </a:prstGeom>
-          <a:solidFill>
-            <a:srgbClr val="FFFFFF">
-              <a:lumMod val="95000"/>
-            </a:srgbClr>
-          </a:solidFill>
-          <a:ln w="9525" cap="flat" cmpd="sng" algn="ctr">
-            <a:solidFill>
-              <a:srgbClr val="FFFFFF">
-                <a:lumMod val="75000"/>
-              </a:srgbClr>
-            </a:solidFill>
-            <a:prstDash val="solid"/>
-            <a:miter lim="800000"/>
-          </a:ln>
-          <a:effectLst/>
-        </p:spPr>
-        <p:txBody>
-          <a:bodyPr lIns="0" rIns="0" rtlCol="0" anchor="ctr"/>
-          <a:lstStyle/>
-          <a:p>
-            <a:pPr algn="ctr" defTabSz="1219170">
-              <a:defRPr/>
-            </a:pPr>
-            <a:endParaRPr lang="en-US" sz="1091" kern="0" dirty="0">
-              <a:solidFill>
-                <a:srgbClr val="000000"/>
-              </a:solidFill>
-              <a:latin typeface="Calibri" panose="020F0502020204030204" pitchFamily="34" charset="0"/>
-              <a:ea typeface="ヒラギノ角ゴ Pro W3" pitchFamily="-126" charset="-128"/>
-              <a:cs typeface="Calibri" panose="020F0502020204030204" pitchFamily="34" charset="0"/>
-            </a:endParaRPr>
-          </a:p>
-        </p:txBody>
-      </p:sp>
-      <p:grpSp>
-        <p:nvGrpSpPr>
-          <p:cNvPr id="54" name="Group 53">
-            <a:extLst>
-              <a:ext uri="{FF2B5EF4-FFF2-40B4-BE49-F238E27FC236}">
-                <a16:creationId xmlns:a16="http://schemas.microsoft.com/office/drawing/2014/main" id="{DBDB72A9-5BA9-EB40-D6C7-F5347D153E33}"/>
-              </a:ext>
-            </a:extLst>
-          </p:cNvPr>
-          <p:cNvGrpSpPr/>
-          <p:nvPr/>
-        </p:nvGrpSpPr>
-        <p:grpSpPr>
-          <a:xfrm>
-            <a:off x="4383537" y="2998116"/>
-            <a:ext cx="1393840" cy="353457"/>
-            <a:chOff x="3135557" y="2484123"/>
-            <a:chExt cx="1045380" cy="265093"/>
-          </a:xfrm>
-        </p:grpSpPr>
-        <p:cxnSp>
-          <p:nvCxnSpPr>
-            <p:cNvPr id="55" name="Straight Arrow Connector 54">
-              <a:extLst>
-                <a:ext uri="{FF2B5EF4-FFF2-40B4-BE49-F238E27FC236}">
-                  <a16:creationId xmlns:a16="http://schemas.microsoft.com/office/drawing/2014/main" id="{BB5FAA1A-01F0-A159-E0C8-05E2DEF6EB1C}"/>
-                </a:ext>
-              </a:extLst>
-            </p:cNvPr>
-            <p:cNvCxnSpPr>
-              <a:cxnSpLocks/>
-            </p:cNvCxnSpPr>
-            <p:nvPr/>
-          </p:nvCxnSpPr>
-          <p:spPr>
-            <a:xfrm>
-              <a:off x="3135557" y="2749216"/>
-              <a:ext cx="1045380" cy="0"/>
-            </a:xfrm>
-            <a:prstGeom prst="straightConnector1">
-              <a:avLst/>
-            </a:prstGeom>
-            <a:noFill/>
-            <a:ln w="6350" cap="flat" cmpd="sng" algn="ctr">
-              <a:solidFill>
-                <a:srgbClr val="000000"/>
-              </a:solidFill>
-              <a:prstDash val="solid"/>
-              <a:miter lim="800000"/>
-              <a:tailEnd type="triangle"/>
-            </a:ln>
-            <a:effectLst/>
-          </p:spPr>
-        </p:cxnSp>
-        <p:sp>
-          <p:nvSpPr>
-            <p:cNvPr id="56" name="TextBox 55">
-              <a:extLst>
-                <a:ext uri="{FF2B5EF4-FFF2-40B4-BE49-F238E27FC236}">
-                  <a16:creationId xmlns:a16="http://schemas.microsoft.com/office/drawing/2014/main" id="{0ED68F3B-AEAA-4E77-0508-FF95C74A81C9}"/>
-                </a:ext>
-              </a:extLst>
-            </p:cNvPr>
-            <p:cNvSpPr txBox="1"/>
-            <p:nvPr/>
-          </p:nvSpPr>
-          <p:spPr>
-            <a:xfrm>
-              <a:off x="3161263" y="2484123"/>
-              <a:ext cx="996727" cy="251800"/>
-            </a:xfrm>
-            <a:prstGeom prst="rect">
-              <a:avLst/>
-            </a:prstGeom>
-            <a:noFill/>
-          </p:spPr>
-          <p:txBody>
-            <a:bodyPr wrap="square" lIns="0" tIns="0" rIns="0" bIns="0">
-              <a:spAutoFit/>
-            </a:bodyPr>
-            <a:lstStyle/>
-            <a:p>
-              <a:pPr algn="ctr" defTabSz="1219170">
-                <a:defRPr/>
-              </a:pPr>
-              <a:r>
-                <a:rPr lang="en-US" sz="1091" kern="0" dirty="0">
-                  <a:solidFill>
-                    <a:srgbClr val="000000"/>
-                  </a:solidFill>
-                  <a:latin typeface="Calibri" panose="020F0502020204030204" pitchFamily="34" charset="0"/>
-                  <a:ea typeface="ヒラギノ角ゴ Pro W3" pitchFamily="-126" charset="-128"/>
-                  <a:cs typeface="Calibri" panose="020F0502020204030204" pitchFamily="34" charset="0"/>
-                </a:rPr>
-                <a:t>Launch DTR </a:t>
-              </a:r>
-            </a:p>
-            <a:p>
-              <a:pPr algn="ctr" defTabSz="1219170">
-                <a:defRPr/>
-              </a:pPr>
-              <a:r>
-                <a:rPr lang="en-US" sz="1091" kern="0" dirty="0">
-                  <a:solidFill>
-                    <a:srgbClr val="000000"/>
-                  </a:solidFill>
-                  <a:latin typeface="Calibri" panose="020F0502020204030204" pitchFamily="34" charset="0"/>
-                  <a:ea typeface="ヒラギノ角ゴ Pro W3" pitchFamily="-126" charset="-128"/>
-                  <a:cs typeface="Calibri" panose="020F0502020204030204" pitchFamily="34" charset="0"/>
-                </a:rPr>
-                <a:t>with context</a:t>
-              </a:r>
-            </a:p>
-          </p:txBody>
-        </p:sp>
-      </p:grpSp>
-      <p:sp>
-        <p:nvSpPr>
-          <p:cNvPr id="57" name="Rectangle: Rounded Corners 56">
-            <a:extLst>
-              <a:ext uri="{FF2B5EF4-FFF2-40B4-BE49-F238E27FC236}">
-                <a16:creationId xmlns:a16="http://schemas.microsoft.com/office/drawing/2014/main" id="{9B5F4815-74B9-0C8E-E4F6-DDA3DB62886A}"/>
-              </a:ext>
-            </a:extLst>
-          </p:cNvPr>
-          <p:cNvSpPr/>
-          <p:nvPr/>
-        </p:nvSpPr>
-        <p:spPr>
-          <a:xfrm>
-            <a:off x="8389786" y="3301502"/>
-            <a:ext cx="85344" cy="2560320"/>
-          </a:xfrm>
-          <a:prstGeom prst="roundRect">
-            <a:avLst>
-              <a:gd name="adj" fmla="val 0"/>
-            </a:avLst>
-          </a:prstGeom>
-          <a:solidFill>
-            <a:srgbClr val="FFFFFF">
-              <a:lumMod val="95000"/>
-            </a:srgbClr>
-          </a:solidFill>
-          <a:ln w="9525" cap="flat" cmpd="sng" algn="ctr">
-            <a:solidFill>
-              <a:srgbClr val="FFFFFF">
-                <a:lumMod val="75000"/>
-              </a:srgbClr>
-            </a:solidFill>
-            <a:prstDash val="solid"/>
-            <a:miter lim="800000"/>
-          </a:ln>
-          <a:effectLst/>
-        </p:spPr>
-        <p:txBody>
-          <a:bodyPr lIns="0" rIns="0" rtlCol="0" anchor="ctr"/>
-          <a:lstStyle/>
-          <a:p>
-            <a:pPr algn="ctr" defTabSz="1219170">
-              <a:defRPr/>
-            </a:pPr>
-            <a:endParaRPr lang="en-US" sz="1091" kern="0" dirty="0">
-              <a:solidFill>
-                <a:srgbClr val="000000"/>
-              </a:solidFill>
-              <a:latin typeface="Calibri" panose="020F0502020204030204" pitchFamily="34" charset="0"/>
-              <a:ea typeface="ヒラギノ角ゴ Pro W3" pitchFamily="-126" charset="-128"/>
-              <a:cs typeface="Calibri" panose="020F0502020204030204" pitchFamily="34" charset="0"/>
-            </a:endParaRPr>
-          </a:p>
-        </p:txBody>
-      </p:sp>
-      <p:sp>
-        <p:nvSpPr>
-          <p:cNvPr id="58" name="Rectangle: Rounded Corners 57">
-            <a:extLst>
-              <a:ext uri="{FF2B5EF4-FFF2-40B4-BE49-F238E27FC236}">
-                <a16:creationId xmlns:a16="http://schemas.microsoft.com/office/drawing/2014/main" id="{C9E42C64-E05D-D1FD-3ABC-102CB7BA6149}"/>
-              </a:ext>
-            </a:extLst>
-          </p:cNvPr>
-          <p:cNvSpPr/>
-          <p:nvPr/>
-        </p:nvSpPr>
-        <p:spPr>
-          <a:xfrm>
-            <a:off x="9829927" y="3301502"/>
-            <a:ext cx="85344" cy="2560320"/>
-          </a:xfrm>
-          <a:prstGeom prst="roundRect">
-            <a:avLst>
-              <a:gd name="adj" fmla="val 0"/>
-            </a:avLst>
-          </a:prstGeom>
-          <a:solidFill>
-            <a:srgbClr val="FFFFFF">
-              <a:lumMod val="95000"/>
-            </a:srgbClr>
-          </a:solidFill>
-          <a:ln w="9525" cap="flat" cmpd="sng" algn="ctr">
-            <a:solidFill>
-              <a:srgbClr val="FFFFFF">
-                <a:lumMod val="75000"/>
-              </a:srgbClr>
-            </a:solidFill>
-            <a:prstDash val="solid"/>
-            <a:miter lim="800000"/>
-          </a:ln>
-          <a:effectLst/>
-        </p:spPr>
-        <p:txBody>
-          <a:bodyPr lIns="0" rIns="0" rtlCol="0" anchor="ctr"/>
-          <a:lstStyle/>
-          <a:p>
-            <a:pPr algn="ctr" defTabSz="1219170">
-              <a:defRPr/>
-            </a:pPr>
-            <a:endParaRPr lang="en-US" sz="1091" kern="0" dirty="0">
-              <a:solidFill>
-                <a:srgbClr val="000000"/>
-              </a:solidFill>
-              <a:latin typeface="Calibri" panose="020F0502020204030204" pitchFamily="34" charset="0"/>
-              <a:ea typeface="ヒラギノ角ゴ Pro W3" pitchFamily="-126" charset="-128"/>
-              <a:cs typeface="Calibri" panose="020F0502020204030204" pitchFamily="34" charset="0"/>
-            </a:endParaRPr>
-          </a:p>
-        </p:txBody>
-      </p:sp>
-      <p:grpSp>
-        <p:nvGrpSpPr>
-          <p:cNvPr id="59" name="Group 58">
-            <a:extLst>
-              <a:ext uri="{FF2B5EF4-FFF2-40B4-BE49-F238E27FC236}">
-                <a16:creationId xmlns:a16="http://schemas.microsoft.com/office/drawing/2014/main" id="{843E3EE7-7C5B-4EFC-C127-6D580C376186}"/>
-              </a:ext>
-            </a:extLst>
-          </p:cNvPr>
-          <p:cNvGrpSpPr/>
-          <p:nvPr/>
-        </p:nvGrpSpPr>
-        <p:grpSpPr>
-          <a:xfrm>
-            <a:off x="4383537" y="4221460"/>
-            <a:ext cx="1393840" cy="169079"/>
-            <a:chOff x="3135557" y="3181463"/>
-            <a:chExt cx="1045380" cy="126809"/>
-          </a:xfrm>
-        </p:grpSpPr>
-        <p:cxnSp>
-          <p:nvCxnSpPr>
-            <p:cNvPr id="60" name="Straight Arrow Connector 59">
-              <a:extLst>
-                <a:ext uri="{FF2B5EF4-FFF2-40B4-BE49-F238E27FC236}">
-                  <a16:creationId xmlns:a16="http://schemas.microsoft.com/office/drawing/2014/main" id="{BAB33B81-1A84-329F-7186-EA25485F3E5D}"/>
-                </a:ext>
-              </a:extLst>
-            </p:cNvPr>
-            <p:cNvCxnSpPr>
-              <a:cxnSpLocks/>
-            </p:cNvCxnSpPr>
-            <p:nvPr/>
-          </p:nvCxnSpPr>
-          <p:spPr>
-            <a:xfrm>
-              <a:off x="3135557" y="3308272"/>
-              <a:ext cx="1045380" cy="0"/>
-            </a:xfrm>
-            <a:prstGeom prst="straightConnector1">
-              <a:avLst/>
-            </a:prstGeom>
-            <a:noFill/>
-            <a:ln w="6350" cap="flat" cmpd="sng" algn="ctr">
-              <a:solidFill>
-                <a:srgbClr val="000000"/>
-              </a:solidFill>
-              <a:prstDash val="solid"/>
-              <a:miter lim="800000"/>
-              <a:headEnd type="triangle"/>
-              <a:tailEnd type="triangle"/>
-            </a:ln>
-            <a:effectLst/>
-          </p:spPr>
-        </p:cxnSp>
-        <p:sp>
-          <p:nvSpPr>
-            <p:cNvPr id="61" name="TextBox 60">
-              <a:extLst>
-                <a:ext uri="{FF2B5EF4-FFF2-40B4-BE49-F238E27FC236}">
-                  <a16:creationId xmlns:a16="http://schemas.microsoft.com/office/drawing/2014/main" id="{B333F4FC-7541-71AC-FFED-0D1270411A2B}"/>
-                </a:ext>
-              </a:extLst>
-            </p:cNvPr>
-            <p:cNvSpPr txBox="1"/>
-            <p:nvPr/>
-          </p:nvSpPr>
-          <p:spPr>
-            <a:xfrm>
-              <a:off x="3201306" y="3181463"/>
-              <a:ext cx="918878" cy="125900"/>
-            </a:xfrm>
-            <a:prstGeom prst="rect">
-              <a:avLst/>
-            </a:prstGeom>
-            <a:noFill/>
-          </p:spPr>
-          <p:txBody>
-            <a:bodyPr wrap="square" lIns="0" tIns="0" rIns="0" bIns="0">
-              <a:spAutoFit/>
-            </a:bodyPr>
-            <a:lstStyle/>
-            <a:p>
-              <a:pPr algn="ctr" defTabSz="1219170">
-                <a:defRPr/>
-              </a:pPr>
-              <a:r>
-                <a:rPr lang="en-US" sz="1091" kern="0" dirty="0">
-                  <a:solidFill>
-                    <a:srgbClr val="000000"/>
-                  </a:solidFill>
-                  <a:latin typeface="Calibri" panose="020F0502020204030204" pitchFamily="34" charset="0"/>
-                  <a:ea typeface="ヒラギノ角ゴ Pro W3" pitchFamily="-126" charset="-128"/>
-                  <a:cs typeface="Calibri" panose="020F0502020204030204" pitchFamily="34" charset="0"/>
-                </a:rPr>
-                <a:t>Pre-populate Form</a:t>
-              </a:r>
-            </a:p>
-          </p:txBody>
-        </p:sp>
-      </p:grpSp>
-      <p:grpSp>
-        <p:nvGrpSpPr>
-          <p:cNvPr id="62" name="Group 61">
-            <a:extLst>
-              <a:ext uri="{FF2B5EF4-FFF2-40B4-BE49-F238E27FC236}">
-                <a16:creationId xmlns:a16="http://schemas.microsoft.com/office/drawing/2014/main" id="{E564B5EB-BB9D-0E2B-9893-DA7BDDEE4DE6}"/>
-              </a:ext>
-            </a:extLst>
-          </p:cNvPr>
-          <p:cNvGrpSpPr/>
-          <p:nvPr/>
-        </p:nvGrpSpPr>
-        <p:grpSpPr>
-          <a:xfrm>
-            <a:off x="2925348" y="4621645"/>
-            <a:ext cx="2852029" cy="217111"/>
-            <a:chOff x="2041915" y="3623359"/>
-            <a:chExt cx="2139022" cy="162833"/>
-          </a:xfrm>
-        </p:grpSpPr>
-        <p:sp>
-          <p:nvSpPr>
-            <p:cNvPr id="63" name="TextBox 62">
-              <a:extLst>
-                <a:ext uri="{FF2B5EF4-FFF2-40B4-BE49-F238E27FC236}">
-                  <a16:creationId xmlns:a16="http://schemas.microsoft.com/office/drawing/2014/main" id="{C7D51CA9-1FDA-0952-39A9-246C7466FD0A}"/>
-                </a:ext>
-              </a:extLst>
-            </p:cNvPr>
-            <p:cNvSpPr txBox="1"/>
-            <p:nvPr/>
-          </p:nvSpPr>
-          <p:spPr>
-            <a:xfrm>
-              <a:off x="2290370" y="3623359"/>
-              <a:ext cx="1615472" cy="162833"/>
-            </a:xfrm>
-            <a:prstGeom prst="rect">
-              <a:avLst/>
-            </a:prstGeom>
-            <a:solidFill>
-              <a:schemeClr val="bg1"/>
-            </a:solidFill>
-          </p:spPr>
-          <p:txBody>
-            <a:bodyPr wrap="square" lIns="0" tIns="0" rIns="0" bIns="48768">
-              <a:spAutoFit/>
-            </a:bodyPr>
-            <a:lstStyle/>
-            <a:p>
-              <a:pPr algn="ctr" defTabSz="1219170">
-                <a:defRPr/>
-              </a:pPr>
-              <a:r>
-                <a:rPr lang="en-US" sz="1091" kern="0" dirty="0">
-                  <a:solidFill>
-                    <a:prstClr val="black">
-                      <a:lumMod val="75000"/>
-                      <a:lumOff val="25000"/>
-                    </a:prstClr>
-                  </a:solidFill>
-                  <a:latin typeface="Calibri" panose="020F0502020204030204" pitchFamily="34" charset="0"/>
-                  <a:ea typeface="ヒラギノ角ゴ Pro W3" pitchFamily="-126" charset="-128"/>
-                  <a:cs typeface="Calibri" panose="020F0502020204030204" pitchFamily="34" charset="0"/>
-                </a:rPr>
-                <a:t>Collect missing information or review</a:t>
-              </a:r>
-            </a:p>
-          </p:txBody>
-        </p:sp>
-        <p:cxnSp>
-          <p:nvCxnSpPr>
-            <p:cNvPr id="64" name="Straight Arrow Connector 63">
-              <a:extLst>
-                <a:ext uri="{FF2B5EF4-FFF2-40B4-BE49-F238E27FC236}">
-                  <a16:creationId xmlns:a16="http://schemas.microsoft.com/office/drawing/2014/main" id="{53BDAFDB-E817-F504-4743-F674B7FD2D1D}"/>
-                </a:ext>
-              </a:extLst>
-            </p:cNvPr>
-            <p:cNvCxnSpPr>
-              <a:cxnSpLocks/>
-            </p:cNvCxnSpPr>
-            <p:nvPr/>
-          </p:nvCxnSpPr>
-          <p:spPr>
-            <a:xfrm flipH="1">
-              <a:off x="2041915" y="3759381"/>
-              <a:ext cx="2139022" cy="0"/>
-            </a:xfrm>
-            <a:prstGeom prst="straightConnector1">
-              <a:avLst/>
-            </a:prstGeom>
-            <a:noFill/>
-            <a:ln w="6350" cap="flat" cmpd="sng" algn="ctr">
-              <a:solidFill>
-                <a:srgbClr val="000000">
-                  <a:lumMod val="50000"/>
-                  <a:lumOff val="50000"/>
-                </a:srgbClr>
-              </a:solidFill>
-              <a:prstDash val="dash"/>
-              <a:miter lim="800000"/>
-              <a:headEnd type="triangle"/>
-              <a:tailEnd type="triangle"/>
-            </a:ln>
-            <a:effectLst/>
-          </p:spPr>
-        </p:cxnSp>
-      </p:grpSp>
-      <p:grpSp>
-        <p:nvGrpSpPr>
-          <p:cNvPr id="65" name="Group 64">
-            <a:extLst>
-              <a:ext uri="{FF2B5EF4-FFF2-40B4-BE49-F238E27FC236}">
-                <a16:creationId xmlns:a16="http://schemas.microsoft.com/office/drawing/2014/main" id="{44E94201-7C89-8BF2-F7D0-ADB688EA1FC3}"/>
-              </a:ext>
-            </a:extLst>
-          </p:cNvPr>
-          <p:cNvGrpSpPr/>
-          <p:nvPr/>
-        </p:nvGrpSpPr>
-        <p:grpSpPr>
-          <a:xfrm>
-            <a:off x="5878127" y="3811319"/>
-            <a:ext cx="2487168" cy="175721"/>
-            <a:chOff x="4440790" y="3037329"/>
-            <a:chExt cx="1865376" cy="131791"/>
-          </a:xfrm>
-        </p:grpSpPr>
-        <p:cxnSp>
-          <p:nvCxnSpPr>
-            <p:cNvPr id="66" name="Straight Arrow Connector 65">
-              <a:extLst>
-                <a:ext uri="{FF2B5EF4-FFF2-40B4-BE49-F238E27FC236}">
-                  <a16:creationId xmlns:a16="http://schemas.microsoft.com/office/drawing/2014/main" id="{31368D8D-BB4B-D1FA-7BA2-207A28F569EF}"/>
-                </a:ext>
-              </a:extLst>
-            </p:cNvPr>
-            <p:cNvCxnSpPr>
-              <a:cxnSpLocks/>
-            </p:cNvCxnSpPr>
-            <p:nvPr/>
-          </p:nvCxnSpPr>
-          <p:spPr>
-            <a:xfrm flipH="1">
-              <a:off x="4440790" y="3169120"/>
-              <a:ext cx="1865376" cy="0"/>
-            </a:xfrm>
-            <a:prstGeom prst="straightConnector1">
-              <a:avLst/>
-            </a:prstGeom>
-            <a:noFill/>
-            <a:ln w="6350" cap="flat" cmpd="sng" algn="ctr">
-              <a:solidFill>
-                <a:srgbClr val="000000"/>
-              </a:solidFill>
-              <a:prstDash val="solid"/>
-              <a:miter lim="800000"/>
-              <a:tailEnd type="triangle"/>
-            </a:ln>
-            <a:effectLst/>
-          </p:spPr>
-        </p:cxnSp>
-        <p:sp>
-          <p:nvSpPr>
-            <p:cNvPr id="67" name="TextBox 66">
-              <a:extLst>
-                <a:ext uri="{FF2B5EF4-FFF2-40B4-BE49-F238E27FC236}">
-                  <a16:creationId xmlns:a16="http://schemas.microsoft.com/office/drawing/2014/main" id="{0EE0BDF8-9F00-966A-F91B-339CDDC8A160}"/>
-                </a:ext>
-              </a:extLst>
-            </p:cNvPr>
-            <p:cNvSpPr txBox="1"/>
-            <p:nvPr/>
-          </p:nvSpPr>
-          <p:spPr>
-            <a:xfrm>
-              <a:off x="4637631" y="3037329"/>
-              <a:ext cx="1418501" cy="125900"/>
-            </a:xfrm>
-            <a:prstGeom prst="rect">
-              <a:avLst/>
-            </a:prstGeom>
-            <a:noFill/>
-          </p:spPr>
-          <p:txBody>
-            <a:bodyPr wrap="square" lIns="0" tIns="0" rIns="0" bIns="0">
-              <a:spAutoFit/>
-            </a:bodyPr>
-            <a:lstStyle/>
-            <a:p>
-              <a:pPr algn="ctr" defTabSz="609585" fontAlgn="base">
-                <a:spcBef>
-                  <a:spcPct val="0"/>
-                </a:spcBef>
-                <a:spcAft>
-                  <a:spcPct val="0"/>
-                </a:spcAft>
-              </a:pPr>
-              <a:r>
-                <a:rPr lang="en-US" sz="1091" dirty="0">
-                  <a:solidFill>
-                    <a:srgbClr val="000000"/>
-                  </a:solidFill>
-                  <a:latin typeface="Calibri" panose="020F0502020204030204" pitchFamily="34" charset="0"/>
-                  <a:ea typeface="ヒラギノ角ゴ Pro W3" pitchFamily="-126" charset="-128"/>
-                  <a:cs typeface="Calibri" panose="020F0502020204030204" pitchFamily="34" charset="0"/>
-                </a:rPr>
-                <a:t>Return Questionnaire Package</a:t>
-              </a:r>
-            </a:p>
-          </p:txBody>
-        </p:sp>
-      </p:grpSp>
-      <p:grpSp>
-        <p:nvGrpSpPr>
-          <p:cNvPr id="68" name="Group 67">
-            <a:extLst>
-              <a:ext uri="{FF2B5EF4-FFF2-40B4-BE49-F238E27FC236}">
-                <a16:creationId xmlns:a16="http://schemas.microsoft.com/office/drawing/2014/main" id="{4A533AFE-6A7A-115C-0EE9-FF88F98A0C8B}"/>
-              </a:ext>
-            </a:extLst>
-          </p:cNvPr>
-          <p:cNvGrpSpPr/>
-          <p:nvPr/>
-        </p:nvGrpSpPr>
-        <p:grpSpPr>
-          <a:xfrm>
-            <a:off x="4374088" y="5396999"/>
-            <a:ext cx="1413532" cy="400545"/>
-            <a:chOff x="3128470" y="4045939"/>
-            <a:chExt cx="1060149" cy="300409"/>
-          </a:xfrm>
-        </p:grpSpPr>
-        <p:cxnSp>
-          <p:nvCxnSpPr>
-            <p:cNvPr id="69" name="Straight Arrow Connector 68">
-              <a:extLst>
-                <a:ext uri="{FF2B5EF4-FFF2-40B4-BE49-F238E27FC236}">
-                  <a16:creationId xmlns:a16="http://schemas.microsoft.com/office/drawing/2014/main" id="{2E842205-F63C-F372-9A7B-BBD32E1900EA}"/>
-                </a:ext>
-              </a:extLst>
-            </p:cNvPr>
-            <p:cNvCxnSpPr>
-              <a:cxnSpLocks/>
-            </p:cNvCxnSpPr>
-            <p:nvPr/>
-          </p:nvCxnSpPr>
-          <p:spPr>
-            <a:xfrm>
-              <a:off x="3128470" y="4346348"/>
-              <a:ext cx="1042416" cy="0"/>
-            </a:xfrm>
-            <a:prstGeom prst="straightConnector1">
-              <a:avLst/>
-            </a:prstGeom>
-            <a:noFill/>
-            <a:ln w="6350" cap="flat" cmpd="sng" algn="ctr">
-              <a:solidFill>
-                <a:srgbClr val="000000"/>
-              </a:solidFill>
-              <a:prstDash val="solid"/>
-              <a:miter lim="800000"/>
-              <a:headEnd type="triangle"/>
-              <a:tailEnd type="none"/>
-            </a:ln>
-            <a:effectLst/>
-          </p:spPr>
-        </p:cxnSp>
-        <p:sp>
-          <p:nvSpPr>
-            <p:cNvPr id="70" name="TextBox 69">
-              <a:extLst>
-                <a:ext uri="{FF2B5EF4-FFF2-40B4-BE49-F238E27FC236}">
-                  <a16:creationId xmlns:a16="http://schemas.microsoft.com/office/drawing/2014/main" id="{C6809F44-C30D-D707-E2B2-F68FC8FA491B}"/>
-                </a:ext>
-              </a:extLst>
-            </p:cNvPr>
-            <p:cNvSpPr txBox="1"/>
-            <p:nvPr/>
-          </p:nvSpPr>
-          <p:spPr>
-            <a:xfrm>
-              <a:off x="3132188" y="4045939"/>
-              <a:ext cx="1056431" cy="251800"/>
-            </a:xfrm>
-            <a:prstGeom prst="rect">
-              <a:avLst/>
-            </a:prstGeom>
-            <a:solidFill>
-              <a:srgbClr val="FFFFFF"/>
-            </a:solidFill>
-          </p:spPr>
-          <p:txBody>
-            <a:bodyPr wrap="square" lIns="0" tIns="0" rIns="0" bIns="0">
-              <a:spAutoFit/>
-            </a:bodyPr>
-            <a:lstStyle/>
-            <a:p>
-              <a:pPr algn="ctr" defTabSz="1219170">
-                <a:defRPr/>
-              </a:pPr>
-              <a:r>
-                <a:rPr lang="en-US" sz="1091" kern="0" dirty="0">
-                  <a:solidFill>
-                    <a:srgbClr val="000000"/>
-                  </a:solidFill>
-                  <a:latin typeface="Calibri" panose="020F0502020204030204" pitchFamily="34" charset="0"/>
-                  <a:ea typeface="ヒラギノ角ゴ Pro W3" pitchFamily="-126" charset="-128"/>
-                  <a:cs typeface="Calibri" panose="020F0502020204030204" pitchFamily="34" charset="0"/>
-                </a:rPr>
-                <a:t>Save Completed QuestionnaireResponse</a:t>
-              </a:r>
-            </a:p>
-          </p:txBody>
-        </p:sp>
-      </p:grpSp>
-      <p:grpSp>
-        <p:nvGrpSpPr>
-          <p:cNvPr id="71" name="Group 70">
-            <a:extLst>
-              <a:ext uri="{FF2B5EF4-FFF2-40B4-BE49-F238E27FC236}">
-                <a16:creationId xmlns:a16="http://schemas.microsoft.com/office/drawing/2014/main" id="{F63F94B5-5EEB-A0E8-C780-B3ECD7F833E8}"/>
-              </a:ext>
-            </a:extLst>
-          </p:cNvPr>
-          <p:cNvGrpSpPr/>
-          <p:nvPr/>
-        </p:nvGrpSpPr>
-        <p:grpSpPr>
-          <a:xfrm>
-            <a:off x="5878127" y="5220982"/>
-            <a:ext cx="2487168" cy="184647"/>
-            <a:chOff x="4440790" y="4115391"/>
-            <a:chExt cx="1865376" cy="138485"/>
-          </a:xfrm>
-        </p:grpSpPr>
-        <p:sp>
-          <p:nvSpPr>
-            <p:cNvPr id="72" name="TextBox 71">
-              <a:extLst>
-                <a:ext uri="{FF2B5EF4-FFF2-40B4-BE49-F238E27FC236}">
-                  <a16:creationId xmlns:a16="http://schemas.microsoft.com/office/drawing/2014/main" id="{D859DF29-60BE-3B9C-778A-972D680D44C1}"/>
-                </a:ext>
-              </a:extLst>
-            </p:cNvPr>
-            <p:cNvSpPr txBox="1"/>
-            <p:nvPr/>
-          </p:nvSpPr>
-          <p:spPr>
-            <a:xfrm>
-              <a:off x="4617438" y="4115391"/>
-              <a:ext cx="1341129" cy="125900"/>
-            </a:xfrm>
-            <a:prstGeom prst="rect">
-              <a:avLst/>
-            </a:prstGeom>
-            <a:noFill/>
-          </p:spPr>
-          <p:txBody>
-            <a:bodyPr wrap="square" lIns="0" tIns="0" rIns="0" bIns="0">
-              <a:spAutoFit/>
-            </a:bodyPr>
-            <a:lstStyle/>
-            <a:p>
-              <a:pPr algn="ctr" defTabSz="609585" fontAlgn="base">
-                <a:spcBef>
-                  <a:spcPct val="0"/>
-                </a:spcBef>
-                <a:spcAft>
-                  <a:spcPct val="0"/>
-                </a:spcAft>
-              </a:pPr>
-              <a:r>
-                <a:rPr lang="en-US" sz="1091" dirty="0">
-                  <a:solidFill>
-                    <a:prstClr val="black"/>
-                  </a:solidFill>
-                  <a:latin typeface="Calibri" panose="020F0502020204030204" pitchFamily="34" charset="0"/>
-                  <a:ea typeface="ヒラギノ角ゴ Pro W3" pitchFamily="-126" charset="-128"/>
-                  <a:cs typeface="Calibri" panose="020F0502020204030204" pitchFamily="34" charset="0"/>
-                </a:rPr>
-                <a:t>Return QuestionnaireResponse</a:t>
-              </a:r>
-            </a:p>
-          </p:txBody>
-        </p:sp>
-        <p:cxnSp>
-          <p:nvCxnSpPr>
-            <p:cNvPr id="73" name="Straight Arrow Connector 72">
-              <a:extLst>
-                <a:ext uri="{FF2B5EF4-FFF2-40B4-BE49-F238E27FC236}">
-                  <a16:creationId xmlns:a16="http://schemas.microsoft.com/office/drawing/2014/main" id="{BF4A4C8A-23EE-9F38-E025-690D424B5F5B}"/>
-                </a:ext>
-              </a:extLst>
-            </p:cNvPr>
-            <p:cNvCxnSpPr>
-              <a:cxnSpLocks/>
-            </p:cNvCxnSpPr>
-            <p:nvPr/>
-          </p:nvCxnSpPr>
-          <p:spPr>
-            <a:xfrm flipH="1">
-              <a:off x="4440790" y="4253876"/>
-              <a:ext cx="1865376" cy="0"/>
-            </a:xfrm>
-            <a:prstGeom prst="straightConnector1">
-              <a:avLst/>
-            </a:prstGeom>
-            <a:noFill/>
-            <a:ln w="6350" cap="flat" cmpd="sng" algn="ctr">
-              <a:solidFill>
-                <a:schemeClr val="tx1"/>
-              </a:solidFill>
-              <a:prstDash val="solid"/>
-              <a:miter lim="800000"/>
-              <a:tailEnd type="triangle"/>
-            </a:ln>
-            <a:effectLst/>
-          </p:spPr>
-        </p:cxnSp>
-      </p:grpSp>
-      <p:sp>
-        <p:nvSpPr>
-          <p:cNvPr id="74" name="TextBox 73">
-            <a:extLst>
-              <a:ext uri="{FF2B5EF4-FFF2-40B4-BE49-F238E27FC236}">
-                <a16:creationId xmlns:a16="http://schemas.microsoft.com/office/drawing/2014/main" id="{8194D0AA-E94A-593A-D950-618C878B3DB8}"/>
-              </a:ext>
-            </a:extLst>
-          </p:cNvPr>
-          <p:cNvSpPr txBox="1"/>
-          <p:nvPr/>
-        </p:nvSpPr>
-        <p:spPr>
-          <a:xfrm>
-            <a:off x="7142145" y="4280598"/>
-            <a:ext cx="1168804" cy="143565"/>
-          </a:xfrm>
-          <a:prstGeom prst="rect">
-            <a:avLst/>
-          </a:prstGeom>
-          <a:noFill/>
-        </p:spPr>
-        <p:txBody>
-          <a:bodyPr wrap="square" lIns="0" tIns="0" rIns="0" bIns="0">
-            <a:spAutoFit/>
-          </a:bodyPr>
-          <a:lstStyle/>
-          <a:p>
-            <a:pPr algn="ctr" defTabSz="609585" fontAlgn="base">
-              <a:spcBef>
-                <a:spcPct val="0"/>
-              </a:spcBef>
-            </a:pPr>
-            <a:r>
-              <a:rPr lang="en-US" sz="933" b="1" dirty="0">
-                <a:solidFill>
-                  <a:srgbClr val="1F497D">
-                    <a:lumMod val="75000"/>
-                  </a:srgbClr>
-                </a:solidFill>
-                <a:latin typeface="Calibri" panose="020F0502020204030204" pitchFamily="34" charset="0"/>
-                <a:ea typeface="ヒラギノ角ゴ Pro W3" pitchFamily="-126" charset="-128"/>
-                <a:cs typeface="Calibri" panose="020F0502020204030204" pitchFamily="34" charset="0"/>
-              </a:rPr>
-              <a:t>Adaptive Forms</a:t>
-            </a:r>
-          </a:p>
-        </p:txBody>
-      </p:sp>
-      <p:grpSp>
-        <p:nvGrpSpPr>
-          <p:cNvPr id="75" name="Group 74">
-            <a:extLst>
-              <a:ext uri="{FF2B5EF4-FFF2-40B4-BE49-F238E27FC236}">
-                <a16:creationId xmlns:a16="http://schemas.microsoft.com/office/drawing/2014/main" id="{AE4104C0-BFB4-5075-3D41-CDA921AF4E5F}"/>
-              </a:ext>
-            </a:extLst>
-          </p:cNvPr>
-          <p:cNvGrpSpPr/>
-          <p:nvPr/>
-        </p:nvGrpSpPr>
-        <p:grpSpPr>
-          <a:xfrm>
-            <a:off x="5881293" y="3338054"/>
-            <a:ext cx="2487168" cy="351695"/>
-            <a:chOff x="4443164" y="2710724"/>
-            <a:chExt cx="1865376" cy="263771"/>
-          </a:xfrm>
-        </p:grpSpPr>
-        <p:sp>
-          <p:nvSpPr>
-            <p:cNvPr id="76" name="TextBox 75">
-              <a:extLst>
-                <a:ext uri="{FF2B5EF4-FFF2-40B4-BE49-F238E27FC236}">
-                  <a16:creationId xmlns:a16="http://schemas.microsoft.com/office/drawing/2014/main" id="{D956A913-318E-6DF8-1613-765F98C6E2F3}"/>
-                </a:ext>
-              </a:extLst>
-            </p:cNvPr>
-            <p:cNvSpPr txBox="1"/>
-            <p:nvPr/>
-          </p:nvSpPr>
-          <p:spPr>
-            <a:xfrm>
-              <a:off x="4637631" y="2710724"/>
-              <a:ext cx="1418501" cy="125900"/>
-            </a:xfrm>
-            <a:prstGeom prst="rect">
-              <a:avLst/>
-            </a:prstGeom>
-            <a:noFill/>
-          </p:spPr>
-          <p:txBody>
-            <a:bodyPr wrap="square" lIns="0" tIns="0" rIns="0" bIns="0">
-              <a:spAutoFit/>
-            </a:bodyPr>
-            <a:lstStyle/>
-            <a:p>
-              <a:pPr algn="ctr" defTabSz="609585" fontAlgn="base">
-                <a:spcBef>
-                  <a:spcPct val="0"/>
-                </a:spcBef>
-                <a:spcAft>
-                  <a:spcPct val="0"/>
-                </a:spcAft>
-              </a:pPr>
-              <a:r>
-                <a:rPr lang="en-US" sz="1091" dirty="0">
-                  <a:solidFill>
-                    <a:srgbClr val="000000"/>
-                  </a:solidFill>
-                  <a:latin typeface="Calibri" panose="020F0502020204030204" pitchFamily="34" charset="0"/>
-                  <a:ea typeface="ヒラギノ角ゴ Pro W3" pitchFamily="-126" charset="-128"/>
-                  <a:cs typeface="Calibri" panose="020F0502020204030204" pitchFamily="34" charset="0"/>
-                </a:rPr>
-                <a:t>Request Questionnaire Package</a:t>
-              </a:r>
-            </a:p>
-          </p:txBody>
-        </p:sp>
-        <p:sp>
-          <p:nvSpPr>
-            <p:cNvPr id="77" name="TextBox 76">
-              <a:extLst>
-                <a:ext uri="{FF2B5EF4-FFF2-40B4-BE49-F238E27FC236}">
-                  <a16:creationId xmlns:a16="http://schemas.microsoft.com/office/drawing/2014/main" id="{83354926-9B34-4050-129E-A1AAECE245F8}"/>
-                </a:ext>
-              </a:extLst>
-            </p:cNvPr>
-            <p:cNvSpPr txBox="1"/>
-            <p:nvPr/>
-          </p:nvSpPr>
-          <p:spPr>
-            <a:xfrm>
-              <a:off x="4530120" y="2851336"/>
-              <a:ext cx="1633523" cy="123159"/>
-            </a:xfrm>
-            <a:prstGeom prst="rect">
-              <a:avLst/>
-            </a:prstGeom>
-            <a:noFill/>
-          </p:spPr>
-          <p:txBody>
-            <a:bodyPr wrap="square" lIns="0" tIns="0" rIns="0" bIns="0">
-              <a:spAutoFit/>
-            </a:bodyPr>
-            <a:lstStyle/>
-            <a:p>
-              <a:pPr algn="ctr" defTabSz="609585" fontAlgn="base">
-                <a:spcBef>
-                  <a:spcPct val="0"/>
-                </a:spcBef>
-                <a:spcAft>
-                  <a:spcPct val="0"/>
-                </a:spcAft>
-              </a:pPr>
-              <a:r>
-                <a:rPr lang="en-US" sz="1067" dirty="0">
-                  <a:solidFill>
-                    <a:prstClr val="black"/>
-                  </a:solidFill>
-                  <a:latin typeface="Calibri" panose="020F0502020204030204" pitchFamily="34" charset="0"/>
-                  <a:ea typeface="ヒラギノ角ゴ Pro W3" pitchFamily="-126" charset="-128"/>
-                  <a:cs typeface="Calibri" panose="020F0502020204030204" pitchFamily="34" charset="0"/>
-                </a:rPr>
-                <a:t>(</a:t>
-              </a:r>
-              <a:r>
-                <a:rPr lang="en-US" sz="933" dirty="0">
-                  <a:solidFill>
-                    <a:srgbClr val="167FAC">
-                      <a:lumMod val="50000"/>
-                    </a:srgbClr>
-                  </a:solidFill>
-                  <a:latin typeface="Consolas" panose="020B0609020204030204" pitchFamily="49" charset="0"/>
-                  <a:ea typeface="ヒラギノ角ゴ Pro W3" pitchFamily="-126" charset="-128"/>
-                  <a:cs typeface="Calibri" panose="020F0502020204030204" pitchFamily="34" charset="0"/>
-                </a:rPr>
-                <a:t>$questionnaire-package</a:t>
-              </a:r>
-              <a:r>
-                <a:rPr lang="en-US" sz="667" dirty="0">
-                  <a:solidFill>
-                    <a:srgbClr val="167FAC">
-                      <a:lumMod val="50000"/>
-                    </a:srgbClr>
-                  </a:solidFill>
-                  <a:latin typeface="Consolas" panose="020B0609020204030204" pitchFamily="49" charset="0"/>
-                  <a:ea typeface="ヒラギノ角ゴ Pro W3" pitchFamily="-126" charset="-128"/>
-                  <a:cs typeface="Calibri" panose="020F0502020204030204" pitchFamily="34" charset="0"/>
-                </a:rPr>
-                <a:t> </a:t>
-              </a:r>
-              <a:r>
-                <a:rPr lang="en-US" sz="1067" dirty="0">
-                  <a:solidFill>
-                    <a:prstClr val="black"/>
-                  </a:solidFill>
-                  <a:latin typeface="Calibri" panose="020F0502020204030204" pitchFamily="34" charset="0"/>
-                  <a:ea typeface="ヒラギノ角ゴ Pro W3" pitchFamily="-126" charset="-128"/>
-                  <a:cs typeface="Calibri" panose="020F0502020204030204" pitchFamily="34" charset="0"/>
-                </a:rPr>
-                <a:t>operation)</a:t>
-              </a:r>
-            </a:p>
-          </p:txBody>
-        </p:sp>
-        <p:cxnSp>
-          <p:nvCxnSpPr>
-            <p:cNvPr id="78" name="Straight Arrow Connector 77">
-              <a:extLst>
-                <a:ext uri="{FF2B5EF4-FFF2-40B4-BE49-F238E27FC236}">
-                  <a16:creationId xmlns:a16="http://schemas.microsoft.com/office/drawing/2014/main" id="{4C2150DE-4C4D-C56F-17F4-15C6E058D7A9}"/>
-                </a:ext>
-              </a:extLst>
-            </p:cNvPr>
-            <p:cNvCxnSpPr>
-              <a:cxnSpLocks/>
-            </p:cNvCxnSpPr>
-            <p:nvPr/>
-          </p:nvCxnSpPr>
-          <p:spPr>
-            <a:xfrm>
-              <a:off x="4443164" y="2846117"/>
-              <a:ext cx="1865376" cy="0"/>
-            </a:xfrm>
-            <a:prstGeom prst="straightConnector1">
-              <a:avLst/>
-            </a:prstGeom>
-            <a:noFill/>
-            <a:ln w="6350" cap="flat" cmpd="sng" algn="ctr">
-              <a:solidFill>
-                <a:srgbClr val="000000"/>
-              </a:solidFill>
-              <a:prstDash val="solid"/>
-              <a:miter lim="800000"/>
-              <a:tailEnd type="triangle"/>
-            </a:ln>
-            <a:effectLst/>
-          </p:spPr>
-        </p:cxnSp>
-      </p:grpSp>
-      <p:grpSp>
-        <p:nvGrpSpPr>
-          <p:cNvPr id="79" name="Group 78">
-            <a:extLst>
-              <a:ext uri="{FF2B5EF4-FFF2-40B4-BE49-F238E27FC236}">
-                <a16:creationId xmlns:a16="http://schemas.microsoft.com/office/drawing/2014/main" id="{B735B376-ED07-BE5B-A0D6-3C1CA0131564}"/>
-              </a:ext>
-            </a:extLst>
-          </p:cNvPr>
-          <p:cNvGrpSpPr/>
-          <p:nvPr/>
-        </p:nvGrpSpPr>
-        <p:grpSpPr>
-          <a:xfrm>
-            <a:off x="5881293" y="4792674"/>
-            <a:ext cx="2487168" cy="350723"/>
-            <a:chOff x="4443164" y="3787076"/>
-            <a:chExt cx="1865376" cy="263042"/>
-          </a:xfrm>
-        </p:grpSpPr>
-        <p:cxnSp>
-          <p:nvCxnSpPr>
-            <p:cNvPr id="80" name="Straight Arrow Connector 79">
-              <a:extLst>
-                <a:ext uri="{FF2B5EF4-FFF2-40B4-BE49-F238E27FC236}">
-                  <a16:creationId xmlns:a16="http://schemas.microsoft.com/office/drawing/2014/main" id="{3991C389-AC96-F45A-6CBA-4F4639C7631D}"/>
-                </a:ext>
-              </a:extLst>
-            </p:cNvPr>
-            <p:cNvCxnSpPr>
-              <a:cxnSpLocks/>
-            </p:cNvCxnSpPr>
-            <p:nvPr/>
-          </p:nvCxnSpPr>
-          <p:spPr>
-            <a:xfrm>
-              <a:off x="4443164" y="3921790"/>
-              <a:ext cx="1865376" cy="0"/>
-            </a:xfrm>
-            <a:prstGeom prst="straightConnector1">
-              <a:avLst/>
-            </a:prstGeom>
-            <a:noFill/>
-            <a:ln w="6350" cap="flat" cmpd="sng" algn="ctr">
-              <a:solidFill>
-                <a:schemeClr val="tx1"/>
-              </a:solidFill>
-              <a:prstDash val="solid"/>
-              <a:miter lim="800000"/>
-              <a:tailEnd type="triangle"/>
-            </a:ln>
-            <a:effectLst/>
-          </p:spPr>
-        </p:cxnSp>
-        <p:sp>
-          <p:nvSpPr>
-            <p:cNvPr id="81" name="TextBox 80">
-              <a:extLst>
-                <a:ext uri="{FF2B5EF4-FFF2-40B4-BE49-F238E27FC236}">
-                  <a16:creationId xmlns:a16="http://schemas.microsoft.com/office/drawing/2014/main" id="{E4084E9C-633F-CE9D-ACF2-5870B01E101F}"/>
-                </a:ext>
-              </a:extLst>
-            </p:cNvPr>
-            <p:cNvSpPr txBox="1"/>
-            <p:nvPr/>
-          </p:nvSpPr>
-          <p:spPr>
-            <a:xfrm>
-              <a:off x="4668666" y="3787076"/>
-              <a:ext cx="1238673" cy="125900"/>
-            </a:xfrm>
-            <a:prstGeom prst="rect">
-              <a:avLst/>
-            </a:prstGeom>
-            <a:noFill/>
-          </p:spPr>
-          <p:txBody>
-            <a:bodyPr wrap="square" lIns="0" tIns="0" rIns="0" bIns="0">
-              <a:spAutoFit/>
-            </a:bodyPr>
-            <a:lstStyle/>
-            <a:p>
-              <a:pPr algn="ctr" defTabSz="609585" fontAlgn="base">
-                <a:spcBef>
-                  <a:spcPct val="0"/>
-                </a:spcBef>
-                <a:spcAft>
-                  <a:spcPct val="0"/>
-                </a:spcAft>
-              </a:pPr>
-              <a:r>
-                <a:rPr lang="en-US" sz="1091" dirty="0">
-                  <a:solidFill>
-                    <a:prstClr val="black"/>
-                  </a:solidFill>
-                  <a:latin typeface="Calibri" panose="020F0502020204030204" pitchFamily="34" charset="0"/>
-                  <a:ea typeface="ヒラギノ角ゴ Pro W3" pitchFamily="-126" charset="-128"/>
-                  <a:cs typeface="Calibri" panose="020F0502020204030204" pitchFamily="34" charset="0"/>
-                </a:rPr>
-                <a:t>Call for Next Question</a:t>
-              </a:r>
-            </a:p>
-          </p:txBody>
-        </p:sp>
-        <p:sp>
-          <p:nvSpPr>
-            <p:cNvPr id="82" name="TextBox 81">
-              <a:extLst>
-                <a:ext uri="{FF2B5EF4-FFF2-40B4-BE49-F238E27FC236}">
-                  <a16:creationId xmlns:a16="http://schemas.microsoft.com/office/drawing/2014/main" id="{354E476A-7E52-FA63-2D06-8F0E444FA4EC}"/>
-                </a:ext>
-              </a:extLst>
-            </p:cNvPr>
-            <p:cNvSpPr txBox="1"/>
-            <p:nvPr/>
-          </p:nvSpPr>
-          <p:spPr>
-            <a:xfrm>
-              <a:off x="4589810" y="3926959"/>
-              <a:ext cx="1396385" cy="123159"/>
-            </a:xfrm>
-            <a:prstGeom prst="rect">
-              <a:avLst/>
-            </a:prstGeom>
-            <a:noFill/>
-          </p:spPr>
-          <p:txBody>
-            <a:bodyPr wrap="square" lIns="0" tIns="0" rIns="0" bIns="0">
-              <a:spAutoFit/>
-            </a:bodyPr>
-            <a:lstStyle/>
-            <a:p>
-              <a:pPr algn="ctr" defTabSz="609585" fontAlgn="base">
-                <a:spcBef>
-                  <a:spcPct val="0"/>
-                </a:spcBef>
-                <a:spcAft>
-                  <a:spcPct val="0"/>
-                </a:spcAft>
-              </a:pPr>
-              <a:r>
-                <a:rPr lang="en-US" sz="933" dirty="0">
-                  <a:solidFill>
-                    <a:prstClr val="black"/>
-                  </a:solidFill>
-                  <a:latin typeface="Consolas" panose="020B0609020204030204" pitchFamily="49" charset="0"/>
-                  <a:ea typeface="ヒラギノ角ゴ Pro W3" pitchFamily="-126" charset="-128"/>
-                  <a:cs typeface="Calibri" panose="020F0502020204030204" pitchFamily="34" charset="0"/>
-                </a:rPr>
-                <a:t>(</a:t>
-              </a:r>
-              <a:r>
-                <a:rPr lang="en-US" sz="933" dirty="0">
-                  <a:solidFill>
-                    <a:srgbClr val="167FAC">
-                      <a:lumMod val="50000"/>
-                    </a:srgbClr>
-                  </a:solidFill>
-                  <a:latin typeface="Consolas" panose="020B0609020204030204" pitchFamily="49" charset="0"/>
-                  <a:ea typeface="ヒラギノ角ゴ Pro W3" pitchFamily="-126" charset="-128"/>
-                  <a:cs typeface="Calibri" panose="020F0502020204030204" pitchFamily="34" charset="0"/>
-                </a:rPr>
-                <a:t>$next-question</a:t>
-              </a:r>
-              <a:r>
-                <a:rPr lang="en-US" sz="667" dirty="0">
-                  <a:solidFill>
-                    <a:srgbClr val="167FAC">
-                      <a:lumMod val="50000"/>
-                    </a:srgbClr>
-                  </a:solidFill>
-                  <a:latin typeface="Consolas" panose="020B0609020204030204" pitchFamily="49" charset="0"/>
-                  <a:ea typeface="ヒラギノ角ゴ Pro W3" pitchFamily="-126" charset="-128"/>
-                  <a:cs typeface="Calibri" panose="020F0502020204030204" pitchFamily="34" charset="0"/>
-                </a:rPr>
-                <a:t> </a:t>
-              </a:r>
-              <a:r>
-                <a:rPr lang="en-US" sz="1067" dirty="0">
-                  <a:solidFill>
-                    <a:prstClr val="black"/>
-                  </a:solidFill>
-                  <a:latin typeface="Calibri" panose="020F0502020204030204" pitchFamily="34" charset="0"/>
-                  <a:ea typeface="Calibri" panose="020F0502020204030204" pitchFamily="34" charset="0"/>
-                  <a:cs typeface="Calibri" panose="020F0502020204030204" pitchFamily="34" charset="0"/>
-                </a:rPr>
-                <a:t>operation</a:t>
-              </a:r>
-              <a:r>
-                <a:rPr lang="en-US" sz="933" dirty="0">
-                  <a:solidFill>
-                    <a:prstClr val="black"/>
-                  </a:solidFill>
-                  <a:latin typeface="Calibri" panose="020F0502020204030204" pitchFamily="34" charset="0"/>
-                  <a:ea typeface="Calibri" panose="020F0502020204030204" pitchFamily="34" charset="0"/>
-                  <a:cs typeface="Calibri" panose="020F0502020204030204" pitchFamily="34" charset="0"/>
-                </a:rPr>
-                <a:t>)</a:t>
-              </a:r>
-            </a:p>
-          </p:txBody>
-        </p:sp>
-      </p:grpSp>
-      <p:sp>
-        <p:nvSpPr>
-          <p:cNvPr id="83" name="Rectangle: Rounded Corners 82">
-            <a:extLst>
-              <a:ext uri="{FF2B5EF4-FFF2-40B4-BE49-F238E27FC236}">
-                <a16:creationId xmlns:a16="http://schemas.microsoft.com/office/drawing/2014/main" id="{EA1FEABB-D9A2-8D78-5360-E16ACACBC025}"/>
-              </a:ext>
-            </a:extLst>
-          </p:cNvPr>
-          <p:cNvSpPr/>
-          <p:nvPr/>
-        </p:nvSpPr>
-        <p:spPr>
-          <a:xfrm>
-            <a:off x="5777377" y="3304080"/>
-            <a:ext cx="78837" cy="2560320"/>
-          </a:xfrm>
-          <a:prstGeom prst="roundRect">
-            <a:avLst>
-              <a:gd name="adj" fmla="val 0"/>
-            </a:avLst>
-          </a:prstGeom>
-          <a:solidFill>
-            <a:srgbClr val="FFFFFF">
-              <a:lumMod val="95000"/>
-            </a:srgbClr>
-          </a:solidFill>
-          <a:ln w="9525" cap="flat" cmpd="sng" algn="ctr">
-            <a:solidFill>
-              <a:srgbClr val="FFFFFF">
-                <a:lumMod val="75000"/>
-              </a:srgbClr>
-            </a:solidFill>
-            <a:prstDash val="solid"/>
-            <a:miter lim="800000"/>
-          </a:ln>
-          <a:effectLst/>
-        </p:spPr>
-        <p:txBody>
-          <a:bodyPr lIns="0" rIns="0" rtlCol="0" anchor="ctr"/>
-          <a:lstStyle/>
-          <a:p>
-            <a:pPr algn="ctr" defTabSz="1219170">
-              <a:defRPr/>
-            </a:pPr>
-            <a:endParaRPr lang="en-US" sz="1091" kern="0" dirty="0">
-              <a:solidFill>
-                <a:srgbClr val="000000"/>
-              </a:solidFill>
-              <a:latin typeface="Calibri" panose="020F0502020204030204" pitchFamily="34" charset="0"/>
-              <a:ea typeface="ヒラギノ角ゴ Pro W3" pitchFamily="-126" charset="-128"/>
-              <a:cs typeface="Calibri" panose="020F0502020204030204" pitchFamily="34" charset="0"/>
-            </a:endParaRPr>
-          </a:p>
-        </p:txBody>
-      </p:sp>
-      <p:grpSp>
-        <p:nvGrpSpPr>
-          <p:cNvPr id="84" name="Group 83">
-            <a:extLst>
-              <a:ext uri="{FF2B5EF4-FFF2-40B4-BE49-F238E27FC236}">
-                <a16:creationId xmlns:a16="http://schemas.microsoft.com/office/drawing/2014/main" id="{D88A4E4C-1AF0-0B94-6873-A3CC3753C252}"/>
-              </a:ext>
-            </a:extLst>
-          </p:cNvPr>
-          <p:cNvGrpSpPr/>
-          <p:nvPr/>
-        </p:nvGrpSpPr>
-        <p:grpSpPr>
-          <a:xfrm>
-            <a:off x="8467166" y="3450385"/>
-            <a:ext cx="1341120" cy="343893"/>
-            <a:chOff x="6382569" y="2766624"/>
-            <a:chExt cx="1005840" cy="257920"/>
-          </a:xfrm>
-        </p:grpSpPr>
-        <p:cxnSp>
-          <p:nvCxnSpPr>
-            <p:cNvPr id="85" name="Straight Arrow Connector 84">
-              <a:extLst>
-                <a:ext uri="{FF2B5EF4-FFF2-40B4-BE49-F238E27FC236}">
-                  <a16:creationId xmlns:a16="http://schemas.microsoft.com/office/drawing/2014/main" id="{676A570E-E1DB-BE7B-C975-9C65F4047DA7}"/>
-                </a:ext>
-              </a:extLst>
-            </p:cNvPr>
-            <p:cNvCxnSpPr>
-              <a:cxnSpLocks/>
-            </p:cNvCxnSpPr>
-            <p:nvPr/>
-          </p:nvCxnSpPr>
-          <p:spPr>
-            <a:xfrm>
-              <a:off x="6382569" y="3024544"/>
-              <a:ext cx="1005840" cy="0"/>
-            </a:xfrm>
-            <a:prstGeom prst="straightConnector1">
-              <a:avLst/>
-            </a:prstGeom>
-            <a:noFill/>
-            <a:ln w="6350" cap="flat" cmpd="sng" algn="ctr">
-              <a:solidFill>
-                <a:srgbClr val="000000"/>
-              </a:solidFill>
-              <a:prstDash val="solid"/>
-              <a:miter lim="800000"/>
-              <a:headEnd type="triangle"/>
-              <a:tailEnd type="triangle"/>
-            </a:ln>
-            <a:effectLst/>
-          </p:spPr>
-        </p:cxnSp>
-        <p:sp>
-          <p:nvSpPr>
-            <p:cNvPr id="86" name="TextBox 85">
-              <a:extLst>
-                <a:ext uri="{FF2B5EF4-FFF2-40B4-BE49-F238E27FC236}">
-                  <a16:creationId xmlns:a16="http://schemas.microsoft.com/office/drawing/2014/main" id="{CE84A77F-B458-3601-AE4A-9ACB69602116}"/>
-                </a:ext>
-              </a:extLst>
-            </p:cNvPr>
-            <p:cNvSpPr txBox="1"/>
-            <p:nvPr/>
-          </p:nvSpPr>
-          <p:spPr>
-            <a:xfrm>
-              <a:off x="6534257" y="2766624"/>
-              <a:ext cx="714601" cy="251800"/>
-            </a:xfrm>
-            <a:prstGeom prst="rect">
-              <a:avLst/>
-            </a:prstGeom>
-            <a:noFill/>
-          </p:spPr>
-          <p:txBody>
-            <a:bodyPr wrap="square" lIns="0" tIns="0" rIns="0" bIns="0">
-              <a:spAutoFit/>
-            </a:bodyPr>
-            <a:lstStyle/>
-            <a:p>
-              <a:pPr algn="ctr" defTabSz="1219170">
-                <a:defRPr/>
-              </a:pPr>
-              <a:r>
-                <a:rPr lang="en-US" sz="1091" kern="0" dirty="0">
-                  <a:solidFill>
-                    <a:srgbClr val="000000"/>
-                  </a:solidFill>
-                  <a:latin typeface="Calibri" panose="020F0502020204030204" pitchFamily="34" charset="0"/>
-                  <a:ea typeface="ヒラギノ角ゴ Pro W3" pitchFamily="-126" charset="-128"/>
-                  <a:cs typeface="Calibri" panose="020F0502020204030204" pitchFamily="34" charset="0"/>
-                </a:rPr>
-                <a:t>Templates/Rules </a:t>
-              </a:r>
-            </a:p>
-            <a:p>
-              <a:pPr algn="ctr" defTabSz="1219170">
-                <a:defRPr/>
-              </a:pPr>
-              <a:r>
-                <a:rPr lang="en-US" sz="1091" kern="0" dirty="0">
-                  <a:solidFill>
-                    <a:srgbClr val="000000"/>
-                  </a:solidFill>
-                  <a:latin typeface="Calibri" panose="020F0502020204030204" pitchFamily="34" charset="0"/>
-                  <a:ea typeface="ヒラギノ角ゴ Pro W3" pitchFamily="-126" charset="-128"/>
-                  <a:cs typeface="Calibri" panose="020F0502020204030204" pitchFamily="34" charset="0"/>
-                </a:rPr>
-                <a:t>Processing</a:t>
-              </a:r>
-            </a:p>
-          </p:txBody>
-        </p:sp>
-      </p:grpSp>
-      <p:sp>
-        <p:nvSpPr>
-          <p:cNvPr id="87" name="TextBox 86">
-            <a:extLst>
-              <a:ext uri="{FF2B5EF4-FFF2-40B4-BE49-F238E27FC236}">
-                <a16:creationId xmlns:a16="http://schemas.microsoft.com/office/drawing/2014/main" id="{A196A657-72C1-D60B-51ED-D554432400BA}"/>
-              </a:ext>
-            </a:extLst>
-          </p:cNvPr>
-          <p:cNvSpPr txBox="1"/>
-          <p:nvPr/>
-        </p:nvSpPr>
-        <p:spPr>
-          <a:xfrm>
-            <a:off x="2291357" y="1261970"/>
-            <a:ext cx="4068021" cy="260199"/>
-          </a:xfrm>
-          <a:prstGeom prst="rect">
-            <a:avLst/>
-          </a:prstGeom>
-          <a:noFill/>
-        </p:spPr>
-        <p:txBody>
-          <a:bodyPr wrap="square">
-            <a:spAutoFit/>
-          </a:bodyPr>
-          <a:lstStyle/>
-          <a:p>
-            <a:pPr algn="ctr" defTabSz="609585" fontAlgn="base">
-              <a:spcBef>
-                <a:spcPct val="0"/>
-              </a:spcBef>
-              <a:spcAft>
-                <a:spcPct val="0"/>
-              </a:spcAft>
-            </a:pPr>
-            <a:r>
-              <a:rPr lang="en-US" sz="1091" b="1" kern="0" dirty="0">
-                <a:solidFill>
-                  <a:srgbClr val="000000"/>
-                </a:solidFill>
-                <a:latin typeface="Calibri" panose="020F0502020204030204" pitchFamily="34" charset="0"/>
-                <a:ea typeface="ヒラギノ角ゴ Pro W3" pitchFamily="-126" charset="-128"/>
-                <a:cs typeface="Calibri" panose="020F0502020204030204" pitchFamily="34" charset="0"/>
-              </a:rPr>
-              <a:t>Provider System</a:t>
-            </a:r>
-          </a:p>
-        </p:txBody>
-      </p:sp>
-      <p:grpSp>
-        <p:nvGrpSpPr>
-          <p:cNvPr id="88" name="Group 87">
-            <a:extLst>
-              <a:ext uri="{FF2B5EF4-FFF2-40B4-BE49-F238E27FC236}">
-                <a16:creationId xmlns:a16="http://schemas.microsoft.com/office/drawing/2014/main" id="{611EC106-A00A-DD06-7A46-775B927B1289}"/>
-              </a:ext>
-            </a:extLst>
-          </p:cNvPr>
-          <p:cNvGrpSpPr/>
-          <p:nvPr/>
-        </p:nvGrpSpPr>
-        <p:grpSpPr>
-          <a:xfrm>
-            <a:off x="8486930" y="4842614"/>
-            <a:ext cx="1341120" cy="345026"/>
-            <a:chOff x="6397392" y="3824539"/>
-            <a:chExt cx="1005840" cy="258770"/>
-          </a:xfrm>
-        </p:grpSpPr>
-        <p:cxnSp>
-          <p:nvCxnSpPr>
-            <p:cNvPr id="89" name="Straight Arrow Connector 88">
-              <a:extLst>
-                <a:ext uri="{FF2B5EF4-FFF2-40B4-BE49-F238E27FC236}">
-                  <a16:creationId xmlns:a16="http://schemas.microsoft.com/office/drawing/2014/main" id="{E18A3B80-86A2-1E50-E78C-E44122AA633A}"/>
-                </a:ext>
-              </a:extLst>
-            </p:cNvPr>
-            <p:cNvCxnSpPr>
-              <a:cxnSpLocks/>
-            </p:cNvCxnSpPr>
-            <p:nvPr/>
-          </p:nvCxnSpPr>
-          <p:spPr>
-            <a:xfrm>
-              <a:off x="6397392" y="4083309"/>
-              <a:ext cx="1005840" cy="0"/>
-            </a:xfrm>
-            <a:prstGeom prst="straightConnector1">
-              <a:avLst/>
-            </a:prstGeom>
-            <a:noFill/>
-            <a:ln w="6350" cap="flat" cmpd="sng" algn="ctr">
-              <a:solidFill>
-                <a:srgbClr val="000000"/>
-              </a:solidFill>
-              <a:prstDash val="solid"/>
-              <a:miter lim="800000"/>
-              <a:headEnd type="triangle"/>
-              <a:tailEnd type="triangle"/>
-            </a:ln>
-            <a:effectLst/>
-          </p:spPr>
-        </p:cxnSp>
-        <p:sp>
-          <p:nvSpPr>
-            <p:cNvPr id="90" name="TextBox 89">
-              <a:extLst>
-                <a:ext uri="{FF2B5EF4-FFF2-40B4-BE49-F238E27FC236}">
-                  <a16:creationId xmlns:a16="http://schemas.microsoft.com/office/drawing/2014/main" id="{D1B22935-A42C-7314-4BD0-FBED73007563}"/>
-                </a:ext>
-              </a:extLst>
-            </p:cNvPr>
-            <p:cNvSpPr txBox="1"/>
-            <p:nvPr/>
-          </p:nvSpPr>
-          <p:spPr>
-            <a:xfrm>
-              <a:off x="6534257" y="3824539"/>
-              <a:ext cx="714601" cy="251800"/>
-            </a:xfrm>
-            <a:prstGeom prst="rect">
-              <a:avLst/>
-            </a:prstGeom>
-            <a:noFill/>
-          </p:spPr>
-          <p:txBody>
-            <a:bodyPr wrap="square" lIns="0" tIns="0" rIns="0" bIns="0">
-              <a:spAutoFit/>
-            </a:bodyPr>
-            <a:lstStyle/>
-            <a:p>
-              <a:pPr algn="ctr" defTabSz="1219170">
-                <a:defRPr/>
-              </a:pPr>
-              <a:r>
-                <a:rPr lang="en-US" sz="1091" kern="0" dirty="0">
-                  <a:solidFill>
-                    <a:srgbClr val="000000"/>
-                  </a:solidFill>
-                  <a:latin typeface="Calibri" panose="020F0502020204030204" pitchFamily="34" charset="0"/>
-                  <a:ea typeface="ヒラギノ角ゴ Pro W3" pitchFamily="-126" charset="-128"/>
-                  <a:cs typeface="Calibri" panose="020F0502020204030204" pitchFamily="34" charset="0"/>
-                </a:rPr>
-                <a:t>Templates/Rules </a:t>
-              </a:r>
-            </a:p>
-            <a:p>
-              <a:pPr algn="ctr" defTabSz="1219170">
-                <a:defRPr/>
-              </a:pPr>
-              <a:r>
-                <a:rPr lang="en-US" sz="1091" kern="0" dirty="0">
-                  <a:solidFill>
-                    <a:srgbClr val="000000"/>
-                  </a:solidFill>
-                  <a:latin typeface="Calibri" panose="020F0502020204030204" pitchFamily="34" charset="0"/>
-                  <a:ea typeface="ヒラギノ角ゴ Pro W3" pitchFamily="-126" charset="-128"/>
-                  <a:cs typeface="Calibri" panose="020F0502020204030204" pitchFamily="34" charset="0"/>
-                </a:rPr>
-                <a:t>Processing</a:t>
-              </a:r>
-            </a:p>
-          </p:txBody>
-        </p:sp>
-      </p:grpSp>
-      <p:sp>
-        <p:nvSpPr>
-          <p:cNvPr id="91" name="Rectangle: Rounded Corners 90">
-            <a:extLst>
-              <a:ext uri="{FF2B5EF4-FFF2-40B4-BE49-F238E27FC236}">
-                <a16:creationId xmlns:a16="http://schemas.microsoft.com/office/drawing/2014/main" id="{BE68F3DE-78A5-F573-6FD2-EEECED43FF13}"/>
-              </a:ext>
-            </a:extLst>
-          </p:cNvPr>
-          <p:cNvSpPr/>
-          <p:nvPr/>
-        </p:nvSpPr>
-        <p:spPr>
-          <a:xfrm>
-            <a:off x="3862557" y="1540844"/>
-            <a:ext cx="914400" cy="353781"/>
-          </a:xfrm>
-          <a:prstGeom prst="roundRect">
-            <a:avLst>
-              <a:gd name="adj" fmla="val 0"/>
-            </a:avLst>
-          </a:prstGeom>
-          <a:solidFill>
-            <a:srgbClr val="FCF0D0"/>
-          </a:solidFill>
-          <a:ln w="9525" cap="flat" cmpd="sng" algn="ctr">
-            <a:solidFill>
-              <a:srgbClr val="E5EEEF">
-                <a:lumMod val="25000"/>
-              </a:srgbClr>
-            </a:solidFill>
-            <a:prstDash val="solid"/>
-            <a:miter lim="800000"/>
-          </a:ln>
-          <a:effectLst/>
-        </p:spPr>
-        <p:txBody>
-          <a:bodyPr lIns="0" rIns="0" rtlCol="0" anchor="ctr"/>
-          <a:lstStyle/>
-          <a:p>
-            <a:pPr algn="ctr" defTabSz="1219170">
-              <a:defRPr/>
-            </a:pPr>
-            <a:r>
-              <a:rPr lang="en-US" sz="1067" kern="0" dirty="0">
-                <a:solidFill>
-                  <a:srgbClr val="000000"/>
-                </a:solidFill>
-                <a:latin typeface="Calibri" panose="020F0502020204030204" pitchFamily="34" charset="0"/>
-                <a:ea typeface="ヒラギノ角ゴ Pro W3" pitchFamily="-126" charset="-128"/>
-                <a:cs typeface="Calibri" panose="020F0502020204030204" pitchFamily="34" charset="0"/>
-              </a:rPr>
-              <a:t>EHR</a:t>
-            </a:r>
-            <a:endParaRPr lang="en-US" sz="1091" kern="0" dirty="0">
-              <a:solidFill>
-                <a:srgbClr val="000000"/>
-              </a:solidFill>
-              <a:latin typeface="Calibri" panose="020F0502020204030204" pitchFamily="34" charset="0"/>
-              <a:ea typeface="ヒラギノ角ゴ Pro W3" pitchFamily="-126" charset="-128"/>
-              <a:cs typeface="Calibri" panose="020F0502020204030204" pitchFamily="34" charset="0"/>
-            </a:endParaRPr>
-          </a:p>
-        </p:txBody>
-      </p:sp>
-      <p:sp>
-        <p:nvSpPr>
-          <p:cNvPr id="92" name="Rectangle: Rounded Corners 91">
-            <a:extLst>
-              <a:ext uri="{FF2B5EF4-FFF2-40B4-BE49-F238E27FC236}">
-                <a16:creationId xmlns:a16="http://schemas.microsoft.com/office/drawing/2014/main" id="{0F25552A-60BA-F0CB-A942-0101FB264561}"/>
-              </a:ext>
-            </a:extLst>
-          </p:cNvPr>
-          <p:cNvSpPr/>
-          <p:nvPr/>
-        </p:nvSpPr>
-        <p:spPr>
-          <a:xfrm>
-            <a:off x="5347482" y="1540844"/>
-            <a:ext cx="914400" cy="353781"/>
-          </a:xfrm>
-          <a:prstGeom prst="roundRect">
-            <a:avLst>
-              <a:gd name="adj" fmla="val 0"/>
-            </a:avLst>
-          </a:prstGeom>
-          <a:solidFill>
-            <a:srgbClr val="FCF0D0"/>
-          </a:solidFill>
-          <a:ln w="9525" cap="flat" cmpd="sng" algn="ctr">
-            <a:solidFill>
-              <a:srgbClr val="E5EEEF">
-                <a:lumMod val="25000"/>
-              </a:srgbClr>
-            </a:solidFill>
-            <a:prstDash val="solid"/>
-            <a:miter lim="800000"/>
-          </a:ln>
-          <a:effectLst/>
-        </p:spPr>
-        <p:txBody>
-          <a:bodyPr lIns="0" rIns="0" rtlCol="0" anchor="ctr"/>
-          <a:lstStyle/>
-          <a:p>
-            <a:pPr algn="ctr" defTabSz="1219170">
-              <a:defRPr/>
-            </a:pPr>
-            <a:r>
-              <a:rPr lang="en-US" sz="1067" kern="0" dirty="0">
-                <a:solidFill>
-                  <a:srgbClr val="000000"/>
-                </a:solidFill>
-                <a:latin typeface="Calibri" panose="020F0502020204030204" pitchFamily="34" charset="0"/>
-                <a:ea typeface="ヒラギノ角ゴ Pro W3" pitchFamily="-126" charset="-128"/>
-                <a:cs typeface="Calibri" panose="020F0502020204030204" pitchFamily="34" charset="0"/>
-              </a:rPr>
-              <a:t>SMART/Native </a:t>
-            </a:r>
-          </a:p>
-          <a:p>
-            <a:pPr algn="ctr" defTabSz="1219170">
-              <a:defRPr/>
-            </a:pPr>
-            <a:r>
-              <a:rPr lang="en-US" sz="1067" kern="0" dirty="0">
-                <a:solidFill>
-                  <a:srgbClr val="000000"/>
-                </a:solidFill>
-                <a:latin typeface="Calibri" panose="020F0502020204030204" pitchFamily="34" charset="0"/>
-                <a:ea typeface="ヒラギノ角ゴ Pro W3" pitchFamily="-126" charset="-128"/>
-                <a:cs typeface="Calibri" panose="020F0502020204030204" pitchFamily="34" charset="0"/>
-              </a:rPr>
-              <a:t>DTR App</a:t>
-            </a:r>
-          </a:p>
-        </p:txBody>
-      </p:sp>
-      <p:sp>
-        <p:nvSpPr>
-          <p:cNvPr id="93" name="Rectangle: Rounded Corners 92">
-            <a:extLst>
-              <a:ext uri="{FF2B5EF4-FFF2-40B4-BE49-F238E27FC236}">
-                <a16:creationId xmlns:a16="http://schemas.microsoft.com/office/drawing/2014/main" id="{2E4F48AA-D521-78EF-848D-441F00B86E50}"/>
-              </a:ext>
-            </a:extLst>
-          </p:cNvPr>
-          <p:cNvSpPr/>
-          <p:nvPr/>
-        </p:nvSpPr>
-        <p:spPr>
-          <a:xfrm>
-            <a:off x="7978317" y="1540844"/>
-            <a:ext cx="914400" cy="353781"/>
-          </a:xfrm>
-          <a:prstGeom prst="roundRect">
-            <a:avLst>
-              <a:gd name="adj" fmla="val 0"/>
-            </a:avLst>
-          </a:prstGeom>
-          <a:solidFill>
-            <a:srgbClr val="FCF0D0"/>
-          </a:solidFill>
-          <a:ln w="9525" cap="flat" cmpd="sng" algn="ctr">
-            <a:solidFill>
-              <a:srgbClr val="E5EEEF">
-                <a:lumMod val="25000"/>
-              </a:srgbClr>
-            </a:solidFill>
-            <a:prstDash val="solid"/>
-            <a:miter lim="800000"/>
-          </a:ln>
-          <a:effectLst/>
-        </p:spPr>
-        <p:txBody>
-          <a:bodyPr lIns="0" rIns="0" rtlCol="0" anchor="ctr"/>
-          <a:lstStyle/>
-          <a:p>
-            <a:pPr algn="ctr" defTabSz="1219170">
-              <a:defRPr/>
-            </a:pPr>
-            <a:r>
-              <a:rPr lang="en-US" sz="1067" kern="0" dirty="0">
-                <a:solidFill>
-                  <a:srgbClr val="000000"/>
-                </a:solidFill>
-                <a:latin typeface="Calibri" panose="020F0502020204030204" pitchFamily="34" charset="0"/>
-                <a:ea typeface="ヒラギノ角ゴ Pro W3" pitchFamily="-126" charset="-128"/>
-                <a:cs typeface="Calibri" panose="020F0502020204030204" pitchFamily="34" charset="0"/>
-              </a:rPr>
-              <a:t>DTR Endpoint</a:t>
-            </a:r>
-          </a:p>
-        </p:txBody>
-      </p:sp>
-      <p:sp>
-        <p:nvSpPr>
-          <p:cNvPr id="94" name="Rectangle: Rounded Corners 93">
-            <a:extLst>
-              <a:ext uri="{FF2B5EF4-FFF2-40B4-BE49-F238E27FC236}">
-                <a16:creationId xmlns:a16="http://schemas.microsoft.com/office/drawing/2014/main" id="{69C5ADD1-6702-78D9-972C-231C9B593EFB}"/>
-              </a:ext>
-            </a:extLst>
-          </p:cNvPr>
-          <p:cNvSpPr/>
-          <p:nvPr/>
-        </p:nvSpPr>
-        <p:spPr>
-          <a:xfrm>
-            <a:off x="9323483" y="1540844"/>
-            <a:ext cx="1097280" cy="353781"/>
-          </a:xfrm>
-          <a:prstGeom prst="roundRect">
-            <a:avLst>
-              <a:gd name="adj" fmla="val 0"/>
-            </a:avLst>
-          </a:prstGeom>
-          <a:solidFill>
-            <a:srgbClr val="FCF0D0"/>
-          </a:solidFill>
-          <a:ln w="9525" cap="flat" cmpd="sng" algn="ctr">
-            <a:solidFill>
-              <a:srgbClr val="E5EEEF">
-                <a:lumMod val="25000"/>
-              </a:srgbClr>
-            </a:solidFill>
-            <a:prstDash val="solid"/>
-            <a:miter lim="800000"/>
-          </a:ln>
-          <a:effectLst/>
-        </p:spPr>
-        <p:txBody>
-          <a:bodyPr lIns="0" rIns="0" rtlCol="0" anchor="ctr"/>
-          <a:lstStyle/>
-          <a:p>
-            <a:pPr algn="ctr" defTabSz="1219170">
-              <a:defRPr/>
-            </a:pPr>
-            <a:r>
-              <a:rPr lang="en-US" sz="1067" kern="0" dirty="0">
-                <a:solidFill>
-                  <a:srgbClr val="000000"/>
-                </a:solidFill>
-                <a:latin typeface="Calibri" panose="020F0502020204030204" pitchFamily="34" charset="0"/>
-                <a:ea typeface="ヒラギノ角ゴ Pro W3" pitchFamily="-126" charset="-128"/>
-                <a:cs typeface="Calibri" panose="020F0502020204030204" pitchFamily="34" charset="0"/>
-              </a:rPr>
-              <a:t>Templates / Rules</a:t>
-            </a:r>
-          </a:p>
-          <a:p>
-            <a:pPr algn="ctr" defTabSz="1219170">
-              <a:defRPr/>
-            </a:pPr>
-            <a:r>
-              <a:rPr lang="en-US" sz="1067" kern="0" dirty="0">
-                <a:solidFill>
-                  <a:srgbClr val="000000"/>
-                </a:solidFill>
-                <a:latin typeface="Calibri" panose="020F0502020204030204" pitchFamily="34" charset="0"/>
-                <a:ea typeface="ヒラギノ角ゴ Pro W3" pitchFamily="-126" charset="-128"/>
-                <a:cs typeface="Calibri" panose="020F0502020204030204" pitchFamily="34" charset="0"/>
-              </a:rPr>
-              <a:t>System</a:t>
-            </a:r>
-          </a:p>
-        </p:txBody>
-      </p:sp>
-      <p:sp>
-        <p:nvSpPr>
-          <p:cNvPr id="95" name="Rectangle: Rounded Corners 94">
-            <a:extLst>
-              <a:ext uri="{FF2B5EF4-FFF2-40B4-BE49-F238E27FC236}">
-                <a16:creationId xmlns:a16="http://schemas.microsoft.com/office/drawing/2014/main" id="{30CE32D5-05F0-FA32-5A01-33EBD678AD14}"/>
-              </a:ext>
-            </a:extLst>
-          </p:cNvPr>
-          <p:cNvSpPr/>
-          <p:nvPr/>
-        </p:nvSpPr>
-        <p:spPr>
-          <a:xfrm>
-            <a:off x="2417310" y="1540844"/>
-            <a:ext cx="914400" cy="353781"/>
-          </a:xfrm>
-          <a:prstGeom prst="roundRect">
-            <a:avLst>
-              <a:gd name="adj" fmla="val 0"/>
-            </a:avLst>
-          </a:prstGeom>
-          <a:solidFill>
-            <a:srgbClr val="FCF0D0"/>
-          </a:solidFill>
-          <a:ln w="9525" cap="flat" cmpd="sng" algn="ctr">
-            <a:solidFill>
-              <a:srgbClr val="E5EEEF">
-                <a:lumMod val="25000"/>
-              </a:srgbClr>
-            </a:solidFill>
-            <a:prstDash val="solid"/>
-            <a:miter lim="800000"/>
-          </a:ln>
-          <a:effectLst/>
-        </p:spPr>
-        <p:txBody>
-          <a:bodyPr lIns="0" rIns="0" rtlCol="0" anchor="ctr"/>
-          <a:lstStyle/>
-          <a:p>
-            <a:pPr algn="ctr" defTabSz="1219170">
-              <a:defRPr/>
-            </a:pPr>
-            <a:r>
-              <a:rPr lang="en-US" sz="1067" kern="0" dirty="0">
-                <a:solidFill>
-                  <a:srgbClr val="000000"/>
-                </a:solidFill>
-                <a:latin typeface="Calibri" panose="020F0502020204030204" pitchFamily="34" charset="0"/>
-                <a:ea typeface="ヒラギノ角ゴ Pro W3" pitchFamily="-126" charset="-128"/>
-                <a:cs typeface="Calibri" panose="020F0502020204030204" pitchFamily="34" charset="0"/>
-              </a:rPr>
-              <a:t>Provider</a:t>
-            </a:r>
-            <a:endParaRPr lang="en-US" sz="1091" kern="0" dirty="0">
-              <a:solidFill>
-                <a:srgbClr val="000000"/>
-              </a:solidFill>
-              <a:latin typeface="Calibri" panose="020F0502020204030204" pitchFamily="34" charset="0"/>
-              <a:ea typeface="ヒラギノ角ゴ Pro W3" pitchFamily="-126" charset="-128"/>
-              <a:cs typeface="Calibri" panose="020F0502020204030204" pitchFamily="34" charset="0"/>
-            </a:endParaRPr>
-          </a:p>
-        </p:txBody>
-      </p:sp>
-      <p:sp>
-        <p:nvSpPr>
-          <p:cNvPr id="96" name="TextBox 95">
-            <a:extLst>
-              <a:ext uri="{FF2B5EF4-FFF2-40B4-BE49-F238E27FC236}">
-                <a16:creationId xmlns:a16="http://schemas.microsoft.com/office/drawing/2014/main" id="{99A91F18-27F0-DBDE-1472-332E5F42D0EC}"/>
-              </a:ext>
-            </a:extLst>
-          </p:cNvPr>
-          <p:cNvSpPr txBox="1"/>
-          <p:nvPr/>
-        </p:nvSpPr>
-        <p:spPr>
-          <a:xfrm>
-            <a:off x="3274258" y="2141612"/>
-            <a:ext cx="1045197" cy="420756"/>
-          </a:xfrm>
-          <a:prstGeom prst="rect">
-            <a:avLst/>
-          </a:prstGeom>
-          <a:noFill/>
-        </p:spPr>
-        <p:txBody>
-          <a:bodyPr wrap="square">
-            <a:spAutoFit/>
-          </a:bodyPr>
-          <a:lstStyle/>
-          <a:p>
-            <a:pPr algn="ctr" defTabSz="609585" fontAlgn="base">
-              <a:spcBef>
-                <a:spcPct val="0"/>
-              </a:spcBef>
-              <a:spcAft>
-                <a:spcPct val="0"/>
-              </a:spcAft>
-            </a:pPr>
-            <a:r>
-              <a:rPr lang="en-US" sz="1067" b="1" kern="0" dirty="0">
-                <a:solidFill>
-                  <a:srgbClr val="500000"/>
-                </a:solidFill>
-                <a:latin typeface="Calibri" panose="020F0502020204030204" pitchFamily="34" charset="0"/>
-                <a:ea typeface="ヒラギノ角ゴ Pro W3" pitchFamily="-126" charset="-128"/>
-                <a:cs typeface="Calibri" panose="020F0502020204030204" pitchFamily="34" charset="0"/>
-              </a:rPr>
-              <a:t>DTR Configuration</a:t>
-            </a:r>
-          </a:p>
-        </p:txBody>
-      </p:sp>
-      <p:grpSp>
-        <p:nvGrpSpPr>
-          <p:cNvPr id="97" name="Group 96">
-            <a:extLst>
-              <a:ext uri="{FF2B5EF4-FFF2-40B4-BE49-F238E27FC236}">
-                <a16:creationId xmlns:a16="http://schemas.microsoft.com/office/drawing/2014/main" id="{9B8CFEF3-E4B1-A1A7-7580-AA9785578FDD}"/>
-              </a:ext>
-            </a:extLst>
-          </p:cNvPr>
-          <p:cNvGrpSpPr/>
-          <p:nvPr/>
-        </p:nvGrpSpPr>
-        <p:grpSpPr>
-          <a:xfrm>
-            <a:off x="4235935" y="2042033"/>
-            <a:ext cx="1680012" cy="369332"/>
-            <a:chOff x="2826189" y="1552000"/>
-            <a:chExt cx="1260009" cy="276999"/>
-          </a:xfrm>
-        </p:grpSpPr>
-        <p:sp>
-          <p:nvSpPr>
-            <p:cNvPr id="98" name="TextBox 97">
-              <a:extLst>
-                <a:ext uri="{FF2B5EF4-FFF2-40B4-BE49-F238E27FC236}">
-                  <a16:creationId xmlns:a16="http://schemas.microsoft.com/office/drawing/2014/main" id="{E002E44A-A3DB-4AA2-80C7-9EFE98730D62}"/>
-                </a:ext>
-              </a:extLst>
-            </p:cNvPr>
-            <p:cNvSpPr txBox="1"/>
-            <p:nvPr/>
-          </p:nvSpPr>
-          <p:spPr>
-            <a:xfrm>
-              <a:off x="2907732" y="1589168"/>
-              <a:ext cx="1085890" cy="125900"/>
-            </a:xfrm>
-            <a:prstGeom prst="rect">
-              <a:avLst/>
-            </a:prstGeom>
-            <a:noFill/>
-          </p:spPr>
-          <p:txBody>
-            <a:bodyPr wrap="square" lIns="0" tIns="0" rIns="0" bIns="0">
-              <a:spAutoFit/>
-            </a:bodyPr>
-            <a:lstStyle/>
-            <a:p>
-              <a:pPr algn="ctr" defTabSz="1219170">
-                <a:defRPr/>
-              </a:pPr>
-              <a:r>
-                <a:rPr lang="en-US" sz="1091" kern="0" dirty="0">
-                  <a:solidFill>
-                    <a:srgbClr val="C0504D">
-                      <a:lumMod val="50000"/>
-                    </a:srgbClr>
-                  </a:solidFill>
-                  <a:latin typeface="Calibri" panose="020F0502020204030204" pitchFamily="34" charset="0"/>
-                  <a:ea typeface="ヒラギノ角ゴ Pro W3" pitchFamily="-126" charset="-128"/>
-                  <a:cs typeface="Calibri" panose="020F0502020204030204" pitchFamily="34" charset="0"/>
-                </a:rPr>
-                <a:t>EHR to App Connectivity</a:t>
-              </a:r>
-            </a:p>
-          </p:txBody>
-        </p:sp>
-        <p:cxnSp>
-          <p:nvCxnSpPr>
-            <p:cNvPr id="99" name="Straight Arrow Connector 98">
-              <a:extLst>
-                <a:ext uri="{FF2B5EF4-FFF2-40B4-BE49-F238E27FC236}">
-                  <a16:creationId xmlns:a16="http://schemas.microsoft.com/office/drawing/2014/main" id="{63858AE2-7B98-5079-2996-32C74E606A47}"/>
-                </a:ext>
-              </a:extLst>
-            </p:cNvPr>
-            <p:cNvCxnSpPr>
-              <a:cxnSpLocks/>
-            </p:cNvCxnSpPr>
-            <p:nvPr/>
-          </p:nvCxnSpPr>
-          <p:spPr>
-            <a:xfrm>
-              <a:off x="2896144" y="1742324"/>
-              <a:ext cx="1106424" cy="0"/>
-            </a:xfrm>
-            <a:prstGeom prst="straightConnector1">
-              <a:avLst/>
-            </a:prstGeom>
-            <a:ln w="9525">
-              <a:solidFill>
-                <a:schemeClr val="accent6">
-                  <a:lumMod val="50000"/>
-                </a:schemeClr>
-              </a:solidFill>
-              <a:prstDash val="sysDash"/>
-              <a:headEnd type="none"/>
-              <a:tailEnd type="none"/>
-            </a:ln>
-            <a:effectLst/>
-          </p:spPr>
-          <p:style>
-            <a:lnRef idx="2">
-              <a:schemeClr val="accent1"/>
-            </a:lnRef>
-            <a:fillRef idx="0">
-              <a:schemeClr val="accent1"/>
-            </a:fillRef>
-            <a:effectRef idx="1">
-              <a:schemeClr val="accent1"/>
-            </a:effectRef>
-            <a:fontRef idx="minor">
-              <a:schemeClr val="tx1"/>
-            </a:fontRef>
-          </p:style>
-        </p:cxnSp>
-        <p:sp>
-          <p:nvSpPr>
-            <p:cNvPr id="100" name="TextBox 99">
-              <a:extLst>
-                <a:ext uri="{FF2B5EF4-FFF2-40B4-BE49-F238E27FC236}">
-                  <a16:creationId xmlns:a16="http://schemas.microsoft.com/office/drawing/2014/main" id="{481D8180-1990-8575-B6C8-7E7CF359C226}"/>
-                </a:ext>
-              </a:extLst>
-            </p:cNvPr>
-            <p:cNvSpPr txBox="1"/>
-            <p:nvPr/>
-          </p:nvSpPr>
-          <p:spPr>
-            <a:xfrm>
-              <a:off x="2826189" y="1552000"/>
-              <a:ext cx="151150" cy="276999"/>
-            </a:xfrm>
-            <a:prstGeom prst="rect">
-              <a:avLst/>
-            </a:prstGeom>
-            <a:noFill/>
-          </p:spPr>
-          <p:txBody>
-            <a:bodyPr wrap="square" lIns="0" tIns="0" rIns="0" bIns="0">
-              <a:spAutoFit/>
-            </a:bodyPr>
-            <a:lstStyle/>
-            <a:p>
-              <a:pPr algn="ctr" defTabSz="609585" fontAlgn="base">
-                <a:spcBef>
-                  <a:spcPct val="0"/>
-                </a:spcBef>
-                <a:spcAft>
-                  <a:spcPct val="0"/>
-                </a:spcAft>
-              </a:pPr>
-              <a:r>
-                <a:rPr lang="en-US" sz="2400" b="1" kern="0" dirty="0">
-                  <a:solidFill>
-                    <a:srgbClr val="C0504D">
-                      <a:lumMod val="50000"/>
-                    </a:srgbClr>
-                  </a:solidFill>
-                  <a:latin typeface="Bauhaus 93" panose="04030905020B02020C02" pitchFamily="82" charset="0"/>
-                  <a:ea typeface="ヒラギノ角ゴ Pro W3" pitchFamily="-126" charset="-128"/>
-                  <a:cs typeface="Calibri" panose="020F0502020204030204" pitchFamily="34" charset="0"/>
-                </a:rPr>
-                <a:t>.</a:t>
-              </a:r>
-              <a:endParaRPr lang="en-US" sz="2400" dirty="0">
-                <a:solidFill>
-                  <a:srgbClr val="C0504D">
-                    <a:lumMod val="50000"/>
-                  </a:srgbClr>
-                </a:solidFill>
-                <a:latin typeface="Bauhaus 93" panose="04030905020B02020C02" pitchFamily="82" charset="0"/>
-                <a:ea typeface="ヒラギノ角ゴ Pro W3" pitchFamily="-126" charset="-128"/>
-              </a:endParaRPr>
-            </a:p>
-          </p:txBody>
-        </p:sp>
-        <p:sp>
-          <p:nvSpPr>
-            <p:cNvPr id="101" name="TextBox 100">
-              <a:extLst>
-                <a:ext uri="{FF2B5EF4-FFF2-40B4-BE49-F238E27FC236}">
-                  <a16:creationId xmlns:a16="http://schemas.microsoft.com/office/drawing/2014/main" id="{4BF92D43-5349-D6BD-DB5C-1984F15FC9FA}"/>
-                </a:ext>
-              </a:extLst>
-            </p:cNvPr>
-            <p:cNvSpPr txBox="1"/>
-            <p:nvPr/>
-          </p:nvSpPr>
-          <p:spPr>
-            <a:xfrm>
-              <a:off x="3935048" y="1552000"/>
-              <a:ext cx="151150" cy="276999"/>
-            </a:xfrm>
-            <a:prstGeom prst="rect">
-              <a:avLst/>
-            </a:prstGeom>
-            <a:noFill/>
-          </p:spPr>
-          <p:txBody>
-            <a:bodyPr wrap="square" lIns="0" tIns="0" rIns="0" bIns="0">
-              <a:spAutoFit/>
-            </a:bodyPr>
-            <a:lstStyle/>
-            <a:p>
-              <a:pPr algn="ctr" defTabSz="609585" fontAlgn="base">
-                <a:spcBef>
-                  <a:spcPct val="0"/>
-                </a:spcBef>
-                <a:spcAft>
-                  <a:spcPct val="0"/>
-                </a:spcAft>
-              </a:pPr>
-              <a:r>
-                <a:rPr lang="en-US" sz="2400" b="1" kern="0" dirty="0">
-                  <a:solidFill>
-                    <a:srgbClr val="C0504D">
-                      <a:lumMod val="50000"/>
-                    </a:srgbClr>
-                  </a:solidFill>
-                  <a:latin typeface="Bauhaus 93" panose="04030905020B02020C02" pitchFamily="82" charset="0"/>
-                  <a:ea typeface="ヒラギノ角ゴ Pro W3" pitchFamily="-126" charset="-128"/>
-                  <a:cs typeface="Calibri" panose="020F0502020204030204" pitchFamily="34" charset="0"/>
-                </a:rPr>
-                <a:t>.</a:t>
-              </a:r>
-              <a:endParaRPr lang="en-US" sz="2400" dirty="0">
-                <a:solidFill>
-                  <a:srgbClr val="C0504D">
-                    <a:lumMod val="50000"/>
-                  </a:srgbClr>
-                </a:solidFill>
-                <a:latin typeface="Bauhaus 93" panose="04030905020B02020C02" pitchFamily="82" charset="0"/>
-                <a:ea typeface="ヒラギノ角ゴ Pro W3" pitchFamily="-126" charset="-128"/>
-              </a:endParaRPr>
-            </a:p>
-          </p:txBody>
-        </p:sp>
-      </p:grpSp>
-      <p:cxnSp>
-        <p:nvCxnSpPr>
-          <p:cNvPr id="102" name="Straight Arrow Connector 101">
-            <a:extLst>
-              <a:ext uri="{FF2B5EF4-FFF2-40B4-BE49-F238E27FC236}">
-                <a16:creationId xmlns:a16="http://schemas.microsoft.com/office/drawing/2014/main" id="{0C7BBB52-94D9-8BB5-83A6-EBA9952DDA84}"/>
-              </a:ext>
-            </a:extLst>
-          </p:cNvPr>
-          <p:cNvCxnSpPr>
-            <a:cxnSpLocks/>
-          </p:cNvCxnSpPr>
-          <p:nvPr/>
-        </p:nvCxnSpPr>
-        <p:spPr>
-          <a:xfrm>
-            <a:off x="5878127" y="5581888"/>
-            <a:ext cx="4267200" cy="0"/>
-          </a:xfrm>
-          <a:prstGeom prst="straightConnector1">
-            <a:avLst/>
-          </a:prstGeom>
-          <a:noFill/>
-          <a:ln w="9525" cap="flat" cmpd="sng" algn="ctr">
-            <a:solidFill>
-              <a:schemeClr val="tx1"/>
-            </a:solidFill>
-            <a:prstDash val="dash"/>
-            <a:miter lim="800000"/>
-            <a:tailEnd type="triangle"/>
-          </a:ln>
-          <a:effectLst/>
-        </p:spPr>
-      </p:cxnSp>
-      <p:cxnSp>
-        <p:nvCxnSpPr>
-          <p:cNvPr id="103" name="Straight Arrow Connector 102">
-            <a:extLst>
-              <a:ext uri="{FF2B5EF4-FFF2-40B4-BE49-F238E27FC236}">
-                <a16:creationId xmlns:a16="http://schemas.microsoft.com/office/drawing/2014/main" id="{34C45E9F-7981-78B1-CBC7-E6A08BC6E1BD}"/>
-              </a:ext>
-            </a:extLst>
-          </p:cNvPr>
-          <p:cNvCxnSpPr>
-            <a:cxnSpLocks/>
-          </p:cNvCxnSpPr>
-          <p:nvPr/>
-        </p:nvCxnSpPr>
-        <p:spPr>
-          <a:xfrm flipH="1">
-            <a:off x="5871841" y="4255694"/>
-            <a:ext cx="4267200" cy="0"/>
-          </a:xfrm>
-          <a:prstGeom prst="straightConnector1">
-            <a:avLst/>
-          </a:prstGeom>
-          <a:noFill/>
-          <a:ln w="9525" cap="flat" cmpd="sng" algn="ctr">
-            <a:solidFill>
-              <a:schemeClr val="tx1"/>
-            </a:solidFill>
-            <a:prstDash val="dash"/>
-            <a:miter lim="800000"/>
-            <a:tailEnd type="triangle"/>
-          </a:ln>
-          <a:effectLst/>
-        </p:spPr>
-      </p:cxnSp>
-      <p:cxnSp>
-        <p:nvCxnSpPr>
-          <p:cNvPr id="104" name="Straight Arrow Connector 103">
-            <a:extLst>
-              <a:ext uri="{FF2B5EF4-FFF2-40B4-BE49-F238E27FC236}">
-                <a16:creationId xmlns:a16="http://schemas.microsoft.com/office/drawing/2014/main" id="{9863A10A-5C7D-CCDC-4FA3-8F25C3FE2E92}"/>
-              </a:ext>
-            </a:extLst>
-          </p:cNvPr>
-          <p:cNvCxnSpPr>
-            <a:cxnSpLocks/>
-          </p:cNvCxnSpPr>
-          <p:nvPr/>
-        </p:nvCxnSpPr>
-        <p:spPr>
-          <a:xfrm flipV="1">
-            <a:off x="10135877" y="4237700"/>
-            <a:ext cx="3164" cy="1344188"/>
-          </a:xfrm>
-          <a:prstGeom prst="straightConnector1">
-            <a:avLst/>
-          </a:prstGeom>
-          <a:noFill/>
-          <a:ln w="9525" cap="flat" cmpd="sng" algn="ctr">
-            <a:solidFill>
-              <a:schemeClr val="tx1"/>
-            </a:solidFill>
-            <a:prstDash val="dash"/>
-            <a:miter lim="800000"/>
-            <a:tailEnd type="none"/>
-          </a:ln>
-          <a:effectLst/>
-        </p:spPr>
-      </p:cxnSp>
-      <p:sp>
-        <p:nvSpPr>
-          <p:cNvPr id="105" name="Rectangle: Rounded Corners 104">
-            <a:extLst>
-              <a:ext uri="{FF2B5EF4-FFF2-40B4-BE49-F238E27FC236}">
-                <a16:creationId xmlns:a16="http://schemas.microsoft.com/office/drawing/2014/main" id="{63991317-BBF1-E7EA-AA22-06C832532772}"/>
-              </a:ext>
-            </a:extLst>
-          </p:cNvPr>
-          <p:cNvSpPr/>
-          <p:nvPr/>
-        </p:nvSpPr>
-        <p:spPr>
-          <a:xfrm>
-            <a:off x="5694049" y="5885573"/>
-            <a:ext cx="4267196" cy="401113"/>
-          </a:xfrm>
-          <a:prstGeom prst="roundRect">
-            <a:avLst>
-              <a:gd name="adj" fmla="val 0"/>
-            </a:avLst>
-          </a:prstGeom>
-          <a:solidFill>
-            <a:schemeClr val="bg1">
-              <a:alpha val="69000"/>
-            </a:schemeClr>
-          </a:solidFill>
-          <a:ln w="3175" cap="flat" cmpd="sng" algn="ctr">
-            <a:noFill/>
-            <a:prstDash val="solid"/>
-            <a:miter lim="800000"/>
-          </a:ln>
-          <a:effectLst/>
-        </p:spPr>
-        <p:txBody>
-          <a:bodyPr lIns="0" rIns="0" rtlCol="0" anchor="ctr"/>
-          <a:lstStyle/>
-          <a:p>
-            <a:pPr algn="ctr" defTabSz="1219170">
-              <a:defRPr/>
-            </a:pPr>
-            <a:endParaRPr lang="en-US" sz="1091" kern="0" dirty="0">
-              <a:solidFill>
-                <a:srgbClr val="000000"/>
-              </a:solidFill>
-              <a:latin typeface="Calibri" panose="020F0502020204030204" pitchFamily="34" charset="0"/>
-              <a:ea typeface="ヒラギノ角ゴ Pro W3" pitchFamily="-126" charset="-128"/>
-              <a:cs typeface="Calibri" panose="020F0502020204030204" pitchFamily="34" charset="0"/>
-            </a:endParaRPr>
-          </a:p>
-        </p:txBody>
-      </p:sp>
-      <p:grpSp>
-        <p:nvGrpSpPr>
-          <p:cNvPr id="106" name="Group 105">
-            <a:extLst>
-              <a:ext uri="{FF2B5EF4-FFF2-40B4-BE49-F238E27FC236}">
-                <a16:creationId xmlns:a16="http://schemas.microsoft.com/office/drawing/2014/main" id="{326572A4-4C22-F291-1BFB-F6936C59E75A}"/>
-              </a:ext>
-            </a:extLst>
-          </p:cNvPr>
-          <p:cNvGrpSpPr/>
-          <p:nvPr/>
-        </p:nvGrpSpPr>
-        <p:grpSpPr>
-          <a:xfrm>
-            <a:off x="4374535" y="6018680"/>
-            <a:ext cx="6194712" cy="346473"/>
-            <a:chOff x="2915964" y="4461124"/>
-            <a:chExt cx="4646034" cy="259855"/>
-          </a:xfrm>
-        </p:grpSpPr>
-        <p:sp>
-          <p:nvSpPr>
-            <p:cNvPr id="107" name="TextBox 106">
-              <a:extLst>
-                <a:ext uri="{FF2B5EF4-FFF2-40B4-BE49-F238E27FC236}">
-                  <a16:creationId xmlns:a16="http://schemas.microsoft.com/office/drawing/2014/main" id="{6288C921-17B4-6153-A607-00441A2D0877}"/>
-                </a:ext>
-              </a:extLst>
-            </p:cNvPr>
-            <p:cNvSpPr txBox="1"/>
-            <p:nvPr/>
-          </p:nvSpPr>
-          <p:spPr>
-            <a:xfrm>
-              <a:off x="3193810" y="4461124"/>
-              <a:ext cx="539388" cy="125900"/>
-            </a:xfrm>
-            <a:prstGeom prst="rect">
-              <a:avLst/>
-            </a:prstGeom>
-            <a:noFill/>
-          </p:spPr>
-          <p:txBody>
-            <a:bodyPr wrap="square" lIns="0" tIns="0" rIns="0" bIns="0">
-              <a:spAutoFit/>
-            </a:bodyPr>
-            <a:lstStyle/>
-            <a:p>
-              <a:pPr algn="ctr" defTabSz="1219170">
-                <a:defRPr/>
-              </a:pPr>
-              <a:r>
-                <a:rPr lang="en-US" sz="1091" kern="0" dirty="0">
-                  <a:solidFill>
-                    <a:srgbClr val="C0504D">
-                      <a:lumMod val="50000"/>
-                    </a:srgbClr>
-                  </a:solidFill>
-                  <a:latin typeface="Calibri" panose="020F0502020204030204" pitchFamily="34" charset="0"/>
-                  <a:ea typeface="ヒラギノ角ゴ Pro W3" pitchFamily="-126" charset="-128"/>
-                  <a:cs typeface="Calibri" panose="020F0502020204030204" pitchFamily="34" charset="0"/>
-                </a:rPr>
-                <a:t>Launch PAS</a:t>
-              </a:r>
-            </a:p>
-          </p:txBody>
-        </p:sp>
-        <p:cxnSp>
-          <p:nvCxnSpPr>
-            <p:cNvPr id="108" name="Straight Arrow Connector 107">
-              <a:extLst>
-                <a:ext uri="{FF2B5EF4-FFF2-40B4-BE49-F238E27FC236}">
-                  <a16:creationId xmlns:a16="http://schemas.microsoft.com/office/drawing/2014/main" id="{B43006CC-9988-87E0-CAFF-D24C4F80F2CF}"/>
-                </a:ext>
-              </a:extLst>
-            </p:cNvPr>
-            <p:cNvCxnSpPr>
-              <a:cxnSpLocks/>
-            </p:cNvCxnSpPr>
-            <p:nvPr/>
-          </p:nvCxnSpPr>
-          <p:spPr>
-            <a:xfrm flipH="1">
-              <a:off x="2915964" y="4576480"/>
-              <a:ext cx="4389120" cy="0"/>
-            </a:xfrm>
-            <a:prstGeom prst="straightConnector1">
-              <a:avLst/>
-            </a:prstGeom>
-            <a:noFill/>
-            <a:ln w="6350" cap="flat" cmpd="sng" algn="ctr">
-              <a:solidFill>
-                <a:schemeClr val="accent2">
-                  <a:lumMod val="75000"/>
-                </a:schemeClr>
-              </a:solidFill>
-              <a:prstDash val="dash"/>
-              <a:miter lim="800000"/>
-              <a:headEnd type="triangle"/>
-              <a:tailEnd type="none"/>
-            </a:ln>
-            <a:effectLst/>
-          </p:spPr>
-        </p:cxnSp>
-        <p:sp>
-          <p:nvSpPr>
-            <p:cNvPr id="109" name="Flowchart: Off-page Connector 108">
-              <a:extLst>
-                <a:ext uri="{FF2B5EF4-FFF2-40B4-BE49-F238E27FC236}">
-                  <a16:creationId xmlns:a16="http://schemas.microsoft.com/office/drawing/2014/main" id="{569B51C8-1DE5-1836-D9A9-2C11AC0906B7}"/>
-                </a:ext>
-              </a:extLst>
-            </p:cNvPr>
-            <p:cNvSpPr/>
-            <p:nvPr/>
-          </p:nvSpPr>
-          <p:spPr>
-            <a:xfrm>
-              <a:off x="7305966" y="4474060"/>
-              <a:ext cx="256032" cy="246919"/>
-            </a:xfrm>
-            <a:prstGeom prst="flowChartOffpageConnector">
-              <a:avLst/>
-            </a:prstGeom>
-            <a:gradFill flip="none" rotWithShape="1">
-              <a:gsLst>
-                <a:gs pos="100000">
-                  <a:schemeClr val="accent2">
-                    <a:lumMod val="20000"/>
-                    <a:lumOff val="80000"/>
-                  </a:schemeClr>
-                </a:gs>
-                <a:gs pos="0">
-                  <a:schemeClr val="bg1">
-                    <a:lumMod val="95000"/>
-                  </a:schemeClr>
-                </a:gs>
-              </a:gsLst>
-              <a:lin ang="16200000" scaled="1"/>
-              <a:tileRect/>
-            </a:gradFill>
-            <a:ln>
-              <a:solidFill>
-                <a:schemeClr val="accent2">
-                  <a:lumMod val="75000"/>
-                </a:schemeClr>
-              </a:solidFill>
-            </a:ln>
-            <a:effectLst>
-              <a:outerShdw blurRad="50800" dist="25400" dir="4200000" algn="tl" rotWithShape="0">
-                <a:prstClr val="black">
-                  <a:alpha val="40000"/>
-                </a:prstClr>
-              </a:outerShdw>
-            </a:effectLst>
-          </p:spPr>
-          <p:style>
-            <a:lnRef idx="1">
-              <a:schemeClr val="accent1"/>
-            </a:lnRef>
-            <a:fillRef idx="3">
-              <a:schemeClr val="accent1"/>
-            </a:fillRef>
-            <a:effectRef idx="2">
-              <a:schemeClr val="accent1"/>
-            </a:effectRef>
-            <a:fontRef idx="minor">
-              <a:schemeClr val="lt1"/>
-            </a:fontRef>
-          </p:style>
-          <p:txBody>
-            <a:bodyPr rtlCol="0" anchor="ctr"/>
-            <a:lstStyle/>
-            <a:p>
-              <a:pPr algn="ctr" defTabSz="609585" fontAlgn="base">
-                <a:spcBef>
-                  <a:spcPct val="0"/>
-                </a:spcBef>
-                <a:spcAft>
-                  <a:spcPct val="0"/>
-                </a:spcAft>
-              </a:pPr>
-              <a:endParaRPr lang="en-US" sz="2400" dirty="0">
-                <a:solidFill>
-                  <a:prstClr val="white"/>
-                </a:solidFill>
-                <a:latin typeface="Arial"/>
-              </a:endParaRPr>
-            </a:p>
-          </p:txBody>
-        </p:sp>
-        <p:sp>
-          <p:nvSpPr>
-            <p:cNvPr id="110" name="TextBox 109">
-              <a:extLst>
-                <a:ext uri="{FF2B5EF4-FFF2-40B4-BE49-F238E27FC236}">
-                  <a16:creationId xmlns:a16="http://schemas.microsoft.com/office/drawing/2014/main" id="{F679D945-2010-E027-B6DE-EFA2E1871DA0}"/>
-                </a:ext>
-              </a:extLst>
-            </p:cNvPr>
-            <p:cNvSpPr txBox="1"/>
-            <p:nvPr/>
-          </p:nvSpPr>
-          <p:spPr>
-            <a:xfrm>
-              <a:off x="7322910" y="4513464"/>
-              <a:ext cx="232472" cy="125900"/>
-            </a:xfrm>
-            <a:prstGeom prst="rect">
-              <a:avLst/>
-            </a:prstGeom>
-            <a:noFill/>
-          </p:spPr>
-          <p:txBody>
-            <a:bodyPr wrap="square" lIns="0" tIns="0" rIns="0" bIns="0">
-              <a:spAutoFit/>
-            </a:bodyPr>
-            <a:lstStyle/>
-            <a:p>
-              <a:pPr algn="ctr" defTabSz="1219170">
-                <a:defRPr/>
-              </a:pPr>
-              <a:r>
-                <a:rPr lang="en-US" sz="1091" b="1" kern="0" dirty="0">
-                  <a:solidFill>
-                    <a:srgbClr val="9A0000"/>
-                  </a:solidFill>
-                  <a:latin typeface="Calibri" panose="020F0502020204030204" pitchFamily="34" charset="0"/>
-                  <a:ea typeface="ヒラギノ角ゴ Pro W3" pitchFamily="-126" charset="-128"/>
-                  <a:cs typeface="Calibri" panose="020F0502020204030204" pitchFamily="34" charset="0"/>
-                </a:rPr>
-                <a:t>PAS</a:t>
-              </a:r>
-            </a:p>
-          </p:txBody>
-        </p:sp>
-      </p:grpSp>
-      <p:grpSp>
-        <p:nvGrpSpPr>
-          <p:cNvPr id="111" name="Group 110">
-            <a:extLst>
-              <a:ext uri="{FF2B5EF4-FFF2-40B4-BE49-F238E27FC236}">
-                <a16:creationId xmlns:a16="http://schemas.microsoft.com/office/drawing/2014/main" id="{6F2D170C-B348-8168-1FF3-023818C63491}"/>
-              </a:ext>
-            </a:extLst>
-          </p:cNvPr>
-          <p:cNvGrpSpPr/>
-          <p:nvPr/>
-        </p:nvGrpSpPr>
-        <p:grpSpPr>
-          <a:xfrm>
-            <a:off x="4229981" y="2310615"/>
-            <a:ext cx="4300660" cy="369855"/>
-            <a:chOff x="2928044" y="1644684"/>
-            <a:chExt cx="3225495" cy="277391"/>
-          </a:xfrm>
-        </p:grpSpPr>
-        <p:grpSp>
-          <p:nvGrpSpPr>
-            <p:cNvPr id="112" name="Group 111">
-              <a:extLst>
-                <a:ext uri="{FF2B5EF4-FFF2-40B4-BE49-F238E27FC236}">
-                  <a16:creationId xmlns:a16="http://schemas.microsoft.com/office/drawing/2014/main" id="{7CE716BF-FA99-1100-D08A-B6A2548D96A3}"/>
-                </a:ext>
-              </a:extLst>
-            </p:cNvPr>
-            <p:cNvGrpSpPr/>
-            <p:nvPr/>
-          </p:nvGrpSpPr>
-          <p:grpSpPr>
-            <a:xfrm>
-              <a:off x="2928044" y="1644684"/>
-              <a:ext cx="3225495" cy="276999"/>
-              <a:chOff x="2821724" y="1746403"/>
-              <a:chExt cx="3225495" cy="276999"/>
-            </a:xfrm>
-          </p:grpSpPr>
-          <p:sp>
-            <p:nvSpPr>
-              <p:cNvPr id="114" name="TextBox 113">
-                <a:extLst>
-                  <a:ext uri="{FF2B5EF4-FFF2-40B4-BE49-F238E27FC236}">
-                    <a16:creationId xmlns:a16="http://schemas.microsoft.com/office/drawing/2014/main" id="{9FDCE847-8030-DA18-7C15-437EBA8F5468}"/>
-                  </a:ext>
-                </a:extLst>
-              </p:cNvPr>
-              <p:cNvSpPr txBox="1"/>
-              <p:nvPr/>
-            </p:nvSpPr>
-            <p:spPr>
-              <a:xfrm>
-                <a:off x="3726800" y="1797039"/>
-                <a:ext cx="1471381" cy="125899"/>
-              </a:xfrm>
-              <a:prstGeom prst="rect">
-                <a:avLst/>
-              </a:prstGeom>
-              <a:solidFill>
-                <a:srgbClr val="FBF4F3"/>
-              </a:solidFill>
-            </p:spPr>
-            <p:txBody>
-              <a:bodyPr wrap="square" lIns="0" tIns="0" rIns="0" bIns="0">
-                <a:spAutoFit/>
-              </a:bodyPr>
-              <a:lstStyle/>
-              <a:p>
-                <a:pPr algn="ctr" defTabSz="1219170">
-                  <a:defRPr/>
-                </a:pPr>
-                <a:r>
-                  <a:rPr lang="en-US" sz="1091" kern="0" dirty="0">
-                    <a:solidFill>
-                      <a:srgbClr val="C0504D">
-                        <a:lumMod val="50000"/>
-                      </a:srgbClr>
-                    </a:solidFill>
-                    <a:latin typeface="Calibri" panose="020F0502020204030204" pitchFamily="34" charset="0"/>
-                    <a:ea typeface="ヒラギノ角ゴ Pro W3" pitchFamily="-126" charset="-128"/>
-                    <a:cs typeface="Calibri" panose="020F0502020204030204" pitchFamily="34" charset="0"/>
-                  </a:rPr>
-                  <a:t>EHR/App to Payer Connectivity</a:t>
-                </a:r>
-              </a:p>
-            </p:txBody>
-          </p:sp>
-          <p:cxnSp>
-            <p:nvCxnSpPr>
-              <p:cNvPr id="115" name="Straight Arrow Connector 114">
-                <a:extLst>
-                  <a:ext uri="{FF2B5EF4-FFF2-40B4-BE49-F238E27FC236}">
-                    <a16:creationId xmlns:a16="http://schemas.microsoft.com/office/drawing/2014/main" id="{3122B21F-B4CB-244F-C18E-7BA259FB2874}"/>
-                  </a:ext>
-                </a:extLst>
-              </p:cNvPr>
-              <p:cNvCxnSpPr>
-                <a:cxnSpLocks/>
-              </p:cNvCxnSpPr>
-              <p:nvPr/>
-            </p:nvCxnSpPr>
-            <p:spPr>
-              <a:xfrm>
-                <a:off x="2889056" y="1936243"/>
-                <a:ext cx="3086820" cy="0"/>
-              </a:xfrm>
-              <a:prstGeom prst="straightConnector1">
-                <a:avLst/>
-              </a:prstGeom>
-              <a:ln w="9525">
-                <a:solidFill>
-                  <a:schemeClr val="accent6">
-                    <a:lumMod val="50000"/>
-                  </a:schemeClr>
-                </a:solidFill>
-                <a:prstDash val="sysDash"/>
-                <a:headEnd type="none"/>
-                <a:tailEnd type="none"/>
-              </a:ln>
-              <a:effectLst/>
-            </p:spPr>
-            <p:style>
-              <a:lnRef idx="2">
-                <a:schemeClr val="accent1"/>
-              </a:lnRef>
-              <a:fillRef idx="0">
-                <a:schemeClr val="accent1"/>
-              </a:fillRef>
-              <a:effectRef idx="1">
-                <a:schemeClr val="accent1"/>
-              </a:effectRef>
-              <a:fontRef idx="minor">
-                <a:schemeClr val="tx1"/>
-              </a:fontRef>
-            </p:style>
-          </p:cxnSp>
-          <p:sp>
-            <p:nvSpPr>
-              <p:cNvPr id="116" name="TextBox 115">
-                <a:extLst>
-                  <a:ext uri="{FF2B5EF4-FFF2-40B4-BE49-F238E27FC236}">
-                    <a16:creationId xmlns:a16="http://schemas.microsoft.com/office/drawing/2014/main" id="{11ABA665-877E-EA14-CD61-45FDF0EB45AA}"/>
-                  </a:ext>
-                </a:extLst>
-              </p:cNvPr>
-              <p:cNvSpPr txBox="1"/>
-              <p:nvPr/>
-            </p:nvSpPr>
-            <p:spPr>
-              <a:xfrm>
-                <a:off x="2821724" y="1746403"/>
-                <a:ext cx="151150" cy="276999"/>
-              </a:xfrm>
-              <a:prstGeom prst="rect">
-                <a:avLst/>
-              </a:prstGeom>
-              <a:noFill/>
-            </p:spPr>
-            <p:txBody>
-              <a:bodyPr wrap="square" lIns="0" tIns="0" rIns="0" bIns="0">
-                <a:spAutoFit/>
-              </a:bodyPr>
-              <a:lstStyle/>
-              <a:p>
-                <a:pPr algn="ctr" defTabSz="609585" fontAlgn="base">
-                  <a:spcBef>
-                    <a:spcPct val="0"/>
-                  </a:spcBef>
-                  <a:spcAft>
-                    <a:spcPct val="0"/>
-                  </a:spcAft>
-                </a:pPr>
-                <a:r>
-                  <a:rPr lang="en-US" sz="2400" b="1" kern="0" dirty="0">
-                    <a:solidFill>
-                      <a:srgbClr val="C0504D">
-                        <a:lumMod val="50000"/>
-                      </a:srgbClr>
-                    </a:solidFill>
-                    <a:latin typeface="Bauhaus 93" panose="04030905020B02020C02" pitchFamily="82" charset="0"/>
-                    <a:ea typeface="ヒラギノ角ゴ Pro W3" pitchFamily="-126" charset="-128"/>
-                    <a:cs typeface="Calibri" panose="020F0502020204030204" pitchFamily="34" charset="0"/>
-                  </a:rPr>
-                  <a:t>.</a:t>
-                </a:r>
-                <a:endParaRPr lang="en-US" sz="2400" dirty="0">
-                  <a:solidFill>
-                    <a:srgbClr val="C0504D">
-                      <a:lumMod val="50000"/>
-                    </a:srgbClr>
-                  </a:solidFill>
-                  <a:latin typeface="Bauhaus 93" panose="04030905020B02020C02" pitchFamily="82" charset="0"/>
-                  <a:ea typeface="ヒラギノ角ゴ Pro W3" pitchFamily="-126" charset="-128"/>
-                </a:endParaRPr>
-              </a:p>
-            </p:txBody>
-          </p:sp>
-          <p:sp>
-            <p:nvSpPr>
-              <p:cNvPr id="117" name="TextBox 116">
-                <a:extLst>
-                  <a:ext uri="{FF2B5EF4-FFF2-40B4-BE49-F238E27FC236}">
-                    <a16:creationId xmlns:a16="http://schemas.microsoft.com/office/drawing/2014/main" id="{85B50B1E-4188-4F3B-042B-5621EBE27C1A}"/>
-                  </a:ext>
-                </a:extLst>
-              </p:cNvPr>
-              <p:cNvSpPr txBox="1"/>
-              <p:nvPr/>
-            </p:nvSpPr>
-            <p:spPr>
-              <a:xfrm>
-                <a:off x="5896069" y="1746403"/>
-                <a:ext cx="151150" cy="276999"/>
-              </a:xfrm>
-              <a:prstGeom prst="rect">
-                <a:avLst/>
-              </a:prstGeom>
-              <a:noFill/>
-            </p:spPr>
-            <p:txBody>
-              <a:bodyPr wrap="square" lIns="0" tIns="0" rIns="0" bIns="0">
-                <a:spAutoFit/>
-              </a:bodyPr>
-              <a:lstStyle/>
-              <a:p>
-                <a:pPr algn="ctr" defTabSz="609585" fontAlgn="base">
-                  <a:spcBef>
-                    <a:spcPct val="0"/>
-                  </a:spcBef>
-                  <a:spcAft>
-                    <a:spcPct val="0"/>
-                  </a:spcAft>
-                </a:pPr>
-                <a:r>
-                  <a:rPr lang="en-US" sz="2400" b="1" kern="0" dirty="0">
-                    <a:solidFill>
-                      <a:srgbClr val="C0504D">
-                        <a:lumMod val="50000"/>
-                      </a:srgbClr>
-                    </a:solidFill>
-                    <a:latin typeface="Bauhaus 93" panose="04030905020B02020C02" pitchFamily="82" charset="0"/>
-                    <a:ea typeface="ヒラギノ角ゴ Pro W3" pitchFamily="-126" charset="-128"/>
-                    <a:cs typeface="Calibri" panose="020F0502020204030204" pitchFamily="34" charset="0"/>
-                  </a:rPr>
-                  <a:t>.</a:t>
-                </a:r>
-                <a:endParaRPr lang="en-US" sz="2400" dirty="0">
-                  <a:solidFill>
-                    <a:srgbClr val="C0504D">
-                      <a:lumMod val="50000"/>
-                    </a:srgbClr>
-                  </a:solidFill>
-                  <a:latin typeface="Bauhaus 93" panose="04030905020B02020C02" pitchFamily="82" charset="0"/>
-                  <a:ea typeface="ヒラギノ角ゴ Pro W3" pitchFamily="-126" charset="-128"/>
-                </a:endParaRPr>
-              </a:p>
-            </p:txBody>
-          </p:sp>
-        </p:grpSp>
-        <p:sp>
-          <p:nvSpPr>
-            <p:cNvPr id="113" name="TextBox 112">
-              <a:extLst>
-                <a:ext uri="{FF2B5EF4-FFF2-40B4-BE49-F238E27FC236}">
-                  <a16:creationId xmlns:a16="http://schemas.microsoft.com/office/drawing/2014/main" id="{5C5B2160-5AF0-EE2E-8780-6C035C018F8D}"/>
-                </a:ext>
-              </a:extLst>
-            </p:cNvPr>
-            <p:cNvSpPr txBox="1"/>
-            <p:nvPr/>
-          </p:nvSpPr>
-          <p:spPr>
-            <a:xfrm>
-              <a:off x="4043716" y="1645076"/>
-              <a:ext cx="151150" cy="276999"/>
-            </a:xfrm>
-            <a:prstGeom prst="rect">
-              <a:avLst/>
-            </a:prstGeom>
-            <a:noFill/>
-          </p:spPr>
-          <p:txBody>
-            <a:bodyPr wrap="square" lIns="0" tIns="0" rIns="0" bIns="0">
-              <a:spAutoFit/>
-            </a:bodyPr>
-            <a:lstStyle/>
-            <a:p>
-              <a:pPr algn="ctr" defTabSz="609585" fontAlgn="base">
-                <a:spcBef>
-                  <a:spcPct val="0"/>
-                </a:spcBef>
-                <a:spcAft>
-                  <a:spcPct val="0"/>
-                </a:spcAft>
-              </a:pPr>
-              <a:r>
-                <a:rPr lang="en-US" sz="2400" b="1" kern="0" dirty="0">
-                  <a:solidFill>
-                    <a:srgbClr val="C0504D">
-                      <a:lumMod val="50000"/>
-                    </a:srgbClr>
-                  </a:solidFill>
-                  <a:latin typeface="Bauhaus 93" panose="04030905020B02020C02" pitchFamily="82" charset="0"/>
-                  <a:ea typeface="ヒラギノ角ゴ Pro W3" pitchFamily="-126" charset="-128"/>
-                  <a:cs typeface="Calibri" panose="020F0502020204030204" pitchFamily="34" charset="0"/>
-                </a:rPr>
-                <a:t>.</a:t>
-              </a:r>
-              <a:endParaRPr lang="en-US" sz="2400" dirty="0">
-                <a:solidFill>
-                  <a:srgbClr val="C0504D">
-                    <a:lumMod val="50000"/>
-                  </a:srgbClr>
-                </a:solidFill>
-                <a:latin typeface="Bauhaus 93" panose="04030905020B02020C02" pitchFamily="82" charset="0"/>
-                <a:ea typeface="ヒラギノ角ゴ Pro W3" pitchFamily="-126" charset="-128"/>
-              </a:endParaRPr>
-            </a:p>
-          </p:txBody>
-        </p:sp>
-      </p:grpSp>
-      <p:sp>
-        <p:nvSpPr>
-          <p:cNvPr id="118" name="Rectangle 117">
-            <a:extLst>
-              <a:ext uri="{FF2B5EF4-FFF2-40B4-BE49-F238E27FC236}">
-                <a16:creationId xmlns:a16="http://schemas.microsoft.com/office/drawing/2014/main" id="{07228333-7421-79A4-3D4B-11228B016D27}"/>
+                <a16:creationId xmlns:a16="http://schemas.microsoft.com/office/drawing/2014/main" id="{E01B8646-43F9-B9AA-473D-512AE79FE014}"/>
               </a:ext>
             </a:extLst>
           </p:cNvPr>
@@ -28323,7 +28914,7 @@
     </p:spTree>
     <p:extLst>
       <p:ext uri="{BB962C8B-B14F-4D97-AF65-F5344CB8AC3E}">
-        <p14:creationId xmlns:p14="http://schemas.microsoft.com/office/powerpoint/2010/main" val="2161474623"/>
+        <p14:creationId xmlns:p14="http://schemas.microsoft.com/office/powerpoint/2010/main" val="2176042660"/>
       </p:ext>
     </p:extLst>
   </p:cSld>
@@ -32019,6 +32610,30 @@
 </file>
 
 <file path=customXml/item1.xml><?xml version="1.0" encoding="utf-8"?>
+<p:properties xmlns:p="http://schemas.microsoft.com/office/2006/metadata/properties" xmlns:xsi="http://www.w3.org/2001/XMLSchema-instance" xmlns:pc="http://schemas.microsoft.com/office/infopath/2007/PartnerControls">
+  <documentManagement>
+    <SharedWithUsers xmlns="5bceed9a-bae5-4329-97ef-b259bd0b225e">
+      <UserInfo>
+        <DisplayName>Ambrose, Nalini</DisplayName>
+        <AccountId>13</AccountId>
+        <AccountType/>
+      </UserInfo>
+      <UserInfo>
+        <DisplayName>Lyall, Jessica</DisplayName>
+        <AccountId>178</AccountId>
+        <AccountType/>
+      </UserInfo>
+      <UserInfo>
+        <DisplayName>Horbachevsky, Olexa</DisplayName>
+        <AccountId>10</AccountId>
+        <AccountType/>
+      </UserInfo>
+    </SharedWithUsers>
+  </documentManagement>
+</p:properties>
+</file>
+
+<file path=customXml/item2.xml><?xml version="1.0" encoding="utf-8"?>
 <?mso-contentType ?>
 <FormTemplates xmlns="http://schemas.microsoft.com/sharepoint/v3/contenttype/forms">
   <Display>DocumentLibraryForm</Display>
@@ -32027,7 +32642,7 @@
 </FormTemplates>
 </file>
 
-<file path=customXml/item2.xml><?xml version="1.0" encoding="utf-8"?>
+<file path=customXml/item3.xml><?xml version="1.0" encoding="utf-8"?>
 <ct:contentTypeSchema xmlns:ct="http://schemas.microsoft.com/office/2006/metadata/contentType" xmlns:ma="http://schemas.microsoft.com/office/2006/metadata/properties/metaAttributes" ct:_="" ma:_="" ma:contentTypeName="Document" ma:contentTypeID="0x01010060F70DC8A1530E4DB178FA35EDE5F39D" ma:contentTypeVersion="9" ma:contentTypeDescription="Create a new document." ma:contentTypeScope="" ma:versionID="1cce1fca9ce763ed11fa19bdb0fe8b1d">
   <xsd:schema xmlns:xsd="http://www.w3.org/2001/XMLSchema" xmlns:xs="http://www.w3.org/2001/XMLSchema" xmlns:p="http://schemas.microsoft.com/office/2006/metadata/properties" xmlns:ns2="5bceed9a-bae5-4329-97ef-b259bd0b225e" xmlns:ns3="c6e6fbc9-cbf1-42ee-bbf0-d6e110e2b732" targetNamespace="http://schemas.microsoft.com/office/2006/metadata/properties" ma:root="true" ma:fieldsID="3cf6b5d0f0e239b418ef18793d4ad570" ns2:_="" ns3:_="">
     <xsd:import namespace="5bceed9a-bae5-4329-97ef-b259bd0b225e"/>
@@ -32224,31 +32839,24 @@
 </ct:contentTypeSchema>
 </file>
 
-<file path=customXml/item3.xml><?xml version="1.0" encoding="utf-8"?>
-<p:properties xmlns:p="http://schemas.microsoft.com/office/2006/metadata/properties" xmlns:xsi="http://www.w3.org/2001/XMLSchema-instance" xmlns:pc="http://schemas.microsoft.com/office/infopath/2007/PartnerControls">
-  <documentManagement>
-    <SharedWithUsers xmlns="5bceed9a-bae5-4329-97ef-b259bd0b225e">
-      <UserInfo>
-        <DisplayName>Ambrose, Nalini</DisplayName>
-        <AccountId>13</AccountId>
-        <AccountType/>
-      </UserInfo>
-      <UserInfo>
-        <DisplayName>Lyall, Jessica</DisplayName>
-        <AccountId>178</AccountId>
-        <AccountType/>
-      </UserInfo>
-      <UserInfo>
-        <DisplayName>Horbachevsky, Olexa</DisplayName>
-        <AccountId>10</AccountId>
-        <AccountType/>
-      </UserInfo>
-    </SharedWithUsers>
-  </documentManagement>
-</p:properties>
+<file path=customXml/itemProps1.xml><?xml version="1.0" encoding="utf-8"?>
+<ds:datastoreItem xmlns:ds="http://schemas.openxmlformats.org/officeDocument/2006/customXml" ds:itemID="{5450FCDD-08B1-48D8-BB50-7A17E590A5EE}">
+  <ds:schemaRefs>
+    <ds:schemaRef ds:uri="http://purl.org/dc/terms/"/>
+    <ds:schemaRef ds:uri="http://schemas.openxmlformats.org/package/2006/metadata/core-properties"/>
+    <ds:schemaRef ds:uri="http://purl.org/dc/dcmitype/"/>
+    <ds:schemaRef ds:uri="http://schemas.microsoft.com/office/infopath/2007/PartnerControls"/>
+    <ds:schemaRef ds:uri="http://schemas.microsoft.com/office/2006/documentManagement/types"/>
+    <ds:schemaRef ds:uri="5bceed9a-bae5-4329-97ef-b259bd0b225e"/>
+    <ds:schemaRef ds:uri="http://purl.org/dc/elements/1.1/"/>
+    <ds:schemaRef ds:uri="http://schemas.microsoft.com/office/2006/metadata/properties"/>
+    <ds:schemaRef ds:uri="c6e6fbc9-cbf1-42ee-bbf0-d6e110e2b732"/>
+    <ds:schemaRef ds:uri="http://www.w3.org/XML/1998/namespace"/>
+  </ds:schemaRefs>
+</ds:datastoreItem>
 </file>
 
-<file path=customXml/itemProps1.xml><?xml version="1.0" encoding="utf-8"?>
+<file path=customXml/itemProps2.xml><?xml version="1.0" encoding="utf-8"?>
 <ds:datastoreItem xmlns:ds="http://schemas.openxmlformats.org/officeDocument/2006/customXml" ds:itemID="{416BA5C9-2D71-4B86-AE8A-8C0D9BC5FB22}">
   <ds:schemaRefs>
     <ds:schemaRef ds:uri="http://schemas.microsoft.com/sharepoint/v3/contenttype/forms"/>
@@ -32256,7 +32864,7 @@
 </ds:datastoreItem>
 </file>
 
-<file path=customXml/itemProps2.xml><?xml version="1.0" encoding="utf-8"?>
+<file path=customXml/itemProps3.xml><?xml version="1.0" encoding="utf-8"?>
 <ds:datastoreItem xmlns:ds="http://schemas.openxmlformats.org/officeDocument/2006/customXml" ds:itemID="{689E3714-0C22-4FB6-8F0B-6642022266DD}">
   <ds:schemaRefs>
     <ds:schemaRef ds:uri="http://schemas.microsoft.com/office/2006/metadata/contentType"/>
@@ -32273,21 +32881,4 @@
     <ds:schemaRef ds:uri="http://schemas.microsoft.com/internal/obd"/>
   </ds:schemaRefs>
 </ds:datastoreItem>
-</file>
-
-<file path=customXml/itemProps3.xml><?xml version="1.0" encoding="utf-8"?>
-<ds:datastoreItem xmlns:ds="http://schemas.openxmlformats.org/officeDocument/2006/customXml" ds:itemID="{5450FCDD-08B1-48D8-BB50-7A17E590A5EE}">
-  <ds:schemaRefs>
-    <ds:schemaRef ds:uri="http://purl.org/dc/terms/"/>
-    <ds:schemaRef ds:uri="http://schemas.openxmlformats.org/package/2006/metadata/core-properties"/>
-    <ds:schemaRef ds:uri="http://purl.org/dc/dcmitype/"/>
-    <ds:schemaRef ds:uri="http://schemas.microsoft.com/office/infopath/2007/PartnerControls"/>
-    <ds:schemaRef ds:uri="http://schemas.microsoft.com/office/2006/documentManagement/types"/>
-    <ds:schemaRef ds:uri="5bceed9a-bae5-4329-97ef-b259bd0b225e"/>
-    <ds:schemaRef ds:uri="http://purl.org/dc/elements/1.1/"/>
-    <ds:schemaRef ds:uri="http://schemas.microsoft.com/office/2006/metadata/properties"/>
-    <ds:schemaRef ds:uri="c6e6fbc9-cbf1-42ee-bbf0-d6e110e2b732"/>
-    <ds:schemaRef ds:uri="http://www.w3.org/XML/1998/namespace"/>
-  </ds:schemaRefs>
-</ds:datastoreItem>
 </file>